--- a/mit-liftlab-2026/MIT_LiftLab_2026_Definitiva_EN.pptx
+++ b/mit-liftlab-2026/MIT_LiftLab_2026_Definitiva_EN.pptx
@@ -4,21 +4,24 @@
   <p:sldMasterIdLst>
     <p:sldMasterId id="2147483648" r:id="rId1"/>
   </p:sldMasterIdLst>
+  <p:notesMasterIdLst>
+    <p:notesMasterId r:id="rId14"/>
+  </p:notesMasterIdLst>
   <p:sldIdLst>
-    <p:sldId id="256" r:id="rId7"/>
-    <p:sldId id="257" r:id="rId9"/>
-    <p:sldId id="258" r:id="rId10"/>
-    <p:sldId id="259" r:id="rId11"/>
-    <p:sldId id="260" r:id="rId12"/>
-    <p:sldId id="261" r:id="rId13"/>
-    <p:sldId id="262" r:id="rId14"/>
-    <p:sldId id="263" r:id="rId15"/>
-    <p:sldId id="264" r:id="rId16"/>
-    <p:sldId id="265" r:id="rId17"/>
-    <p:sldId id="266" r:id="rId18"/>
-    <p:sldId id="267" r:id="rId19"/>
+    <p:sldId id="256" r:id="rId2"/>
+    <p:sldId id="257" r:id="rId3"/>
+    <p:sldId id="258" r:id="rId4"/>
+    <p:sldId id="259" r:id="rId5"/>
+    <p:sldId id="260" r:id="rId6"/>
+    <p:sldId id="261" r:id="rId7"/>
+    <p:sldId id="262" r:id="rId8"/>
+    <p:sldId id="263" r:id="rId9"/>
+    <p:sldId id="264" r:id="rId10"/>
+    <p:sldId id="265" r:id="rId11"/>
+    <p:sldId id="266" r:id="rId12"/>
+    <p:sldId id="267" r:id="rId13"/>
   </p:sldIdLst>
-  <p:sldSz cx="12188952" cy="6858000" type="screen4x3"/>
+  <p:sldSz cx="12188825" cy="6858000"/>
   <p:notesSz cx="6858000" cy="9144000"/>
   <p:defaultTextStyle>
     <a:defPPr>
@@ -115,11 +118,27 @@
       </a:defRPr>
     </a:lvl9pPr>
   </p:defaultTextStyle>
+  <p:extLst>
+    <p:ext uri="{EFAFB233-063F-42B5-8137-9DF3F51BA10A}">
+      <p15:sldGuideLst xmlns:p15="http://schemas.microsoft.com/office/powerpoint/2012/main">
+        <p15:guide id="1" orient="horz" pos="2160">
+          <p15:clr>
+            <a:srgbClr val="A4A3A4"/>
+          </p15:clr>
+        </p15:guide>
+        <p15:guide id="2" pos="2880">
+          <p15:clr>
+            <a:srgbClr val="A4A3A4"/>
+          </p15:clr>
+        </p15:guide>
+      </p15:sldGuideLst>
+    </p:ext>
+  </p:extLst>
 </p:presentation>
 </file>
 
 <file path=ppt/notesMasters/notesMaster1.xml><?xml version="1.0" encoding="utf-8"?>
-<p:notesMaster xmlns:a="http://schemas.openxmlformats.org/drawingml/2006/main" xmlns:p="http://schemas.openxmlformats.org/presentationml/2006/main" xmlns:r="http://schemas.openxmlformats.org/officeDocument/2006/relationships">
+<p:notesMaster xmlns:a="http://schemas.openxmlformats.org/drawingml/2006/main" xmlns:r="http://schemas.openxmlformats.org/officeDocument/2006/relationships" xmlns:p="http://schemas.openxmlformats.org/presentationml/2006/main">
   <p:cSld>
     <p:bg>
       <p:bgRef idx="1001">
@@ -140,241 +159,16 @@
           <a:chExt cx="0" cy="0"/>
         </a:xfrm>
       </p:grpSpPr>
-      <p:sp>
-        <p:nvSpPr>
-          <p:cNvPr id="2" name="Header Placeholder 1"/>
-          <p:cNvSpPr>
-            <a:spLocks noGrp="1"/>
-          </p:cNvSpPr>
-          <p:nvPr>
-            <p:ph type="hdr" sz="quarter"/>
-          </p:nvPr>
-        </p:nvSpPr>
-        <p:spPr>
-          <a:xfrm>
-            <a:off x="0" y="0"/>
-            <a:ext cx="2971800" cy="457200"/>
-          </a:xfrm>
-          <a:prstGeom prst="rect">
-            <a:avLst/>
-          </a:prstGeom>
-        </p:spPr>
-        <p:txBody>
-          <a:bodyPr vert="horz" lIns="91440" tIns="45720" rIns="91440" bIns="45720" rtlCol="0"/>
-          <a:lstStyle>
-            <a:lvl1pPr algn="l">
-              <a:defRPr sz="1200"/>
-            </a:lvl1pPr>
-          </a:lstStyle>
-          <a:p>
-            <a:endParaRPr lang="en-US"/>
-          </a:p>
-        </p:txBody>
-      </p:sp>
-      <p:sp>
-        <p:nvSpPr>
-          <p:cNvPr id="3" name="Date Placeholder 2"/>
-          <p:cNvSpPr>
-            <a:spLocks noGrp="1"/>
-          </p:cNvSpPr>
-          <p:nvPr>
-            <p:ph type="dt" idx="1"/>
-          </p:nvPr>
-        </p:nvSpPr>
-        <p:spPr>
-          <a:xfrm>
-            <a:off x="3884613" y="0"/>
-            <a:ext cx="2971800" cy="457200"/>
-          </a:xfrm>
-          <a:prstGeom prst="rect">
-            <a:avLst/>
-          </a:prstGeom>
-        </p:spPr>
-        <p:txBody>
-          <a:bodyPr vert="horz" lIns="91440" tIns="45720" rIns="91440" bIns="45720" rtlCol="0"/>
-          <a:lstStyle>
-            <a:lvl1pPr algn="r">
-              <a:defRPr sz="1200"/>
-            </a:lvl1pPr>
-          </a:lstStyle>
-          <a:p>
-            <a:fld id="{0F89C1C7-3DCD-1040-A9CF-14679D8B5DDD}" type="datetimeFigureOut">
-              <a:rPr lang="en-US" smtClean="0"/>
-              <a:t>10/17/16</a:t>
-            </a:fld>
-            <a:endParaRPr lang="en-US"/>
-          </a:p>
-        </p:txBody>
-      </p:sp>
-      <p:sp>
-        <p:nvSpPr>
-          <p:cNvPr id="4" name="Slide Image Placeholder 3"/>
-          <p:cNvSpPr>
-            <a:spLocks noGrp="1" noRot="1" noChangeAspect="1"/>
-          </p:cNvSpPr>
-          <p:nvPr>
-            <p:ph type="sldImg" idx="2"/>
-          </p:nvPr>
-        </p:nvSpPr>
-        <p:spPr>
-          <a:xfrm>
-            <a:off x="1143000" y="685800"/>
-            <a:ext cx="4572000" cy="3429000"/>
-          </a:xfrm>
-          <a:prstGeom prst="rect">
-            <a:avLst/>
-          </a:prstGeom>
-          <a:noFill/>
-          <a:ln w="12700">
-            <a:solidFill>
-              <a:prstClr val="black"/>
-            </a:solidFill>
-          </a:ln>
-        </p:spPr>
-        <p:txBody>
-          <a:bodyPr vert="horz" lIns="91440" tIns="45720" rIns="91440" bIns="45720" rtlCol="0" anchor="ctr"/>
-          <a:lstStyle/>
-          <a:p>
-            <a:endParaRPr lang="en-US"/>
-          </a:p>
-        </p:txBody>
-      </p:sp>
-      <p:sp>
-        <p:nvSpPr>
-          <p:cNvPr id="5" name="Notes Placeholder 4"/>
-          <p:cNvSpPr>
-            <a:spLocks noGrp="1"/>
-          </p:cNvSpPr>
-          <p:nvPr>
-            <p:ph type="body" sz="quarter" idx="3"/>
-          </p:nvPr>
-        </p:nvSpPr>
-        <p:spPr>
-          <a:xfrm>
-            <a:off x="685800" y="4343400"/>
-            <a:ext cx="5486400" cy="4114800"/>
-          </a:xfrm>
-          <a:prstGeom prst="rect">
-            <a:avLst/>
-          </a:prstGeom>
-        </p:spPr>
-        <p:txBody>
-          <a:bodyPr vert="horz" lIns="91440" tIns="45720" rIns="91440" bIns="45720" rtlCol="0"/>
-          <a:lstStyle/>
-          <a:p>
-            <a:pPr lvl="0"/>
-            <a:r>
-              <a:rPr lang="en-US" smtClean="0"/>
-              <a:t>Click to edit Master text styles</a:t>
-            </a:r>
-          </a:p>
-          <a:p>
-            <a:pPr lvl="1"/>
-            <a:r>
-              <a:rPr lang="en-US" smtClean="0"/>
-              <a:t>Second level</a:t>
-            </a:r>
-          </a:p>
-          <a:p>
-            <a:pPr lvl="2"/>
-            <a:r>
-              <a:rPr lang="en-US" smtClean="0"/>
-              <a:t>Third level</a:t>
-            </a:r>
-          </a:p>
-          <a:p>
-            <a:pPr lvl="3"/>
-            <a:r>
-              <a:rPr lang="en-US" smtClean="0"/>
-              <a:t>Fourth level</a:t>
-            </a:r>
-          </a:p>
-          <a:p>
-            <a:pPr lvl="4"/>
-            <a:r>
-              <a:rPr lang="en-US" smtClean="0"/>
-              <a:t>Fifth level</a:t>
-            </a:r>
-            <a:endParaRPr lang="en-US"/>
-          </a:p>
-        </p:txBody>
-      </p:sp>
-      <p:sp>
-        <p:nvSpPr>
-          <p:cNvPr id="6" name="Footer Placeholder 5"/>
-          <p:cNvSpPr>
-            <a:spLocks noGrp="1"/>
-          </p:cNvSpPr>
-          <p:nvPr>
-            <p:ph type="ftr" sz="quarter" idx="4"/>
-          </p:nvPr>
-        </p:nvSpPr>
-        <p:spPr>
-          <a:xfrm>
-            <a:off x="0" y="8685213"/>
-            <a:ext cx="2971800" cy="457200"/>
-          </a:xfrm>
-          <a:prstGeom prst="rect">
-            <a:avLst/>
-          </a:prstGeom>
-        </p:spPr>
-        <p:txBody>
-          <a:bodyPr vert="horz" lIns="91440" tIns="45720" rIns="91440" bIns="45720" rtlCol="0" anchor="b"/>
-          <a:lstStyle>
-            <a:lvl1pPr algn="l">
-              <a:defRPr sz="1200"/>
-            </a:lvl1pPr>
-          </a:lstStyle>
-          <a:p>
-            <a:endParaRPr lang="en-US"/>
-          </a:p>
-        </p:txBody>
-      </p:sp>
-      <p:sp>
-        <p:nvSpPr>
-          <p:cNvPr id="7" name="Slide Number Placeholder 6"/>
-          <p:cNvSpPr>
-            <a:spLocks noGrp="1"/>
-          </p:cNvSpPr>
-          <p:nvPr>
-            <p:ph type="sldNum" sz="quarter" idx="5"/>
-          </p:nvPr>
-        </p:nvSpPr>
-        <p:spPr>
-          <a:xfrm>
-            <a:off x="3884613" y="8685213"/>
-            <a:ext cx="2971800" cy="457200"/>
-          </a:xfrm>
-          <a:prstGeom prst="rect">
-            <a:avLst/>
-          </a:prstGeom>
-        </p:spPr>
-        <p:txBody>
-          <a:bodyPr vert="horz" lIns="91440" tIns="45720" rIns="91440" bIns="45720" rtlCol="0" anchor="b"/>
-          <a:lstStyle>
-            <a:lvl1pPr algn="r">
-              <a:defRPr sz="1200"/>
-            </a:lvl1pPr>
-          </a:lstStyle>
-          <a:p>
-            <a:fld id="{BB5E49A5-4136-284D-997B-48E1D791AD67}" type="slidenum">
-              <a:rPr lang="en-US" smtClean="0"/>
-              <a:t>‹#›</a:t>
-            </a:fld>
-            <a:endParaRPr lang="en-US"/>
-          </a:p>
-        </p:txBody>
-      </p:sp>
     </p:spTree>
     <p:extLst>
       <p:ext uri="{BB962C8B-B14F-4D97-AF65-F5344CB8AC3E}">
-        <p14:creationId xmlns:p14="http://schemas.microsoft.com/office/powerpoint/2010/main" val="2623252185"/>
+        <p14:creationId xmlns:p14="http://schemas.microsoft.com/office/powerpoint/2010/main" val="83386579"/>
       </p:ext>
     </p:extLst>
   </p:cSld>
   <p:clrMap bg1="lt1" tx1="dk1" bg2="lt2" tx2="dk2" accent1="accent1" accent2="accent2" accent3="accent3" accent4="accent4" accent5="accent5" accent6="accent6" hlink="hlink" folHlink="folHlink"/>
   <p:notesStyle>
-    <a:lvl1pPr marL="0" algn="l" defTabSz="457200" rtl="0" eaLnBrk="1" latinLnBrk="0" hangingPunct="1">
+    <a:lvl1pPr marL="0" algn="l" defTabSz="914400" rtl="0" eaLnBrk="1" latinLnBrk="0" hangingPunct="1">
       <a:defRPr sz="1200" kern="1200">
         <a:solidFill>
           <a:schemeClr val="tx1"/>
@@ -384,7 +178,7 @@
         <a:cs typeface="+mn-cs"/>
       </a:defRPr>
     </a:lvl1pPr>
-    <a:lvl2pPr marL="457200" algn="l" defTabSz="457200" rtl="0" eaLnBrk="1" latinLnBrk="0" hangingPunct="1">
+    <a:lvl2pPr marL="457200" algn="l" defTabSz="914400" rtl="0" eaLnBrk="1" latinLnBrk="0" hangingPunct="1">
       <a:defRPr sz="1200" kern="1200">
         <a:solidFill>
           <a:schemeClr val="tx1"/>
@@ -394,7 +188,7 @@
         <a:cs typeface="+mn-cs"/>
       </a:defRPr>
     </a:lvl2pPr>
-    <a:lvl3pPr marL="914400" algn="l" defTabSz="457200" rtl="0" eaLnBrk="1" latinLnBrk="0" hangingPunct="1">
+    <a:lvl3pPr marL="914400" algn="l" defTabSz="914400" rtl="0" eaLnBrk="1" latinLnBrk="0" hangingPunct="1">
       <a:defRPr sz="1200" kern="1200">
         <a:solidFill>
           <a:schemeClr val="tx1"/>
@@ -404,7 +198,7 @@
         <a:cs typeface="+mn-cs"/>
       </a:defRPr>
     </a:lvl3pPr>
-    <a:lvl4pPr marL="1371600" algn="l" defTabSz="457200" rtl="0" eaLnBrk="1" latinLnBrk="0" hangingPunct="1">
+    <a:lvl4pPr marL="1371600" algn="l" defTabSz="914400" rtl="0" eaLnBrk="1" latinLnBrk="0" hangingPunct="1">
       <a:defRPr sz="1200" kern="1200">
         <a:solidFill>
           <a:schemeClr val="tx1"/>
@@ -414,7 +208,7 @@
         <a:cs typeface="+mn-cs"/>
       </a:defRPr>
     </a:lvl4pPr>
-    <a:lvl5pPr marL="1828800" algn="l" defTabSz="457200" rtl="0" eaLnBrk="1" latinLnBrk="0" hangingPunct="1">
+    <a:lvl5pPr marL="1828800" algn="l" defTabSz="914400" rtl="0" eaLnBrk="1" latinLnBrk="0" hangingPunct="1">
       <a:defRPr sz="1200" kern="1200">
         <a:solidFill>
           <a:schemeClr val="tx1"/>
@@ -424,7 +218,7 @@
         <a:cs typeface="+mn-cs"/>
       </a:defRPr>
     </a:lvl5pPr>
-    <a:lvl6pPr marL="2286000" algn="l" defTabSz="457200" rtl="0" eaLnBrk="1" latinLnBrk="0" hangingPunct="1">
+    <a:lvl6pPr marL="2286000" algn="l" defTabSz="914400" rtl="0" eaLnBrk="1" latinLnBrk="0" hangingPunct="1">
       <a:defRPr sz="1200" kern="1200">
         <a:solidFill>
           <a:schemeClr val="tx1"/>
@@ -434,7 +228,7 @@
         <a:cs typeface="+mn-cs"/>
       </a:defRPr>
     </a:lvl6pPr>
-    <a:lvl7pPr marL="2743200" algn="l" defTabSz="457200" rtl="0" eaLnBrk="1" latinLnBrk="0" hangingPunct="1">
+    <a:lvl7pPr marL="2743200" algn="l" defTabSz="914400" rtl="0" eaLnBrk="1" latinLnBrk="0" hangingPunct="1">
       <a:defRPr sz="1200" kern="1200">
         <a:solidFill>
           <a:schemeClr val="tx1"/>
@@ -444,7 +238,7 @@
         <a:cs typeface="+mn-cs"/>
       </a:defRPr>
     </a:lvl7pPr>
-    <a:lvl8pPr marL="3200400" algn="l" defTabSz="457200" rtl="0" eaLnBrk="1" latinLnBrk="0" hangingPunct="1">
+    <a:lvl8pPr marL="3200400" algn="l" defTabSz="914400" rtl="0" eaLnBrk="1" latinLnBrk="0" hangingPunct="1">
       <a:defRPr sz="1200" kern="1200">
         <a:solidFill>
           <a:schemeClr val="tx1"/>
@@ -454,7 +248,7 @@
         <a:cs typeface="+mn-cs"/>
       </a:defRPr>
     </a:lvl8pPr>
-    <a:lvl9pPr marL="3657600" algn="l" defTabSz="457200" rtl="0" eaLnBrk="1" latinLnBrk="0" hangingPunct="1">
+    <a:lvl9pPr marL="3657600" algn="l" defTabSz="914400" rtl="0" eaLnBrk="1" latinLnBrk="0" hangingPunct="1">
       <a:defRPr sz="1200" kern="1200">
         <a:solidFill>
           <a:schemeClr val="tx1"/>
@@ -469,7 +263,7 @@
 </file>
 
 <file path=ppt/notesSlides/notesSlide1.xml><?xml version="1.0" encoding="utf-8"?>
-<p:notes xmlns:a="http://schemas.openxmlformats.org/drawingml/2006/main" xmlns:p="http://schemas.openxmlformats.org/presentationml/2006/main" xmlns:r="http://schemas.openxmlformats.org/officeDocument/2006/relationships">
+<p:notes xmlns:a="http://schemas.openxmlformats.org/drawingml/2006/main" xmlns:r="http://schemas.openxmlformats.org/officeDocument/2006/relationships" xmlns:p="http://schemas.openxmlformats.org/presentationml/2006/main">
   <p:cSld>
     <p:spTree>
       <p:nvGrpSpPr>
@@ -489,7 +283,7 @@
         <p:nvSpPr>
           <p:cNvPr id="2" name="Slide Image Placeholder 1"/>
           <p:cNvSpPr>
-            <a:spLocks noGrp="1"/>
+            <a:spLocks noGrp="1" noRot="1" noChangeAspect="1"/>
           </p:cNvSpPr>
           <p:nvPr>
             <p:ph type="sldImg" idx="2"/>
@@ -504,7 +298,7 @@
             <a:spLocks noGrp="1"/>
           </p:cNvSpPr>
           <p:nvPr>
-            <p:ph type="body" idx="3" sz="quarter"/>
+            <p:ph type="body" sz="quarter" idx="3"/>
           </p:nvPr>
         </p:nvSpPr>
         <p:spPr/>
@@ -518,7 +312,7 @@
           </a:p>
           <a:p>
             <a:r>
-              <a:t>Fernanda: 'MIT gave us a question. This is our answer in four acts — and we start with the failure.'</a:t>
+              <a:t>Fernanda: 'MIT nos lanzó una pregunta. Esta es nuestra respuesta en cuatro actos — y empezamos por el fracaso.'</a:t>
             </a:r>
           </a:p>
         </p:txBody>
@@ -530,7 +324,7 @@
             <a:spLocks noGrp="1"/>
           </p:cNvSpPr>
           <p:nvPr>
-            <p:ph type="sldNum" idx="5" sz="quarter"/>
+            <p:ph type="sldNum" sz="quarter" idx="5"/>
           </p:nvPr>
         </p:nvSpPr>
         <p:spPr/>
@@ -544,7 +338,7 @@
 </file>
 
 <file path=ppt/notesSlides/notesSlide10.xml><?xml version="1.0" encoding="utf-8"?>
-<p:notes xmlns:a="http://schemas.openxmlformats.org/drawingml/2006/main" xmlns:p="http://schemas.openxmlformats.org/presentationml/2006/main" xmlns:r="http://schemas.openxmlformats.org/officeDocument/2006/relationships">
+<p:notes xmlns:a="http://schemas.openxmlformats.org/drawingml/2006/main" xmlns:r="http://schemas.openxmlformats.org/officeDocument/2006/relationships" xmlns:p="http://schemas.openxmlformats.org/presentationml/2006/main">
   <p:cSld>
     <p:spTree>
       <p:nvGrpSpPr>
@@ -564,7 +358,7 @@
         <p:nvSpPr>
           <p:cNvPr id="2" name="Slide Image Placeholder 1"/>
           <p:cNvSpPr>
-            <a:spLocks noGrp="1"/>
+            <a:spLocks noGrp="1" noRot="1" noChangeAspect="1"/>
           </p:cNvSpPr>
           <p:nvPr>
             <p:ph type="sldImg" idx="2"/>
@@ -579,7 +373,7 @@
             <a:spLocks noGrp="1"/>
           </p:cNvSpPr>
           <p:nvPr>
-            <p:ph type="body" idx="3" sz="quarter"/>
+            <p:ph type="body" sz="quarter" idx="3"/>
           </p:nvPr>
         </p:nvSpPr>
         <p:spPr/>
@@ -588,12 +382,12 @@
           <a:lstStyle/>
           <a:p>
             <a:r>
-              <a:t>[S10 — HONESTY]</a:t>
-            </a:r>
-          </a:p>
-          <a:p>
-            <a:r>
-              <a:t>Carlos: 'At MIT they expect intellectual rigor. That's why we're explicit about what we know, assume, and don't know.'</a:t>
+              <a:t>[S10 — HONESTIDAD]</a:t>
+            </a:r>
+          </a:p>
+          <a:p>
+            <a:r>
+              <a:t>Carlos: 'En el MIT esperan rigor intelectual. Por eso somos explícitos sobre lo que sabemos, asumimos y no sabemos.'</a:t>
             </a:r>
           </a:p>
         </p:txBody>
@@ -605,7 +399,7 @@
             <a:spLocks noGrp="1"/>
           </p:cNvSpPr>
           <p:nvPr>
-            <p:ph type="sldNum" idx="5" sz="quarter"/>
+            <p:ph type="sldNum" sz="quarter" idx="5"/>
           </p:nvPr>
         </p:nvSpPr>
         <p:spPr/>
@@ -619,7 +413,7 @@
 </file>
 
 <file path=ppt/notesSlides/notesSlide11.xml><?xml version="1.0" encoding="utf-8"?>
-<p:notes xmlns:a="http://schemas.openxmlformats.org/drawingml/2006/main" xmlns:p="http://schemas.openxmlformats.org/presentationml/2006/main" xmlns:r="http://schemas.openxmlformats.org/officeDocument/2006/relationships">
+<p:notes xmlns:a="http://schemas.openxmlformats.org/drawingml/2006/main" xmlns:r="http://schemas.openxmlformats.org/officeDocument/2006/relationships" xmlns:p="http://schemas.openxmlformats.org/presentationml/2006/main">
   <p:cSld>
     <p:spTree>
       <p:nvGrpSpPr>
@@ -639,7 +433,7 @@
         <p:nvSpPr>
           <p:cNvPr id="2" name="Slide Image Placeholder 1"/>
           <p:cNvSpPr>
-            <a:spLocks noGrp="1"/>
+            <a:spLocks noGrp="1" noRot="1" noChangeAspect="1"/>
           </p:cNvSpPr>
           <p:nvPr>
             <p:ph type="sldImg" idx="2"/>
@@ -654,7 +448,7 @@
             <a:spLocks noGrp="1"/>
           </p:cNvSpPr>
           <p:nvPr>
-            <p:ph type="body" idx="3" sz="quarter"/>
+            <p:ph type="body" sz="quarter" idx="3"/>
           </p:nvPr>
         </p:nvSpPr>
         <p:spPr/>
@@ -663,12 +457,12 @@
           <a:lstStyle/>
           <a:p>
             <a:r>
-              <a:t>[S11 — EXPERTS]</a:t>
-            </a:r>
-          </a:p>
-          <a:p>
-            <a:r>
-              <a:t>Alexis: 'To not rely only on our own data, we brought the proposal to five experts with radically different perspectives.'</a:t>
+              <a:t>[S11 — EXPERTOS]</a:t>
+            </a:r>
+          </a:p>
+          <a:p>
+            <a:r>
+              <a:t>Alexis: 'Para no quedarnos solo con nuestros datos, llevamos la propuesta a cinco expertos con perspectivas radicalmente distintas.'</a:t>
             </a:r>
           </a:p>
         </p:txBody>
@@ -680,7 +474,7 @@
             <a:spLocks noGrp="1"/>
           </p:cNvSpPr>
           <p:nvPr>
-            <p:ph type="sldNum" idx="5" sz="quarter"/>
+            <p:ph type="sldNum" sz="quarter" idx="5"/>
           </p:nvPr>
         </p:nvSpPr>
         <p:spPr/>
@@ -694,7 +488,7 @@
 </file>
 
 <file path=ppt/notesSlides/notesSlide12.xml><?xml version="1.0" encoding="utf-8"?>
-<p:notes xmlns:a="http://schemas.openxmlformats.org/drawingml/2006/main" xmlns:p="http://schemas.openxmlformats.org/presentationml/2006/main" xmlns:r="http://schemas.openxmlformats.org/officeDocument/2006/relationships">
+<p:notes xmlns:a="http://schemas.openxmlformats.org/drawingml/2006/main" xmlns:r="http://schemas.openxmlformats.org/officeDocument/2006/relationships" xmlns:p="http://schemas.openxmlformats.org/presentationml/2006/main">
   <p:cSld>
     <p:spTree>
       <p:nvGrpSpPr>
@@ -714,7 +508,7 @@
         <p:nvSpPr>
           <p:cNvPr id="2" name="Slide Image Placeholder 1"/>
           <p:cNvSpPr>
-            <a:spLocks noGrp="1"/>
+            <a:spLocks noGrp="1" noRot="1" noChangeAspect="1"/>
           </p:cNvSpPr>
           <p:nvPr>
             <p:ph type="sldImg" idx="2"/>
@@ -729,7 +523,7 @@
             <a:spLocks noGrp="1"/>
           </p:cNvSpPr>
           <p:nvPr>
-            <p:ph type="body" idx="3" sz="quarter"/>
+            <p:ph type="body" sz="quarter" idx="3"/>
           </p:nvPr>
         </p:nvSpPr>
         <p:spPr/>
@@ -738,12 +532,12 @@
           <a:lstStyle/>
           <a:p>
             <a:r>
-              <a:t>[S12 — CLOSE]</a:t>
-            </a:r>
-          </a:p>
-          <a:p>
-            <a:r>
-              <a:t>Fernanda: 'MIT's question was: what stops healthy purchasing? Our answer: not ignorance — structure. And the most effective solution is in the classrooms.'</a:t>
+              <a:t>[S12 — CIERRE]</a:t>
+            </a:r>
+          </a:p>
+          <a:p>
+            <a:r>
+              <a:t>Fernanda: 'La pregunta del MIT fue: ¿qué impide la compra saludable? Nuestra respuesta: no es ignorancia — es estructura. Y la solución más efectiva está en las aulas.'</a:t>
             </a:r>
           </a:p>
         </p:txBody>
@@ -755,7 +549,7 @@
             <a:spLocks noGrp="1"/>
           </p:cNvSpPr>
           <p:nvPr>
-            <p:ph type="sldNum" idx="5" sz="quarter"/>
+            <p:ph type="sldNum" sz="quarter" idx="5"/>
           </p:nvPr>
         </p:nvSpPr>
         <p:spPr/>
@@ -769,7 +563,7 @@
 </file>
 
 <file path=ppt/notesSlides/notesSlide2.xml><?xml version="1.0" encoding="utf-8"?>
-<p:notes xmlns:a="http://schemas.openxmlformats.org/drawingml/2006/main" xmlns:p="http://schemas.openxmlformats.org/presentationml/2006/main" xmlns:r="http://schemas.openxmlformats.org/officeDocument/2006/relationships">
+<p:notes xmlns:a="http://schemas.openxmlformats.org/drawingml/2006/main" xmlns:r="http://schemas.openxmlformats.org/officeDocument/2006/relationships" xmlns:p="http://schemas.openxmlformats.org/presentationml/2006/main">
   <p:cSld>
     <p:spTree>
       <p:nvGrpSpPr>
@@ -789,7 +583,7 @@
         <p:nvSpPr>
           <p:cNvPr id="2" name="Slide Image Placeholder 1"/>
           <p:cNvSpPr>
-            <a:spLocks noGrp="1"/>
+            <a:spLocks noGrp="1" noRot="1" noChangeAspect="1"/>
           </p:cNvSpPr>
           <p:nvPr>
             <p:ph type="sldImg" idx="2"/>
@@ -804,7 +598,7 @@
             <a:spLocks noGrp="1"/>
           </p:cNvSpPr>
           <p:nvPr>
-            <p:ph type="body" idx="3" sz="quarter"/>
+            <p:ph type="body" sz="quarter" idx="3"/>
           </p:nvPr>
         </p:nvSpPr>
         <p:spPr/>
@@ -818,7 +612,7 @@
           </a:p>
           <a:p>
             <a:r>
-              <a:t>Carlos: 'MIT gave us access to 3,040 real field records.'</a:t>
+              <a:t>Carlos: 'El MIT nos dio acceso a 3,040 registros de campo reales.'</a:t>
             </a:r>
           </a:p>
         </p:txBody>
@@ -830,7 +624,7 @@
             <a:spLocks noGrp="1"/>
           </p:cNvSpPr>
           <p:nvPr>
-            <p:ph type="sldNum" idx="5" sz="quarter"/>
+            <p:ph type="sldNum" sz="quarter" idx="5"/>
           </p:nvPr>
         </p:nvSpPr>
         <p:spPr/>
@@ -844,7 +638,7 @@
 </file>
 
 <file path=ppt/notesSlides/notesSlide3.xml><?xml version="1.0" encoding="utf-8"?>
-<p:notes xmlns:a="http://schemas.openxmlformats.org/drawingml/2006/main" xmlns:p="http://schemas.openxmlformats.org/presentationml/2006/main" xmlns:r="http://schemas.openxmlformats.org/officeDocument/2006/relationships">
+<p:notes xmlns:a="http://schemas.openxmlformats.org/drawingml/2006/main" xmlns:r="http://schemas.openxmlformats.org/officeDocument/2006/relationships" xmlns:p="http://schemas.openxmlformats.org/presentationml/2006/main">
   <p:cSld>
     <p:spTree>
       <p:nvGrpSpPr>
@@ -864,7 +658,7 @@
         <p:nvSpPr>
           <p:cNvPr id="2" name="Slide Image Placeholder 1"/>
           <p:cNvSpPr>
-            <a:spLocks noGrp="1"/>
+            <a:spLocks noGrp="1" noRot="1" noChangeAspect="1"/>
           </p:cNvSpPr>
           <p:nvPr>
             <p:ph type="sldImg" idx="2"/>
@@ -879,7 +673,7 @@
             <a:spLocks noGrp="1"/>
           </p:cNvSpPr>
           <p:nvPr>
-            <p:ph type="body" idx="3" sz="quarter"/>
+            <p:ph type="body" sz="quarter" idx="3"/>
           </p:nvPr>
         </p:nvSpPr>
         <p:spPr/>
@@ -888,12 +682,12 @@
           <a:lstStyle/>
           <a:p>
             <a:r>
-              <a:t>[S3 — ACT 1]</a:t>
-            </a:r>
-          </a:p>
-          <a:p>
-            <a:r>
-              <a:t>Carlos: 'R²=0.032. The model explains almost nothing. That failure was our first real finding.'</a:t>
+              <a:t>[S3 — ACTO 1]</a:t>
+            </a:r>
+          </a:p>
+          <a:p>
+            <a:r>
+              <a:t>Carlos: 'R²=0.032. El modelo no explica casi nada. Ese fracaso fue el primer hallazgo real.'</a:t>
             </a:r>
           </a:p>
         </p:txBody>
@@ -905,7 +699,7 @@
             <a:spLocks noGrp="1"/>
           </p:cNvSpPr>
           <p:nvPr>
-            <p:ph type="sldNum" idx="5" sz="quarter"/>
+            <p:ph type="sldNum" sz="quarter" idx="5"/>
           </p:nvPr>
         </p:nvSpPr>
         <p:spPr/>
@@ -919,7 +713,7 @@
 </file>
 
 <file path=ppt/notesSlides/notesSlide4.xml><?xml version="1.0" encoding="utf-8"?>
-<p:notes xmlns:a="http://schemas.openxmlformats.org/drawingml/2006/main" xmlns:p="http://schemas.openxmlformats.org/presentationml/2006/main" xmlns:r="http://schemas.openxmlformats.org/officeDocument/2006/relationships">
+<p:notes xmlns:a="http://schemas.openxmlformats.org/drawingml/2006/main" xmlns:r="http://schemas.openxmlformats.org/officeDocument/2006/relationships" xmlns:p="http://schemas.openxmlformats.org/presentationml/2006/main">
   <p:cSld>
     <p:spTree>
       <p:nvGrpSpPr>
@@ -939,7 +733,7 @@
         <p:nvSpPr>
           <p:cNvPr id="2" name="Slide Image Placeholder 1"/>
           <p:cNvSpPr>
-            <a:spLocks noGrp="1"/>
+            <a:spLocks noGrp="1" noRot="1" noChangeAspect="1"/>
           </p:cNvSpPr>
           <p:nvPr>
             <p:ph type="sldImg" idx="2"/>
@@ -954,7 +748,7 @@
             <a:spLocks noGrp="1"/>
           </p:cNvSpPr>
           <p:nvPr>
-            <p:ph type="body" idx="3" sz="quarter"/>
+            <p:ph type="body" sz="quarter" idx="3"/>
           </p:nvPr>
         </p:nvSpPr>
         <p:spPr/>
@@ -963,12 +757,12 @@
           <a:lstStyle/>
           <a:p>
             <a:r>
-              <a:t>[S4 — ACT 2 STATS]</a:t>
-            </a:r>
-          </a:p>
-          <a:p>
-            <a:r>
-              <a:t>Carlos: '60.8% buys at least one unhealthy product. 50.3% buys ONLY unhealthy. Only 23.7% buys something healthy.'</a:t>
+              <a:t>[S4 — ACTO 2 STATS]</a:t>
+            </a:r>
+          </a:p>
+          <a:p>
+            <a:r>
+              <a:t>Carlos: '60.8% compra al menos un producto no saludable. 50.3% SOLO no saludable. Solo 23.7% compra algo sano.'</a:t>
             </a:r>
           </a:p>
         </p:txBody>
@@ -980,7 +774,7 @@
             <a:spLocks noGrp="1"/>
           </p:cNvSpPr>
           <p:nvPr>
-            <p:ph type="sldNum" idx="5" sz="quarter"/>
+            <p:ph type="sldNum" sz="quarter" idx="5"/>
           </p:nvPr>
         </p:nvSpPr>
         <p:spPr/>
@@ -994,7 +788,7 @@
 </file>
 
 <file path=ppt/notesSlides/notesSlide5.xml><?xml version="1.0" encoding="utf-8"?>
-<p:notes xmlns:a="http://schemas.openxmlformats.org/drawingml/2006/main" xmlns:p="http://schemas.openxmlformats.org/presentationml/2006/main" xmlns:r="http://schemas.openxmlformats.org/officeDocument/2006/relationships">
+<p:notes xmlns:a="http://schemas.openxmlformats.org/drawingml/2006/main" xmlns:r="http://schemas.openxmlformats.org/officeDocument/2006/relationships" xmlns:p="http://schemas.openxmlformats.org/presentationml/2006/main">
   <p:cSld>
     <p:spTree>
       <p:nvGrpSpPr>
@@ -1014,7 +808,7 @@
         <p:nvSpPr>
           <p:cNvPr id="2" name="Slide Image Placeholder 1"/>
           <p:cNvSpPr>
-            <a:spLocks noGrp="1"/>
+            <a:spLocks noGrp="1" noRot="1" noChangeAspect="1"/>
           </p:cNvSpPr>
           <p:nvPr>
             <p:ph type="sldImg" idx="2"/>
@@ -1029,7 +823,7 @@
             <a:spLocks noGrp="1"/>
           </p:cNvSpPr>
           <p:nvPr>
-            <p:ph type="body" idx="3" sz="quarter"/>
+            <p:ph type="body" sz="quarter" idx="3"/>
           </p:nvPr>
         </p:nvSpPr>
         <p:spPr/>
@@ -1043,7 +837,7 @@
           </a:p>
           <a:p>
             <a:r>
-              <a:t>Carlos: 'The system is set up to push unhealthy choices — it's not a people failure.'</a:t>
+              <a:t>Carlos: 'El sistema está diseñado para empujar lo no saludable — no es una falla de las personas.'</a:t>
             </a:r>
           </a:p>
         </p:txBody>
@@ -1055,7 +849,7 @@
             <a:spLocks noGrp="1"/>
           </p:cNvSpPr>
           <p:nvPr>
-            <p:ph type="sldNum" idx="5" sz="quarter"/>
+            <p:ph type="sldNum" sz="quarter" idx="5"/>
           </p:nvPr>
         </p:nvSpPr>
         <p:spPr/>
@@ -1069,7 +863,7 @@
 </file>
 
 <file path=ppt/notesSlides/notesSlide6.xml><?xml version="1.0" encoding="utf-8"?>
-<p:notes xmlns:a="http://schemas.openxmlformats.org/drawingml/2006/main" xmlns:p="http://schemas.openxmlformats.org/presentationml/2006/main" xmlns:r="http://schemas.openxmlformats.org/officeDocument/2006/relationships">
+<p:notes xmlns:a="http://schemas.openxmlformats.org/drawingml/2006/main" xmlns:r="http://schemas.openxmlformats.org/officeDocument/2006/relationships" xmlns:p="http://schemas.openxmlformats.org/presentationml/2006/main">
   <p:cSld>
     <p:spTree>
       <p:nvGrpSpPr>
@@ -1089,7 +883,7 @@
         <p:nvSpPr>
           <p:cNvPr id="2" name="Slide Image Placeholder 1"/>
           <p:cNvSpPr>
-            <a:spLocks noGrp="1"/>
+            <a:spLocks noGrp="1" noRot="1" noChangeAspect="1"/>
           </p:cNvSpPr>
           <p:nvPr>
             <p:ph type="sldImg" idx="2"/>
@@ -1104,7 +898,7 @@
             <a:spLocks noGrp="1"/>
           </p:cNvSpPr>
           <p:nvPr>
-            <p:ph type="body" idx="3" sz="quarter"/>
+            <p:ph type="body" sz="quarter" idx="3"/>
           </p:nvPr>
         </p:nvSpPr>
         <p:spPr/>
@@ -1113,12 +907,12 @@
           <a:lstStyle/>
           <a:p>
             <a:r>
-              <a:t>[S6 — ACT 3]</a:t>
-            </a:r>
-          </a:p>
-          <a:p>
-            <a:r>
-              <a:t>Alexis: '104 people in SLP. The result converged exactly with what the MIT data told us.'</a:t>
+              <a:t>[S6 — ACTO 3]</a:t>
+            </a:r>
+          </a:p>
+          <a:p>
+            <a:r>
+              <a:t>Alexis: '104 personas en SLP. El resultado convergió exactamente con lo que el MIT nos dijo.'</a:t>
             </a:r>
           </a:p>
         </p:txBody>
@@ -1130,7 +924,7 @@
             <a:spLocks noGrp="1"/>
           </p:cNvSpPr>
           <p:nvPr>
-            <p:ph type="sldNum" idx="5" sz="quarter"/>
+            <p:ph type="sldNum" sz="quarter" idx="5"/>
           </p:nvPr>
         </p:nvSpPr>
         <p:spPr/>
@@ -1144,7 +938,7 @@
 </file>
 
 <file path=ppt/notesSlides/notesSlide7.xml><?xml version="1.0" encoding="utf-8"?>
-<p:notes xmlns:a="http://schemas.openxmlformats.org/drawingml/2006/main" xmlns:p="http://schemas.openxmlformats.org/presentationml/2006/main" xmlns:r="http://schemas.openxmlformats.org/officeDocument/2006/relationships">
+<p:notes xmlns:a="http://schemas.openxmlformats.org/drawingml/2006/main" xmlns:r="http://schemas.openxmlformats.org/officeDocument/2006/relationships" xmlns:p="http://schemas.openxmlformats.org/presentationml/2006/main">
   <p:cSld>
     <p:spTree>
       <p:nvGrpSpPr>
@@ -1164,7 +958,7 @@
         <p:nvSpPr>
           <p:cNvPr id="2" name="Slide Image Placeholder 1"/>
           <p:cNvSpPr>
-            <a:spLocks noGrp="1"/>
+            <a:spLocks noGrp="1" noRot="1" noChangeAspect="1"/>
           </p:cNvSpPr>
           <p:nvPr>
             <p:ph type="sldImg" idx="2"/>
@@ -1179,7 +973,7 @@
             <a:spLocks noGrp="1"/>
           </p:cNvSpPr>
           <p:nvPr>
-            <p:ph type="body" idx="3" sz="quarter"/>
+            <p:ph type="body" sz="quarter" idx="3"/>
           </p:nvPr>
         </p:nvSpPr>
         <p:spPr/>
@@ -1188,12 +982,12 @@
           <a:lstStyle/>
           <a:p>
             <a:r>
-              <a:t>[S7 — BRIDGE]</a:t>
-            </a:r>
-          </a:p>
-          <a:p>
-            <a:r>
-              <a:t>Fernanda: 'Our data is about adults — we're honest about that. The lever is to educate them before they reach the counter.'</a:t>
+              <a:t>[S7 — PUENTE]</a:t>
+            </a:r>
+          </a:p>
+          <a:p>
+            <a:r>
+              <a:t>Fernanda: 'Nuestros datos son de adultos — somos honestos con eso. El punto de palanca es formarlos antes de que lleguen al mostrador.'</a:t>
             </a:r>
           </a:p>
         </p:txBody>
@@ -1205,7 +999,7 @@
             <a:spLocks noGrp="1"/>
           </p:cNvSpPr>
           <p:nvPr>
-            <p:ph type="sldNum" idx="5" sz="quarter"/>
+            <p:ph type="sldNum" sz="quarter" idx="5"/>
           </p:nvPr>
         </p:nvSpPr>
         <p:spPr/>
@@ -1219,7 +1013,7 @@
 </file>
 
 <file path=ppt/notesSlides/notesSlide8.xml><?xml version="1.0" encoding="utf-8"?>
-<p:notes xmlns:a="http://schemas.openxmlformats.org/drawingml/2006/main" xmlns:p="http://schemas.openxmlformats.org/presentationml/2006/main" xmlns:r="http://schemas.openxmlformats.org/officeDocument/2006/relationships">
+<p:notes xmlns:a="http://schemas.openxmlformats.org/drawingml/2006/main" xmlns:r="http://schemas.openxmlformats.org/officeDocument/2006/relationships" xmlns:p="http://schemas.openxmlformats.org/presentationml/2006/main">
   <p:cSld>
     <p:spTree>
       <p:nvGrpSpPr>
@@ -1239,7 +1033,7 @@
         <p:nvSpPr>
           <p:cNvPr id="2" name="Slide Image Placeholder 1"/>
           <p:cNvSpPr>
-            <a:spLocks noGrp="1"/>
+            <a:spLocks noGrp="1" noRot="1" noChangeAspect="1"/>
           </p:cNvSpPr>
           <p:nvPr>
             <p:ph type="sldImg" idx="2"/>
@@ -1254,7 +1048,7 @@
             <a:spLocks noGrp="1"/>
           </p:cNvSpPr>
           <p:nvPr>
-            <p:ph type="body" idx="3" sz="quarter"/>
+            <p:ph type="body" sz="quarter" idx="3"/>
           </p:nvPr>
         </p:nvSpPr>
         <p:spPr/>
@@ -1263,12 +1057,12 @@
           <a:lstStyle/>
           <a:p>
             <a:r>
-              <a:t>[S8 — PROPOSAL]</a:t>
-            </a:r>
-          </a:p>
-          <a:p>
-            <a:r>
-              <a:t>Fernanda: 'Four components. None requires a new subject — all align with the NEM's Healthy Living axis.'</a:t>
+              <a:t>[S8 — PROPUESTA]</a:t>
+            </a:r>
+          </a:p>
+          <a:p>
+            <a:r>
+              <a:t>Fernanda: 'Cuatro componentes. Ninguno requiere crear una materia nueva — todo se alinea con Vida Saludable de la NEM.'</a:t>
             </a:r>
           </a:p>
         </p:txBody>
@@ -1280,7 +1074,7 @@
             <a:spLocks noGrp="1"/>
           </p:cNvSpPr>
           <p:nvPr>
-            <p:ph type="sldNum" idx="5" sz="quarter"/>
+            <p:ph type="sldNum" sz="quarter" idx="5"/>
           </p:nvPr>
         </p:nvSpPr>
         <p:spPr/>
@@ -1294,7 +1088,7 @@
 </file>
 
 <file path=ppt/notesSlides/notesSlide9.xml><?xml version="1.0" encoding="utf-8"?>
-<p:notes xmlns:a="http://schemas.openxmlformats.org/drawingml/2006/main" xmlns:p="http://schemas.openxmlformats.org/presentationml/2006/main" xmlns:r="http://schemas.openxmlformats.org/officeDocument/2006/relationships">
+<p:notes xmlns:a="http://schemas.openxmlformats.org/drawingml/2006/main" xmlns:r="http://schemas.openxmlformats.org/officeDocument/2006/relationships" xmlns:p="http://schemas.openxmlformats.org/presentationml/2006/main">
   <p:cSld>
     <p:spTree>
       <p:nvGrpSpPr>
@@ -1314,7 +1108,7 @@
         <p:nvSpPr>
           <p:cNvPr id="2" name="Slide Image Placeholder 1"/>
           <p:cNvSpPr>
-            <a:spLocks noGrp="1"/>
+            <a:spLocks noGrp="1" noRot="1" noChangeAspect="1"/>
           </p:cNvSpPr>
           <p:nvPr>
             <p:ph type="sldImg" idx="2"/>
@@ -1329,7 +1123,7 @@
             <a:spLocks noGrp="1"/>
           </p:cNvSpPr>
           <p:nvPr>
-            <p:ph type="body" idx="3" sz="quarter"/>
+            <p:ph type="body" sz="quarter" idx="3"/>
           </p:nvPr>
         </p:nvSpPr>
         <p:spPr/>
@@ -1343,7 +1137,7 @@
           </a:p>
           <a:p>
             <a:r>
-              <a:t>Carlos: 'Central scenario: obesity falls from 31.9% to 26.2% at 5 years. We include the null result because honesty is non-negotiable.'</a:t>
+              <a:t>Carlos: 'El escenario central: la obesidad baja de 31.9% a 26.2% a 5 años. Incluimos el resultado nulo porque la honestidad no es opcional.'</a:t>
             </a:r>
           </a:p>
         </p:txBody>
@@ -1355,7 +1149,7 @@
             <a:spLocks noGrp="1"/>
           </p:cNvSpPr>
           <p:nvPr>
-            <p:ph type="sldNum" idx="5" sz="quarter"/>
+            <p:ph type="sldNum" sz="quarter" idx="5"/>
           </p:nvPr>
         </p:nvSpPr>
         <p:spPr/>
@@ -1406,10 +1200,9 @@
           <a:lstStyle/>
           <a:p>
             <a:r>
-              <a:rPr lang="en-US" smtClean="0"/>
+              <a:rPr lang="en-US"/>
               <a:t>Click to edit Master title style</a:t>
             </a:r>
-            <a:endParaRPr lang="en-US"/>
           </a:p>
         </p:txBody>
       </p:sp>
@@ -1525,10 +1318,9 @@
           </a:lstStyle>
           <a:p>
             <a:r>
-              <a:rPr lang="en-US" smtClean="0"/>
+              <a:rPr lang="en-US"/>
               <a:t>Click to edit Master subtitle style</a:t>
             </a:r>
-            <a:endParaRPr lang="en-US"/>
           </a:p>
         </p:txBody>
       </p:sp>
@@ -1549,7 +1341,7 @@
           <a:p>
             <a:fld id="{5BCAD085-E8A6-8845-BD4E-CB4CCA059FC4}" type="datetimeFigureOut">
               <a:rPr lang="en-US" smtClean="0"/>
-              <a:t>1/27/13</a:t>
+              <a:t>5/21/2026</a:t>
             </a:fld>
             <a:endParaRPr lang="en-US"/>
           </a:p>
@@ -1591,7 +1383,7 @@
           <a:p>
             <a:fld id="{C1FF6DA9-008F-8B48-92A6-B652298478BF}" type="slidenum">
               <a:rPr lang="en-US" smtClean="0"/>
-              <a:t>‹#›</a:t>
+              <a:t>‹Nº›</a:t>
             </a:fld>
             <a:endParaRPr lang="en-US"/>
           </a:p>
@@ -1643,10 +1435,9 @@
           <a:lstStyle/>
           <a:p>
             <a:r>
-              <a:rPr lang="en-US" smtClean="0"/>
+              <a:rPr lang="en-US"/>
               <a:t>Click to edit Master title style</a:t>
             </a:r>
-            <a:endParaRPr lang="en-US"/>
           </a:p>
         </p:txBody>
       </p:sp>
@@ -1667,38 +1458,37 @@
           <a:p>
             <a:pPr lvl="0"/>
             <a:r>
-              <a:rPr lang="en-US" smtClean="0"/>
+              <a:rPr lang="en-US"/>
               <a:t>Click to edit Master text styles</a:t>
             </a:r>
           </a:p>
           <a:p>
             <a:pPr lvl="1"/>
             <a:r>
-              <a:rPr lang="en-US" smtClean="0"/>
+              <a:rPr lang="en-US"/>
               <a:t>Second level</a:t>
             </a:r>
           </a:p>
           <a:p>
             <a:pPr lvl="2"/>
             <a:r>
-              <a:rPr lang="en-US" smtClean="0"/>
+              <a:rPr lang="en-US"/>
               <a:t>Third level</a:t>
             </a:r>
           </a:p>
           <a:p>
             <a:pPr lvl="3"/>
             <a:r>
-              <a:rPr lang="en-US" smtClean="0"/>
+              <a:rPr lang="en-US"/>
               <a:t>Fourth level</a:t>
             </a:r>
           </a:p>
           <a:p>
             <a:pPr lvl="4"/>
             <a:r>
-              <a:rPr lang="en-US" smtClean="0"/>
+              <a:rPr lang="en-US"/>
               <a:t>Fifth level</a:t>
             </a:r>
-            <a:endParaRPr lang="en-US"/>
           </a:p>
         </p:txBody>
       </p:sp>
@@ -1719,7 +1509,7 @@
           <a:p>
             <a:fld id="{5BCAD085-E8A6-8845-BD4E-CB4CCA059FC4}" type="datetimeFigureOut">
               <a:rPr lang="en-US" smtClean="0"/>
-              <a:t>1/27/13</a:t>
+              <a:t>5/21/2026</a:t>
             </a:fld>
             <a:endParaRPr lang="en-US"/>
           </a:p>
@@ -1761,7 +1551,7 @@
           <a:p>
             <a:fld id="{C1FF6DA9-008F-8B48-92A6-B652298478BF}" type="slidenum">
               <a:rPr lang="en-US" smtClean="0"/>
-              <a:t>‹#›</a:t>
+              <a:t>‹Nº›</a:t>
             </a:fld>
             <a:endParaRPr lang="en-US"/>
           </a:p>
@@ -1818,10 +1608,9 @@
           <a:lstStyle/>
           <a:p>
             <a:r>
-              <a:rPr lang="en-US" smtClean="0"/>
+              <a:rPr lang="en-US"/>
               <a:t>Click to edit Master title style</a:t>
             </a:r>
-            <a:endParaRPr lang="en-US"/>
           </a:p>
         </p:txBody>
       </p:sp>
@@ -1847,38 +1636,37 @@
           <a:p>
             <a:pPr lvl="0"/>
             <a:r>
-              <a:rPr lang="en-US" smtClean="0"/>
+              <a:rPr lang="en-US"/>
               <a:t>Click to edit Master text styles</a:t>
             </a:r>
           </a:p>
           <a:p>
             <a:pPr lvl="1"/>
             <a:r>
-              <a:rPr lang="en-US" smtClean="0"/>
+              <a:rPr lang="en-US"/>
               <a:t>Second level</a:t>
             </a:r>
           </a:p>
           <a:p>
             <a:pPr lvl="2"/>
             <a:r>
-              <a:rPr lang="en-US" smtClean="0"/>
+              <a:rPr lang="en-US"/>
               <a:t>Third level</a:t>
             </a:r>
           </a:p>
           <a:p>
             <a:pPr lvl="3"/>
             <a:r>
-              <a:rPr lang="en-US" smtClean="0"/>
+              <a:rPr lang="en-US"/>
               <a:t>Fourth level</a:t>
             </a:r>
           </a:p>
           <a:p>
             <a:pPr lvl="4"/>
             <a:r>
-              <a:rPr lang="en-US" smtClean="0"/>
+              <a:rPr lang="en-US"/>
               <a:t>Fifth level</a:t>
             </a:r>
-            <a:endParaRPr lang="en-US"/>
           </a:p>
         </p:txBody>
       </p:sp>
@@ -1899,7 +1687,7 @@
           <a:p>
             <a:fld id="{5BCAD085-E8A6-8845-BD4E-CB4CCA059FC4}" type="datetimeFigureOut">
               <a:rPr lang="en-US" smtClean="0"/>
-              <a:t>1/27/13</a:t>
+              <a:t>5/21/2026</a:t>
             </a:fld>
             <a:endParaRPr lang="en-US"/>
           </a:p>
@@ -1941,7 +1729,7 @@
           <a:p>
             <a:fld id="{C1FF6DA9-008F-8B48-92A6-B652298478BF}" type="slidenum">
               <a:rPr lang="en-US" smtClean="0"/>
-              <a:t>‹#›</a:t>
+              <a:t>‹Nº›</a:t>
             </a:fld>
             <a:endParaRPr lang="en-US"/>
           </a:p>
@@ -1993,10 +1781,9 @@
           <a:lstStyle/>
           <a:p>
             <a:r>
-              <a:rPr lang="en-US" smtClean="0"/>
+              <a:rPr lang="en-US"/>
               <a:t>Click to edit Master title style</a:t>
             </a:r>
-            <a:endParaRPr lang="en-US"/>
           </a:p>
         </p:txBody>
       </p:sp>
@@ -2017,38 +1804,37 @@
           <a:p>
             <a:pPr lvl="0"/>
             <a:r>
-              <a:rPr lang="en-US" smtClean="0"/>
+              <a:rPr lang="en-US"/>
               <a:t>Click to edit Master text styles</a:t>
             </a:r>
           </a:p>
           <a:p>
             <a:pPr lvl="1"/>
             <a:r>
-              <a:rPr lang="en-US" smtClean="0"/>
+              <a:rPr lang="en-US"/>
               <a:t>Second level</a:t>
             </a:r>
           </a:p>
           <a:p>
             <a:pPr lvl="2"/>
             <a:r>
-              <a:rPr lang="en-US" smtClean="0"/>
+              <a:rPr lang="en-US"/>
               <a:t>Third level</a:t>
             </a:r>
           </a:p>
           <a:p>
             <a:pPr lvl="3"/>
             <a:r>
-              <a:rPr lang="en-US" smtClean="0"/>
+              <a:rPr lang="en-US"/>
               <a:t>Fourth level</a:t>
             </a:r>
           </a:p>
           <a:p>
             <a:pPr lvl="4"/>
             <a:r>
-              <a:rPr lang="en-US" smtClean="0"/>
+              <a:rPr lang="en-US"/>
               <a:t>Fifth level</a:t>
             </a:r>
-            <a:endParaRPr lang="en-US"/>
           </a:p>
         </p:txBody>
       </p:sp>
@@ -2069,7 +1855,7 @@
           <a:p>
             <a:fld id="{5BCAD085-E8A6-8845-BD4E-CB4CCA059FC4}" type="datetimeFigureOut">
               <a:rPr lang="en-US" smtClean="0"/>
-              <a:t>1/27/13</a:t>
+              <a:t>5/21/2026</a:t>
             </a:fld>
             <a:endParaRPr lang="en-US"/>
           </a:p>
@@ -2111,7 +1897,7 @@
           <a:p>
             <a:fld id="{C1FF6DA9-008F-8B48-92A6-B652298478BF}" type="slidenum">
               <a:rPr lang="en-US" smtClean="0"/>
-              <a:t>‹#›</a:t>
+              <a:t>‹Nº›</a:t>
             </a:fld>
             <a:endParaRPr lang="en-US"/>
           </a:p>
@@ -2172,10 +1958,9 @@
           </a:lstStyle>
           <a:p>
             <a:r>
-              <a:rPr lang="en-US" smtClean="0"/>
+              <a:rPr lang="en-US"/>
               <a:t>Click to edit Master title style</a:t>
             </a:r>
-            <a:endParaRPr lang="en-US"/>
           </a:p>
         </p:txBody>
       </p:sp>
@@ -2292,7 +2077,7 @@
           <a:p>
             <a:pPr lvl="0"/>
             <a:r>
-              <a:rPr lang="en-US" smtClean="0"/>
+              <a:rPr lang="en-US"/>
               <a:t>Click to edit Master text styles</a:t>
             </a:r>
           </a:p>
@@ -2315,7 +2100,7 @@
           <a:p>
             <a:fld id="{5BCAD085-E8A6-8845-BD4E-CB4CCA059FC4}" type="datetimeFigureOut">
               <a:rPr lang="en-US" smtClean="0"/>
-              <a:t>1/27/13</a:t>
+              <a:t>5/21/2026</a:t>
             </a:fld>
             <a:endParaRPr lang="en-US"/>
           </a:p>
@@ -2357,7 +2142,7 @@
           <a:p>
             <a:fld id="{C1FF6DA9-008F-8B48-92A6-B652298478BF}" type="slidenum">
               <a:rPr lang="en-US" smtClean="0"/>
-              <a:t>‹#›</a:t>
+              <a:t>‹Nº›</a:t>
             </a:fld>
             <a:endParaRPr lang="en-US"/>
           </a:p>
@@ -2409,10 +2194,9 @@
           <a:lstStyle/>
           <a:p>
             <a:r>
-              <a:rPr lang="en-US" smtClean="0"/>
+              <a:rPr lang="en-US"/>
               <a:t>Click to edit Master title style</a:t>
             </a:r>
-            <a:endParaRPr lang="en-US"/>
           </a:p>
         </p:txBody>
       </p:sp>
@@ -2466,38 +2250,37 @@
           <a:p>
             <a:pPr lvl="0"/>
             <a:r>
-              <a:rPr lang="en-US" smtClean="0"/>
+              <a:rPr lang="en-US"/>
               <a:t>Click to edit Master text styles</a:t>
             </a:r>
           </a:p>
           <a:p>
             <a:pPr lvl="1"/>
             <a:r>
-              <a:rPr lang="en-US" smtClean="0"/>
+              <a:rPr lang="en-US"/>
               <a:t>Second level</a:t>
             </a:r>
           </a:p>
           <a:p>
             <a:pPr lvl="2"/>
             <a:r>
-              <a:rPr lang="en-US" smtClean="0"/>
+              <a:rPr lang="en-US"/>
               <a:t>Third level</a:t>
             </a:r>
           </a:p>
           <a:p>
             <a:pPr lvl="3"/>
             <a:r>
-              <a:rPr lang="en-US" smtClean="0"/>
+              <a:rPr lang="en-US"/>
               <a:t>Fourth level</a:t>
             </a:r>
           </a:p>
           <a:p>
             <a:pPr lvl="4"/>
             <a:r>
-              <a:rPr lang="en-US" smtClean="0"/>
+              <a:rPr lang="en-US"/>
               <a:t>Fifth level</a:t>
             </a:r>
-            <a:endParaRPr lang="en-US"/>
           </a:p>
         </p:txBody>
       </p:sp>
@@ -2551,38 +2334,37 @@
           <a:p>
             <a:pPr lvl="0"/>
             <a:r>
-              <a:rPr lang="en-US" smtClean="0"/>
+              <a:rPr lang="en-US"/>
               <a:t>Click to edit Master text styles</a:t>
             </a:r>
           </a:p>
           <a:p>
             <a:pPr lvl="1"/>
             <a:r>
-              <a:rPr lang="en-US" smtClean="0"/>
+              <a:rPr lang="en-US"/>
               <a:t>Second level</a:t>
             </a:r>
           </a:p>
           <a:p>
             <a:pPr lvl="2"/>
             <a:r>
-              <a:rPr lang="en-US" smtClean="0"/>
+              <a:rPr lang="en-US"/>
               <a:t>Third level</a:t>
             </a:r>
           </a:p>
           <a:p>
             <a:pPr lvl="3"/>
             <a:r>
-              <a:rPr lang="en-US" smtClean="0"/>
+              <a:rPr lang="en-US"/>
               <a:t>Fourth level</a:t>
             </a:r>
           </a:p>
           <a:p>
             <a:pPr lvl="4"/>
             <a:r>
-              <a:rPr lang="en-US" smtClean="0"/>
+              <a:rPr lang="en-US"/>
               <a:t>Fifth level</a:t>
             </a:r>
-            <a:endParaRPr lang="en-US"/>
           </a:p>
         </p:txBody>
       </p:sp>
@@ -2603,7 +2385,7 @@
           <a:p>
             <a:fld id="{5BCAD085-E8A6-8845-BD4E-CB4CCA059FC4}" type="datetimeFigureOut">
               <a:rPr lang="en-US" smtClean="0"/>
-              <a:t>1/27/13</a:t>
+              <a:t>5/21/2026</a:t>
             </a:fld>
             <a:endParaRPr lang="en-US"/>
           </a:p>
@@ -2645,7 +2427,7 @@
           <a:p>
             <a:fld id="{C1FF6DA9-008F-8B48-92A6-B652298478BF}" type="slidenum">
               <a:rPr lang="en-US" smtClean="0"/>
-              <a:t>‹#›</a:t>
+              <a:t>‹Nº›</a:t>
             </a:fld>
             <a:endParaRPr lang="en-US"/>
           </a:p>
@@ -2701,10 +2483,9 @@
           </a:lstStyle>
           <a:p>
             <a:r>
-              <a:rPr lang="en-US" smtClean="0"/>
+              <a:rPr lang="en-US"/>
               <a:t>Click to edit Master title style</a:t>
             </a:r>
-            <a:endParaRPr lang="en-US"/>
           </a:p>
         </p:txBody>
       </p:sp>
@@ -2767,7 +2548,7 @@
           <a:p>
             <a:pPr lvl="0"/>
             <a:r>
-              <a:rPr lang="en-US" smtClean="0"/>
+              <a:rPr lang="en-US"/>
               <a:t>Click to edit Master text styles</a:t>
             </a:r>
           </a:p>
@@ -2823,38 +2604,37 @@
           <a:p>
             <a:pPr lvl="0"/>
             <a:r>
-              <a:rPr lang="en-US" smtClean="0"/>
+              <a:rPr lang="en-US"/>
               <a:t>Click to edit Master text styles</a:t>
             </a:r>
           </a:p>
           <a:p>
             <a:pPr lvl="1"/>
             <a:r>
-              <a:rPr lang="en-US" smtClean="0"/>
+              <a:rPr lang="en-US"/>
               <a:t>Second level</a:t>
             </a:r>
           </a:p>
           <a:p>
             <a:pPr lvl="2"/>
             <a:r>
-              <a:rPr lang="en-US" smtClean="0"/>
+              <a:rPr lang="en-US"/>
               <a:t>Third level</a:t>
             </a:r>
           </a:p>
           <a:p>
             <a:pPr lvl="3"/>
             <a:r>
-              <a:rPr lang="en-US" smtClean="0"/>
+              <a:rPr lang="en-US"/>
               <a:t>Fourth level</a:t>
             </a:r>
           </a:p>
           <a:p>
             <a:pPr lvl="4"/>
             <a:r>
-              <a:rPr lang="en-US" smtClean="0"/>
+              <a:rPr lang="en-US"/>
               <a:t>Fifth level</a:t>
             </a:r>
-            <a:endParaRPr lang="en-US"/>
           </a:p>
         </p:txBody>
       </p:sp>
@@ -2917,7 +2697,7 @@
           <a:p>
             <a:pPr lvl="0"/>
             <a:r>
-              <a:rPr lang="en-US" smtClean="0"/>
+              <a:rPr lang="en-US"/>
               <a:t>Click to edit Master text styles</a:t>
             </a:r>
           </a:p>
@@ -2973,38 +2753,37 @@
           <a:p>
             <a:pPr lvl="0"/>
             <a:r>
-              <a:rPr lang="en-US" smtClean="0"/>
+              <a:rPr lang="en-US"/>
               <a:t>Click to edit Master text styles</a:t>
             </a:r>
           </a:p>
           <a:p>
             <a:pPr lvl="1"/>
             <a:r>
-              <a:rPr lang="en-US" smtClean="0"/>
+              <a:rPr lang="en-US"/>
               <a:t>Second level</a:t>
             </a:r>
           </a:p>
           <a:p>
             <a:pPr lvl="2"/>
             <a:r>
-              <a:rPr lang="en-US" smtClean="0"/>
+              <a:rPr lang="en-US"/>
               <a:t>Third level</a:t>
             </a:r>
           </a:p>
           <a:p>
             <a:pPr lvl="3"/>
             <a:r>
-              <a:rPr lang="en-US" smtClean="0"/>
+              <a:rPr lang="en-US"/>
               <a:t>Fourth level</a:t>
             </a:r>
           </a:p>
           <a:p>
             <a:pPr lvl="4"/>
             <a:r>
-              <a:rPr lang="en-US" smtClean="0"/>
+              <a:rPr lang="en-US"/>
               <a:t>Fifth level</a:t>
             </a:r>
-            <a:endParaRPr lang="en-US"/>
           </a:p>
         </p:txBody>
       </p:sp>
@@ -3025,7 +2804,7 @@
           <a:p>
             <a:fld id="{5BCAD085-E8A6-8845-BD4E-CB4CCA059FC4}" type="datetimeFigureOut">
               <a:rPr lang="en-US" smtClean="0"/>
-              <a:t>1/27/13</a:t>
+              <a:t>5/21/2026</a:t>
             </a:fld>
             <a:endParaRPr lang="en-US"/>
           </a:p>
@@ -3067,7 +2846,7 @@
           <a:p>
             <a:fld id="{C1FF6DA9-008F-8B48-92A6-B652298478BF}" type="slidenum">
               <a:rPr lang="en-US" smtClean="0"/>
-              <a:t>‹#›</a:t>
+              <a:t>‹Nº›</a:t>
             </a:fld>
             <a:endParaRPr lang="en-US"/>
           </a:p>
@@ -3119,10 +2898,9 @@
           <a:lstStyle/>
           <a:p>
             <a:r>
-              <a:rPr lang="en-US" smtClean="0"/>
+              <a:rPr lang="en-US"/>
               <a:t>Click to edit Master title style</a:t>
             </a:r>
-            <a:endParaRPr lang="en-US"/>
           </a:p>
         </p:txBody>
       </p:sp>
@@ -3143,7 +2921,7 @@
           <a:p>
             <a:fld id="{5BCAD085-E8A6-8845-BD4E-CB4CCA059FC4}" type="datetimeFigureOut">
               <a:rPr lang="en-US" smtClean="0"/>
-              <a:t>1/27/13</a:t>
+              <a:t>5/21/2026</a:t>
             </a:fld>
             <a:endParaRPr lang="en-US"/>
           </a:p>
@@ -3185,7 +2963,7 @@
           <a:p>
             <a:fld id="{C1FF6DA9-008F-8B48-92A6-B652298478BF}" type="slidenum">
               <a:rPr lang="en-US" smtClean="0"/>
-              <a:t>‹#›</a:t>
+              <a:t>‹Nº›</a:t>
             </a:fld>
             <a:endParaRPr lang="en-US"/>
           </a:p>
@@ -3238,7 +3016,7 @@
           <a:p>
             <a:fld id="{5BCAD085-E8A6-8845-BD4E-CB4CCA059FC4}" type="datetimeFigureOut">
               <a:rPr lang="en-US" smtClean="0"/>
-              <a:t>1/27/13</a:t>
+              <a:t>5/21/2026</a:t>
             </a:fld>
             <a:endParaRPr lang="en-US"/>
           </a:p>
@@ -3280,7 +3058,7 @@
           <a:p>
             <a:fld id="{C1FF6DA9-008F-8B48-92A6-B652298478BF}" type="slidenum">
               <a:rPr lang="en-US" smtClean="0"/>
-              <a:t>‹#›</a:t>
+              <a:t>‹Nº›</a:t>
             </a:fld>
             <a:endParaRPr lang="en-US"/>
           </a:p>
@@ -3341,10 +3119,9 @@
           </a:lstStyle>
           <a:p>
             <a:r>
-              <a:rPr lang="en-US" smtClean="0"/>
+              <a:rPr lang="en-US"/>
               <a:t>Click to edit Master title style</a:t>
             </a:r>
-            <a:endParaRPr lang="en-US"/>
           </a:p>
         </p:txBody>
       </p:sp>
@@ -3398,38 +3175,37 @@
           <a:p>
             <a:pPr lvl="0"/>
             <a:r>
-              <a:rPr lang="en-US" smtClean="0"/>
+              <a:rPr lang="en-US"/>
               <a:t>Click to edit Master text styles</a:t>
             </a:r>
           </a:p>
           <a:p>
             <a:pPr lvl="1"/>
             <a:r>
-              <a:rPr lang="en-US" smtClean="0"/>
+              <a:rPr lang="en-US"/>
               <a:t>Second level</a:t>
             </a:r>
           </a:p>
           <a:p>
             <a:pPr lvl="2"/>
             <a:r>
-              <a:rPr lang="en-US" smtClean="0"/>
+              <a:rPr lang="en-US"/>
               <a:t>Third level</a:t>
             </a:r>
           </a:p>
           <a:p>
             <a:pPr lvl="3"/>
             <a:r>
-              <a:rPr lang="en-US" smtClean="0"/>
+              <a:rPr lang="en-US"/>
               <a:t>Fourth level</a:t>
             </a:r>
           </a:p>
           <a:p>
             <a:pPr lvl="4"/>
             <a:r>
-              <a:rPr lang="en-US" smtClean="0"/>
+              <a:rPr lang="en-US"/>
               <a:t>Fifth level</a:t>
             </a:r>
-            <a:endParaRPr lang="en-US"/>
           </a:p>
         </p:txBody>
       </p:sp>
@@ -3492,7 +3268,7 @@
           <a:p>
             <a:pPr lvl="0"/>
             <a:r>
-              <a:rPr lang="en-US" smtClean="0"/>
+              <a:rPr lang="en-US"/>
               <a:t>Click to edit Master text styles</a:t>
             </a:r>
           </a:p>
@@ -3515,7 +3291,7 @@
           <a:p>
             <a:fld id="{5BCAD085-E8A6-8845-BD4E-CB4CCA059FC4}" type="datetimeFigureOut">
               <a:rPr lang="en-US" smtClean="0"/>
-              <a:t>1/27/13</a:t>
+              <a:t>5/21/2026</a:t>
             </a:fld>
             <a:endParaRPr lang="en-US"/>
           </a:p>
@@ -3557,7 +3333,7 @@
           <a:p>
             <a:fld id="{C1FF6DA9-008F-8B48-92A6-B652298478BF}" type="slidenum">
               <a:rPr lang="en-US" smtClean="0"/>
-              <a:t>‹#›</a:t>
+              <a:t>‹Nº›</a:t>
             </a:fld>
             <a:endParaRPr lang="en-US"/>
           </a:p>
@@ -3618,10 +3394,9 @@
           </a:lstStyle>
           <a:p>
             <a:r>
-              <a:rPr lang="en-US" smtClean="0"/>
+              <a:rPr lang="en-US"/>
               <a:t>Click to edit Master title style</a:t>
             </a:r>
-            <a:endParaRPr lang="en-US"/>
           </a:p>
         </p:txBody>
       </p:sp>
@@ -3745,7 +3520,7 @@
           <a:p>
             <a:pPr lvl="0"/>
             <a:r>
-              <a:rPr lang="en-US" smtClean="0"/>
+              <a:rPr lang="en-US"/>
               <a:t>Click to edit Master text styles</a:t>
             </a:r>
           </a:p>
@@ -3768,7 +3543,7 @@
           <a:p>
             <a:fld id="{5BCAD085-E8A6-8845-BD4E-CB4CCA059FC4}" type="datetimeFigureOut">
               <a:rPr lang="en-US" smtClean="0"/>
-              <a:t>1/27/13</a:t>
+              <a:t>5/21/2026</a:t>
             </a:fld>
             <a:endParaRPr lang="en-US"/>
           </a:p>
@@ -3810,7 +3585,7 @@
           <a:p>
             <a:fld id="{C1FF6DA9-008F-8B48-92A6-B652298478BF}" type="slidenum">
               <a:rPr lang="en-US" smtClean="0"/>
-              <a:t>‹#›</a:t>
+              <a:t>‹Nº›</a:t>
             </a:fld>
             <a:endParaRPr lang="en-US"/>
           </a:p>
@@ -3877,10 +3652,9 @@
           <a:lstStyle/>
           <a:p>
             <a:r>
-              <a:rPr lang="en-US" smtClean="0"/>
+              <a:rPr lang="en-US"/>
               <a:t>Click to edit Master title style</a:t>
             </a:r>
-            <a:endParaRPr lang="en-US"/>
           </a:p>
         </p:txBody>
       </p:sp>
@@ -3911,38 +3685,37 @@
           <a:p>
             <a:pPr lvl="0"/>
             <a:r>
-              <a:rPr lang="en-US" smtClean="0"/>
+              <a:rPr lang="en-US"/>
               <a:t>Click to edit Master text styles</a:t>
             </a:r>
           </a:p>
           <a:p>
             <a:pPr lvl="1"/>
             <a:r>
-              <a:rPr lang="en-US" smtClean="0"/>
+              <a:rPr lang="en-US"/>
               <a:t>Second level</a:t>
             </a:r>
           </a:p>
           <a:p>
             <a:pPr lvl="2"/>
             <a:r>
-              <a:rPr lang="en-US" smtClean="0"/>
+              <a:rPr lang="en-US"/>
               <a:t>Third level</a:t>
             </a:r>
           </a:p>
           <a:p>
             <a:pPr lvl="3"/>
             <a:r>
-              <a:rPr lang="en-US" smtClean="0"/>
+              <a:rPr lang="en-US"/>
               <a:t>Fourth level</a:t>
             </a:r>
           </a:p>
           <a:p>
             <a:pPr lvl="4"/>
             <a:r>
-              <a:rPr lang="en-US" smtClean="0"/>
+              <a:rPr lang="en-US"/>
               <a:t>Fifth level</a:t>
             </a:r>
-            <a:endParaRPr lang="en-US"/>
           </a:p>
         </p:txBody>
       </p:sp>
@@ -3981,7 +3754,7 @@
           <a:p>
             <a:fld id="{5BCAD085-E8A6-8845-BD4E-CB4CCA059FC4}" type="datetimeFigureOut">
               <a:rPr lang="en-US" smtClean="0"/>
-              <a:t>1/27/13</a:t>
+              <a:t>5/21/2026</a:t>
             </a:fld>
             <a:endParaRPr lang="en-US"/>
           </a:p>
@@ -4059,7 +3832,7 @@
           <a:p>
             <a:fld id="{C1FF6DA9-008F-8B48-92A6-B652298478BF}" type="slidenum">
               <a:rPr lang="en-US" smtClean="0"/>
-              <a:t>‹#›</a:t>
+              <a:t>‹Nº›</a:t>
             </a:fld>
             <a:endParaRPr lang="en-US"/>
           </a:p>
@@ -4340,7 +4113,7 @@
 </file>
 
 <file path=ppt/slides/slide1.xml><?xml version="1.0" encoding="utf-8"?>
-<p:sld xmlns:a="http://schemas.openxmlformats.org/drawingml/2006/main" xmlns:p="http://schemas.openxmlformats.org/presentationml/2006/main" xmlns:r="http://schemas.openxmlformats.org/officeDocument/2006/relationships">
+<p:sld xmlns:a="http://schemas.openxmlformats.org/drawingml/2006/main" xmlns:r="http://schemas.openxmlformats.org/officeDocument/2006/relationships" xmlns:p="http://schemas.openxmlformats.org/presentationml/2006/main">
   <p:cSld>
     <p:bg>
       <p:bgPr>
@@ -4356,7 +4129,14 @@
         <p:cNvGrpSpPr/>
         <p:nvPr/>
       </p:nvGrpSpPr>
-      <p:grpSpPr/>
+      <p:grpSpPr>
+        <a:xfrm>
+          <a:off x="0" y="0"/>
+          <a:ext cx="0" cy="0"/>
+          <a:chOff x="0" y="0"/>
+          <a:chExt cx="0" cy="0"/>
+        </a:xfrm>
+      </p:grpSpPr>
       <p:sp>
         <p:nvSpPr>
           <p:cNvPr id="2" name="Rectangle 1"/>
@@ -4365,7 +4145,7 @@
         </p:nvSpPr>
         <p:spPr>
           <a:xfrm>
-            <a:off x="0" y="0"/>
+            <a:off x="-127" y="13365"/>
             <a:ext cx="12188952" cy="6858000"/>
           </a:xfrm>
           <a:prstGeom prst="rect">
@@ -4397,6 +4177,7 @@
           <a:lstStyle/>
           <a:p>
             <a:pPr algn="ctr"/>
+            <a:endParaRPr/>
           </a:p>
         </p:txBody>
       </p:sp>
@@ -4440,6 +4221,7 @@
           <a:lstStyle/>
           <a:p>
             <a:pPr algn="ctr"/>
+            <a:endParaRPr/>
           </a:p>
         </p:txBody>
       </p:sp>
@@ -4485,8 +4267,8 @@
         </p:nvSpPr>
         <p:spPr>
           <a:xfrm>
-            <a:off x="914400" y="1005840"/>
-            <a:ext cx="10360152" cy="1005840"/>
+            <a:off x="914400" y="853500"/>
+            <a:ext cx="10360152" cy="1569660"/>
           </a:xfrm>
           <a:prstGeom prst="rect">
             <a:avLst/>
@@ -4501,13 +4283,26 @@
           <a:p>
             <a:pPr algn="ctr"/>
             <a:r>
-              <a:rPr sz="6200" b="1" i="0">
+              <a:rPr sz="9600" b="1" i="0" dirty="0">
                 <a:solidFill>
                   <a:srgbClr val="F4EFE6"/>
                 </a:solidFill>
               </a:rPr>
               <a:t>From nanostores</a:t>
             </a:r>
+            <a:r>
+              <a:rPr sz="9600" b="1" i="0" dirty="0" err="1">
+                <a:solidFill>
+                  <a:srgbClr val="F4EFE6"/>
+                </a:solidFill>
+              </a:rPr>
+              <a:t/>
+            </a:r>
+            <a:endParaRPr sz="9600" b="1" i="0" dirty="0">
+              <a:solidFill>
+                <a:srgbClr val="F4EFE6"/>
+              </a:solidFill>
+            </a:endParaRPr>
           </a:p>
         </p:txBody>
       </p:sp>
@@ -4520,7 +4315,7 @@
         <p:spPr>
           <a:xfrm>
             <a:off x="914400" y="1920240"/>
-            <a:ext cx="10360152" cy="1005840"/>
+            <a:ext cx="10360152" cy="1323439"/>
           </a:xfrm>
           <a:prstGeom prst="rect">
             <a:avLst/>
@@ -4535,7 +4330,7 @@
           <a:p>
             <a:pPr algn="ctr"/>
             <a:r>
-              <a:rPr sz="6200" b="1" i="0">
+              <a:rPr sz="8000" b="1" i="0" dirty="0">
                 <a:solidFill>
                   <a:srgbClr val="B8332A"/>
                 </a:solidFill>
@@ -4553,8 +4348,8 @@
         </p:nvSpPr>
         <p:spPr>
           <a:xfrm>
-            <a:off x="1828800" y="3108960"/>
-            <a:ext cx="8531352" cy="1280160"/>
+            <a:off x="3006210" y="3580906"/>
+            <a:ext cx="6176278" cy="1015663"/>
           </a:xfrm>
           <a:prstGeom prst="rect">
             <a:avLst/>
@@ -4569,28 +4364,171 @@
           <a:p>
             <a:pPr algn="ctr"/>
             <a:r>
-              <a:rPr sz="1400" b="0" i="1">
+              <a:rPr sz="2000" b="0" i="1" dirty="0">
                 <a:solidFill>
                   <a:srgbClr val="8A7D6E"/>
                 </a:solidFill>
               </a:rPr>
               <a:t>What keeps people from buying healthy products
-in Mexico's nanostores?
-A four-act investigation — including the model that failed.</a:t>
-            </a:r>
-          </a:p>
-        </p:txBody>
-      </p:sp>
-      <p:sp>
-        <p:nvSpPr>
-          <p:cNvPr id="8" name="TextBox 7"/>
+in Mexico's nanostores?</a:t>
+            </a:r>
+            <a:r>
+              <a:rPr sz="2000" b="0" i="1" dirty="0" err="1">
+                <a:solidFill>
+                  <a:srgbClr val="8A7D6E"/>
+                </a:solidFill>
+              </a:rPr>
+              <a:t/>
+            </a:r>
+            <a:r>
+              <a:rPr sz="2000" b="0" i="1" dirty="0">
+                <a:solidFill>
+                  <a:srgbClr val="8A7D6E"/>
+                </a:solidFill>
+              </a:rPr>
+              <a:t/>
+            </a:r>
+            <a:r>
+              <a:rPr sz="2000" b="0" i="1" dirty="0" err="1">
+                <a:solidFill>
+                  <a:srgbClr val="8A7D6E"/>
+                </a:solidFill>
+              </a:rPr>
+              <a:t/>
+            </a:r>
+            <a:r>
+              <a:rPr sz="2000" b="0" i="1" dirty="0">
+                <a:solidFill>
+                  <a:srgbClr val="8A7D6E"/>
+                </a:solidFill>
+              </a:rPr>
+              <a:t/>
+            </a:r>
+            <a:r>
+              <a:rPr sz="2000" b="0" i="1" dirty="0" err="1">
+                <a:solidFill>
+                  <a:srgbClr val="8A7D6E"/>
+                </a:solidFill>
+              </a:rPr>
+              <a:t/>
+            </a:r>
+            <a:r>
+              <a:rPr sz="2000" b="0" i="1" dirty="0">
+                <a:solidFill>
+                  <a:srgbClr val="8A7D6E"/>
+                </a:solidFill>
+              </a:rPr>
+              <a:t/>
+            </a:r>
+            <a:r>
+              <a:rPr sz="2000" b="0" i="1" dirty="0" err="1">
+                <a:solidFill>
+                  <a:srgbClr val="8A7D6E"/>
+                </a:solidFill>
+              </a:rPr>
+              <a:t/>
+            </a:r>
+            <a:r>
+              <a:rPr sz="2000" b="0" i="1" dirty="0">
+                <a:solidFill>
+                  <a:srgbClr val="8A7D6E"/>
+                </a:solidFill>
+              </a:rPr>
+              <a:t/>
+            </a:r>
+            <a:r>
+              <a:rPr sz="2000" b="0" i="1" dirty="0" err="1">
+                <a:solidFill>
+                  <a:srgbClr val="8A7D6E"/>
+                </a:solidFill>
+              </a:rPr>
+              <a:t/>
+            </a:r>
+            <a:r>
+              <a:rPr sz="2000" b="0" i="1" dirty="0">
+                <a:solidFill>
+                  <a:srgbClr val="8A7D6E"/>
+                </a:solidFill>
+              </a:rPr>
+              <a:t/>
+            </a:r>
+            <a:r>
+              <a:rPr sz="2000" b="0" i="1" dirty="0" err="1">
+                <a:solidFill>
+                  <a:srgbClr val="8A7D6E"/>
+                </a:solidFill>
+              </a:rPr>
+              <a:t/>
+            </a:r>
+            <a:r>
+              <a:rPr sz="2000" b="0" i="1" dirty="0">
+                <a:solidFill>
+                  <a:srgbClr val="8A7D6E"/>
+                </a:solidFill>
+              </a:rPr>
+              <a:t/>
+            </a:r>
+            <a:r>
+              <a:rPr sz="2000" b="0" i="1" dirty="0" err="1">
+                <a:solidFill>
+                  <a:srgbClr val="8A7D6E"/>
+                </a:solidFill>
+              </a:rPr>
+              <a:t/>
+            </a:r>
+            <a:r>
+              <a:rPr sz="2000" b="0" i="1" dirty="0">
+                <a:solidFill>
+                  <a:srgbClr val="8A7D6E"/>
+                </a:solidFill>
+              </a:rPr>
+              <a:t/>
+            </a:r>
+            <a:r>
+              <a:rPr sz="2000" b="0" i="1" dirty="0" err="1">
+                <a:solidFill>
+                  <a:srgbClr val="8A7D6E"/>
+                </a:solidFill>
+              </a:rPr>
+              <a:t/>
+            </a:r>
+            <a:r>
+              <a:rPr sz="2000" b="0" i="1" dirty="0">
+                <a:solidFill>
+                  <a:srgbClr val="8A7D6E"/>
+                </a:solidFill>
+              </a:rPr>
+              <a:t/>
+            </a:r>
+            <a:r>
+              <a:rPr sz="2000" b="0" i="1" dirty="0" err="1">
+                <a:solidFill>
+                  <a:srgbClr val="8A7D6E"/>
+                </a:solidFill>
+              </a:rPr>
+              <a:t/>
+            </a:r>
+            <a:r>
+              <a:rPr sz="2000" b="0" i="1" dirty="0">
+                <a:solidFill>
+                  <a:srgbClr val="8A7D6E"/>
+                </a:solidFill>
+              </a:rPr>
+              <a:t/>
+            </a:r>
+          </a:p>
+        </p:txBody>
+      </p:sp>
+      <p:sp>
+        <p:nvSpPr>
+          <p:cNvPr id="17" name="TextBox 16"/>
           <p:cNvSpPr txBox="1"/>
           <p:nvPr/>
         </p:nvSpPr>
         <p:spPr>
           <a:xfrm>
-            <a:off x="1645920" y="4709160"/>
-            <a:ext cx="2194560" cy="411480"/>
+            <a:off x="1371600" y="5760720"/>
+            <a:ext cx="9445752" cy="292388"/>
           </a:xfrm>
           <a:prstGeom prst="rect">
             <a:avLst/>
@@ -4605,69 +4543,34 @@
           <a:p>
             <a:pPr algn="ctr"/>
             <a:r>
-              <a:rPr sz="1150" b="0" i="0">
-                <a:solidFill>
-                  <a:srgbClr val="F4EFE6"/>
-                </a:solidFill>
-              </a:rPr>
-              <a:t>3,040  MIT records</a:t>
-            </a:r>
-          </a:p>
-        </p:txBody>
-      </p:sp>
-      <p:sp>
-        <p:nvSpPr>
-          <p:cNvPr id="9" name="Rectangle 8"/>
-          <p:cNvSpPr/>
-          <p:nvPr/>
-        </p:nvSpPr>
-        <p:spPr>
-          <a:xfrm>
-            <a:off x="3822191" y="4754880"/>
-            <a:ext cx="18288" cy="320040"/>
-          </a:xfrm>
-          <a:prstGeom prst="rect">
-            <a:avLst/>
-          </a:prstGeom>
-          <a:solidFill>
-            <a:srgbClr val="8A7D6E"/>
-          </a:solidFill>
-          <a:ln>
-            <a:noFill/>
-          </a:ln>
-        </p:spPr>
-        <p:style>
-          <a:lnRef idx="1">
-            <a:schemeClr val="accent1"/>
-          </a:lnRef>
-          <a:fillRef idx="3">
-            <a:schemeClr val="accent1"/>
-          </a:fillRef>
-          <a:effectRef idx="2">
-            <a:schemeClr val="accent1"/>
-          </a:effectRef>
-          <a:fontRef idx="minor">
-            <a:schemeClr val="lt1"/>
-          </a:fontRef>
-        </p:style>
-        <p:txBody>
-          <a:bodyPr rtlCol="0" anchor="ctr"/>
-          <a:lstStyle/>
-          <a:p>
-            <a:pPr algn="ctr"/>
-          </a:p>
-        </p:txBody>
-      </p:sp>
-      <p:sp>
-        <p:nvSpPr>
-          <p:cNvPr id="10" name="TextBox 9"/>
+              <a:rPr lang="pt-BR" sz="1300" b="1" dirty="0">
+                <a:solidFill>
+                  <a:srgbClr val="B8862A"/>
+                </a:solidFill>
+              </a:rPr>
+              <a:t>Carlos Torres  · </a:t>
+            </a:r>
+            <a:r>
+              <a:rPr lang="pt-BR" sz="1300" b="1" i="0" dirty="0">
+                <a:solidFill>
+                  <a:srgbClr val="B8862A"/>
+                </a:solidFill>
+              </a:rPr>
+              <a:t>Fernanda Ita  ·  Alexis Marcos</a:t>
+            </a:r>
+          </a:p>
+        </p:txBody>
+      </p:sp>
+      <p:sp>
+        <p:nvSpPr>
+          <p:cNvPr id="18" name="TextBox 17"/>
           <p:cNvSpPr txBox="1"/>
           <p:nvPr/>
         </p:nvSpPr>
         <p:spPr>
           <a:xfrm>
-            <a:off x="3931920" y="4709160"/>
-            <a:ext cx="2194560" cy="411480"/>
+            <a:off x="1371600" y="6217920"/>
+            <a:ext cx="9445752" cy="246221"/>
           </a:xfrm>
           <a:prstGeom prst="rect">
             <a:avLst/>
@@ -4682,320 +4585,12 @@
           <a:p>
             <a:pPr algn="ctr"/>
             <a:r>
-              <a:rPr sz="1150" b="0" i="0">
-                <a:solidFill>
-                  <a:srgbClr val="F4EFE6"/>
-                </a:solidFill>
-              </a:rPr>
-              <a:t>104  own surveys</a:t>
-            </a:r>
-          </a:p>
-        </p:txBody>
-      </p:sp>
-      <p:sp>
-        <p:nvSpPr>
-          <p:cNvPr id="11" name="Rectangle 10"/>
-          <p:cNvSpPr/>
-          <p:nvPr/>
-        </p:nvSpPr>
-        <p:spPr>
-          <a:xfrm>
-            <a:off x="6108192" y="4754880"/>
-            <a:ext cx="18288" cy="320040"/>
-          </a:xfrm>
-          <a:prstGeom prst="rect">
-            <a:avLst/>
-          </a:prstGeom>
-          <a:solidFill>
-            <a:srgbClr val="8A7D6E"/>
-          </a:solidFill>
-          <a:ln>
-            <a:noFill/>
-          </a:ln>
-        </p:spPr>
-        <p:style>
-          <a:lnRef idx="1">
-            <a:schemeClr val="accent1"/>
-          </a:lnRef>
-          <a:fillRef idx="3">
-            <a:schemeClr val="accent1"/>
-          </a:fillRef>
-          <a:effectRef idx="2">
-            <a:schemeClr val="accent1"/>
-          </a:effectRef>
-          <a:fontRef idx="minor">
-            <a:schemeClr val="lt1"/>
-          </a:fontRef>
-        </p:style>
-        <p:txBody>
-          <a:bodyPr rtlCol="0" anchor="ctr"/>
-          <a:lstStyle/>
-          <a:p>
-            <a:pPr algn="ctr"/>
-          </a:p>
-        </p:txBody>
-      </p:sp>
-      <p:sp>
-        <p:nvSpPr>
-          <p:cNvPr id="12" name="TextBox 11"/>
-          <p:cNvSpPr txBox="1"/>
-          <p:nvPr/>
-        </p:nvSpPr>
-        <p:spPr>
-          <a:xfrm>
-            <a:off x="6217920" y="4709160"/>
-            <a:ext cx="2194560" cy="411480"/>
-          </a:xfrm>
-          <a:prstGeom prst="rect">
-            <a:avLst/>
-          </a:prstGeom>
-          <a:noFill/>
-        </p:spPr>
-        <p:txBody>
-          <a:bodyPr wrap="square">
-            <a:spAutoFit/>
-          </a:bodyPr>
-          <a:lstStyle/>
-          <a:p>
-            <a:pPr algn="ctr"/>
-            <a:r>
-              <a:rPr sz="1150" b="0" i="0">
-                <a:solidFill>
-                  <a:srgbClr val="F4EFE6"/>
-                </a:solidFill>
-              </a:rPr>
-              <a:t>4  acts</a:t>
-            </a:r>
-          </a:p>
-        </p:txBody>
-      </p:sp>
-      <p:sp>
-        <p:nvSpPr>
-          <p:cNvPr id="13" name="Rectangle 12"/>
-          <p:cNvSpPr/>
-          <p:nvPr/>
-        </p:nvSpPr>
-        <p:spPr>
-          <a:xfrm>
-            <a:off x="8394192" y="4754880"/>
-            <a:ext cx="18288" cy="320040"/>
-          </a:xfrm>
-          <a:prstGeom prst="rect">
-            <a:avLst/>
-          </a:prstGeom>
-          <a:solidFill>
-            <a:srgbClr val="8A7D6E"/>
-          </a:solidFill>
-          <a:ln>
-            <a:noFill/>
-          </a:ln>
-        </p:spPr>
-        <p:style>
-          <a:lnRef idx="1">
-            <a:schemeClr val="accent1"/>
-          </a:lnRef>
-          <a:fillRef idx="3">
-            <a:schemeClr val="accent1"/>
-          </a:fillRef>
-          <a:effectRef idx="2">
-            <a:schemeClr val="accent1"/>
-          </a:effectRef>
-          <a:fontRef idx="minor">
-            <a:schemeClr val="lt1"/>
-          </a:fontRef>
-        </p:style>
-        <p:txBody>
-          <a:bodyPr rtlCol="0" anchor="ctr"/>
-          <a:lstStyle/>
-          <a:p>
-            <a:pPr algn="ctr"/>
-          </a:p>
-        </p:txBody>
-      </p:sp>
-      <p:sp>
-        <p:nvSpPr>
-          <p:cNvPr id="14" name="TextBox 13"/>
-          <p:cNvSpPr txBox="1"/>
-          <p:nvPr/>
-        </p:nvSpPr>
-        <p:spPr>
-          <a:xfrm>
-            <a:off x="8503920" y="4709160"/>
-            <a:ext cx="2194560" cy="411480"/>
-          </a:xfrm>
-          <a:prstGeom prst="rect">
-            <a:avLst/>
-          </a:prstGeom>
-          <a:noFill/>
-        </p:spPr>
-        <p:txBody>
-          <a:bodyPr wrap="square">
-            <a:spAutoFit/>
-          </a:bodyPr>
-          <a:lstStyle/>
-          <a:p>
-            <a:pPr algn="ctr"/>
-            <a:r>
-              <a:rPr sz="1150" b="0" i="0">
-                <a:solidFill>
-                  <a:srgbClr val="F4EFE6"/>
-                </a:solidFill>
-              </a:rPr>
-              <a:t>5,000  Monte Carlo runs</a:t>
-            </a:r>
-          </a:p>
-        </p:txBody>
-      </p:sp>
-      <p:sp>
-        <p:nvSpPr>
-          <p:cNvPr id="15" name="Rectangle 14"/>
-          <p:cNvSpPr/>
-          <p:nvPr/>
-        </p:nvSpPr>
-        <p:spPr>
-          <a:xfrm>
-            <a:off x="1645920" y="4645152"/>
-            <a:ext cx="8869680" cy="10972"/>
-          </a:xfrm>
-          <a:prstGeom prst="rect">
-            <a:avLst/>
-          </a:prstGeom>
-          <a:solidFill>
-            <a:srgbClr val="8A7D6E"/>
-          </a:solidFill>
-          <a:ln>
-            <a:noFill/>
-          </a:ln>
-        </p:spPr>
-        <p:style>
-          <a:lnRef idx="1">
-            <a:schemeClr val="accent1"/>
-          </a:lnRef>
-          <a:fillRef idx="3">
-            <a:schemeClr val="accent1"/>
-          </a:fillRef>
-          <a:effectRef idx="2">
-            <a:schemeClr val="accent1"/>
-          </a:effectRef>
-          <a:fontRef idx="minor">
-            <a:schemeClr val="lt1"/>
-          </a:fontRef>
-        </p:style>
-        <p:txBody>
-          <a:bodyPr rtlCol="0" anchor="ctr"/>
-          <a:lstStyle/>
-          <a:p>
-            <a:pPr algn="ctr"/>
-          </a:p>
-        </p:txBody>
-      </p:sp>
-      <p:sp>
-        <p:nvSpPr>
-          <p:cNvPr id="16" name="Rectangle 15"/>
-          <p:cNvSpPr/>
-          <p:nvPr/>
-        </p:nvSpPr>
-        <p:spPr>
-          <a:xfrm>
-            <a:off x="1645920" y="5166360"/>
-            <a:ext cx="8869680" cy="10972"/>
-          </a:xfrm>
-          <a:prstGeom prst="rect">
-            <a:avLst/>
-          </a:prstGeom>
-          <a:solidFill>
-            <a:srgbClr val="8A7D6E"/>
-          </a:solidFill>
-          <a:ln>
-            <a:noFill/>
-          </a:ln>
-        </p:spPr>
-        <p:style>
-          <a:lnRef idx="1">
-            <a:schemeClr val="accent1"/>
-          </a:lnRef>
-          <a:fillRef idx="3">
-            <a:schemeClr val="accent1"/>
-          </a:fillRef>
-          <a:effectRef idx="2">
-            <a:schemeClr val="accent1"/>
-          </a:effectRef>
-          <a:fontRef idx="minor">
-            <a:schemeClr val="lt1"/>
-          </a:fontRef>
-        </p:style>
-        <p:txBody>
-          <a:bodyPr rtlCol="0" anchor="ctr"/>
-          <a:lstStyle/>
-          <a:p>
-            <a:pPr algn="ctr"/>
-          </a:p>
-        </p:txBody>
-      </p:sp>
-      <p:sp>
-        <p:nvSpPr>
-          <p:cNvPr id="17" name="TextBox 16"/>
-          <p:cNvSpPr txBox="1"/>
-          <p:nvPr/>
-        </p:nvSpPr>
-        <p:spPr>
-          <a:xfrm>
-            <a:off x="1371600" y="5760720"/>
-            <a:ext cx="9445752" cy="457200"/>
-          </a:xfrm>
-          <a:prstGeom prst="rect">
-            <a:avLst/>
-          </a:prstGeom>
-          <a:noFill/>
-        </p:spPr>
-        <p:txBody>
-          <a:bodyPr wrap="square">
-            <a:spAutoFit/>
-          </a:bodyPr>
-          <a:lstStyle/>
-          <a:p>
-            <a:pPr algn="ctr"/>
-            <a:r>
-              <a:rPr sz="1300" b="1" i="0">
-                <a:solidFill>
-                  <a:srgbClr val="B8862A"/>
-                </a:solidFill>
-              </a:rPr>
-              <a:t>Fernanda Ita  ·  Alexis Marcos  ·  Carlos Torres</a:t>
-            </a:r>
-          </a:p>
-        </p:txBody>
-      </p:sp>
-      <p:sp>
-        <p:nvSpPr>
-          <p:cNvPr id="18" name="TextBox 17"/>
-          <p:cNvSpPr txBox="1"/>
-          <p:nvPr/>
-        </p:nvSpPr>
-        <p:spPr>
-          <a:xfrm>
-            <a:off x="1371600" y="6217920"/>
-            <a:ext cx="9445752" cy="411480"/>
-          </a:xfrm>
-          <a:prstGeom prst="rect">
-            <a:avLst/>
-          </a:prstGeom>
-          <a:noFill/>
-        </p:spPr>
-        <p:txBody>
-          <a:bodyPr wrap="square">
-            <a:spAutoFit/>
-          </a:bodyPr>
-          <a:lstStyle/>
-          <a:p>
-            <a:pPr algn="ctr"/>
-            <a:r>
-              <a:rPr sz="1000" b="0" i="0">
+              <a:rPr sz="1000" b="0" i="0" dirty="0">
                 <a:solidFill>
                   <a:srgbClr val="8A7D6E"/>
                 </a:solidFill>
               </a:rPr>
-              <a:t>Mechatronics Engineering · Campus SLP</a:t>
+              <a:t>Campus SLP</a:t>
             </a:r>
           </a:p>
         </p:txBody>
@@ -5009,7 +4604,7 @@
 </file>
 
 <file path=ppt/slides/slide10.xml><?xml version="1.0" encoding="utf-8"?>
-<p:sld xmlns:a="http://schemas.openxmlformats.org/drawingml/2006/main" xmlns:p="http://schemas.openxmlformats.org/presentationml/2006/main" xmlns:r="http://schemas.openxmlformats.org/officeDocument/2006/relationships">
+<p:sld xmlns:a="http://schemas.openxmlformats.org/drawingml/2006/main" xmlns:r="http://schemas.openxmlformats.org/officeDocument/2006/relationships" xmlns:p="http://schemas.openxmlformats.org/presentationml/2006/main">
   <p:cSld>
     <p:bg>
       <p:bgPr>
@@ -5025,7 +4620,14 @@
         <p:cNvGrpSpPr/>
         <p:nvPr/>
       </p:nvGrpSpPr>
-      <p:grpSpPr/>
+      <p:grpSpPr>
+        <a:xfrm>
+          <a:off x="0" y="0"/>
+          <a:ext cx="0" cy="0"/>
+          <a:chOff x="0" y="0"/>
+          <a:chExt cx="0" cy="0"/>
+        </a:xfrm>
+      </p:grpSpPr>
       <p:sp>
         <p:nvSpPr>
           <p:cNvPr id="2" name="Rectangle 1"/>
@@ -5066,6 +4668,7 @@
           <a:lstStyle/>
           <a:p>
             <a:pPr algn="ctr"/>
+            <a:endParaRPr/>
           </a:p>
         </p:txBody>
       </p:sp>
@@ -5143,6 +4746,7 @@
           <a:lstStyle/>
           <a:p>
             <a:pPr algn="ctr"/>
+            <a:endParaRPr/>
           </a:p>
         </p:txBody>
       </p:sp>
@@ -5220,6 +4824,7 @@
           <a:lstStyle/>
           <a:p>
             <a:pPr algn="ctr"/>
+            <a:endParaRPr/>
           </a:p>
         </p:txBody>
       </p:sp>
@@ -5468,6 +5073,7 @@
           <a:lstStyle/>
           <a:p>
             <a:pPr algn="ctr"/>
+            <a:endParaRPr/>
           </a:p>
         </p:txBody>
       </p:sp>
@@ -5682,6 +5288,7 @@
           <a:lstStyle/>
           <a:p>
             <a:pPr algn="ctr"/>
+            <a:endParaRPr/>
           </a:p>
         </p:txBody>
       </p:sp>
@@ -5817,7 +5424,7 @@
                   <a:srgbClr val="4A4138"/>
                 </a:solidFill>
               </a:rPr>
-              <a:t>·  Teacher fidelity in implementation</a:t>
+              <a:t>·  Teacher fidelity in real implementation</a:t>
             </a:r>
           </a:p>
         </p:txBody>
@@ -5885,7 +5492,7 @@
                   <a:srgbClr val="8A7D6E"/>
                 </a:solidFill>
               </a:rPr>
-              <a:t>This simulation is a literature-based projection — not a prediction. Any deployment requires a followed-up pilot study.</a:t>
+              <a:t>This simulation is a literature-based projection — not a prediction. Any deployment requires a piloted study with follow-up.</a:t>
             </a:r>
           </a:p>
         </p:txBody>
@@ -5899,7 +5506,7 @@
 </file>
 
 <file path=ppt/slides/slide11.xml><?xml version="1.0" encoding="utf-8"?>
-<p:sld xmlns:a="http://schemas.openxmlformats.org/drawingml/2006/main" xmlns:p="http://schemas.openxmlformats.org/presentationml/2006/main" xmlns:r="http://schemas.openxmlformats.org/officeDocument/2006/relationships">
+<p:sld xmlns:a="http://schemas.openxmlformats.org/drawingml/2006/main" xmlns:r="http://schemas.openxmlformats.org/officeDocument/2006/relationships" xmlns:p="http://schemas.openxmlformats.org/presentationml/2006/main">
   <p:cSld>
     <p:bg>
       <p:bgPr>
@@ -5915,7 +5522,14 @@
         <p:cNvGrpSpPr/>
         <p:nvPr/>
       </p:nvGrpSpPr>
-      <p:grpSpPr/>
+      <p:grpSpPr>
+        <a:xfrm>
+          <a:off x="0" y="0"/>
+          <a:ext cx="0" cy="0"/>
+          <a:chOff x="0" y="0"/>
+          <a:chExt cx="0" cy="0"/>
+        </a:xfrm>
+      </p:grpSpPr>
       <p:sp>
         <p:nvSpPr>
           <p:cNvPr id="2" name="Rectangle 1"/>
@@ -5956,6 +5570,7 @@
           <a:lstStyle/>
           <a:p>
             <a:pPr algn="ctr"/>
+            <a:endParaRPr/>
           </a:p>
         </p:txBody>
       </p:sp>
@@ -6033,6 +5648,7 @@
           <a:lstStyle/>
           <a:p>
             <a:pPr algn="ctr"/>
+            <a:endParaRPr/>
           </a:p>
         </p:txBody>
       </p:sp>
@@ -6072,47 +5688,13 @@
       </p:sp>
       <p:sp>
         <p:nvSpPr>
-          <p:cNvPr id="6" name="TextBox 5"/>
-          <p:cNvSpPr txBox="1"/>
-          <p:nvPr/>
-        </p:nvSpPr>
-        <p:spPr>
-          <a:xfrm>
-            <a:off x="457200" y="1115568"/>
-            <a:ext cx="11247120" cy="365760"/>
-          </a:xfrm>
-          <a:prstGeom prst="rect">
-            <a:avLst/>
-          </a:prstGeom>
-          <a:noFill/>
-        </p:spPr>
-        <p:txBody>
-          <a:bodyPr wrap="square">
-            <a:spAutoFit/>
-          </a:bodyPr>
-          <a:lstStyle/>
-          <a:p>
-            <a:pPr algn="l"/>
-            <a:r>
-              <a:rPr sz="1200" b="0" i="1">
-                <a:solidFill>
-                  <a:srgbClr val="8A7D6E"/>
-                </a:solidFill>
-              </a:rPr>
-              <a:t>Semi-structured · 30–45 min · 8 core questions + 2–3 profile-specific</a:t>
-            </a:r>
-          </a:p>
-        </p:txBody>
-      </p:sp>
-      <p:sp>
-        <p:nvSpPr>
-          <p:cNvPr id="7" name="Rectangle 6"/>
+          <p:cNvPr id="13" name="Rectangle 12"/>
           <p:cNvSpPr/>
           <p:nvPr/>
         </p:nvSpPr>
         <p:spPr>
           <a:xfrm>
-            <a:off x="274320" y="1627632"/>
+            <a:off x="1362456" y="1627632"/>
             <a:ext cx="2176272" cy="3931920"/>
           </a:xfrm>
           <a:prstGeom prst="rect">
@@ -6144,18 +5726,19 @@
           <a:lstStyle/>
           <a:p>
             <a:pPr algn="ctr"/>
-          </a:p>
-        </p:txBody>
-      </p:sp>
-      <p:sp>
-        <p:nvSpPr>
-          <p:cNvPr id="8" name="Rectangle 7"/>
+            <a:endParaRPr/>
+          </a:p>
+        </p:txBody>
+      </p:sp>
+      <p:sp>
+        <p:nvSpPr>
+          <p:cNvPr id="14" name="Rectangle 13"/>
           <p:cNvSpPr/>
           <p:nvPr/>
         </p:nvSpPr>
         <p:spPr>
           <a:xfrm>
-            <a:off x="384048" y="1755648"/>
+            <a:off x="1472184" y="1755648"/>
             <a:ext cx="1956816" cy="2304288"/>
           </a:xfrm>
           <a:prstGeom prst="rect">
@@ -6187,18 +5770,19 @@
           <a:lstStyle/>
           <a:p>
             <a:pPr algn="ctr"/>
-          </a:p>
-        </p:txBody>
-      </p:sp>
-      <p:sp>
-        <p:nvSpPr>
-          <p:cNvPr id="9" name="TextBox 8"/>
+            <a:endParaRPr/>
+          </a:p>
+        </p:txBody>
+      </p:sp>
+      <p:sp>
+        <p:nvSpPr>
+          <p:cNvPr id="15" name="TextBox 14"/>
           <p:cNvSpPr txBox="1"/>
           <p:nvPr/>
         </p:nvSpPr>
         <p:spPr>
           <a:xfrm>
-            <a:off x="384048" y="2377440"/>
+            <a:off x="1472184" y="2377440"/>
             <a:ext cx="1956816" cy="777240"/>
           </a:xfrm>
           <a:prstGeom prst="rect">
@@ -6226,13 +5810,13 @@
       </p:sp>
       <p:sp>
         <p:nvSpPr>
-          <p:cNvPr id="10" name="TextBox 9"/>
+          <p:cNvPr id="16" name="TextBox 15"/>
           <p:cNvSpPr txBox="1"/>
           <p:nvPr/>
         </p:nvSpPr>
         <p:spPr>
           <a:xfrm>
-            <a:off x="384048" y="3035808"/>
+            <a:off x="1472184" y="3035808"/>
             <a:ext cx="1956816" cy="365760"/>
           </a:xfrm>
           <a:prstGeom prst="rect">
@@ -6260,13 +5844,13 @@
       </p:sp>
       <p:sp>
         <p:nvSpPr>
-          <p:cNvPr id="11" name="TextBox 10"/>
+          <p:cNvPr id="17" name="TextBox 16"/>
           <p:cNvSpPr txBox="1"/>
           <p:nvPr/>
         </p:nvSpPr>
         <p:spPr>
           <a:xfrm>
-            <a:off x="365760" y="4142232"/>
+            <a:off x="1453896" y="4142232"/>
             <a:ext cx="1993392" cy="777240"/>
           </a:xfrm>
           <a:prstGeom prst="rect">
@@ -6287,21 +5871,21 @@
                   <a:srgbClr val="B8862A"/>
                 </a:solidFill>
               </a:rPr>
-              <a:t>Dr. José Manuel
-Olais Govea</a:t>
-            </a:r>
-          </a:p>
-        </p:txBody>
-      </p:sp>
-      <p:sp>
-        <p:nvSpPr>
-          <p:cNvPr id="12" name="TextBox 11"/>
+              <a:t>Dr. Leopoldo
+Zúñiga Silva</a:t>
+            </a:r>
+          </a:p>
+        </p:txBody>
+      </p:sp>
+      <p:sp>
+        <p:nvSpPr>
+          <p:cNvPr id="18" name="TextBox 17"/>
           <p:cNvSpPr txBox="1"/>
           <p:nvPr/>
         </p:nvSpPr>
         <p:spPr>
           <a:xfrm>
-            <a:off x="365760" y="4919472"/>
+            <a:off x="1453896" y="4919472"/>
             <a:ext cx="1993392" cy="594360"/>
           </a:xfrm>
           <a:prstGeom prst="rect">
@@ -6330,13 +5914,13 @@
       </p:sp>
       <p:sp>
         <p:nvSpPr>
-          <p:cNvPr id="13" name="Rectangle 12"/>
+          <p:cNvPr id="19" name="Rectangle 18"/>
           <p:cNvSpPr/>
           <p:nvPr/>
         </p:nvSpPr>
         <p:spPr>
           <a:xfrm>
-            <a:off x="2615184" y="1627632"/>
+            <a:off x="3703320" y="1627632"/>
             <a:ext cx="2176272" cy="3931920"/>
           </a:xfrm>
           <a:prstGeom prst="rect">
@@ -6368,18 +5952,19 @@
           <a:lstStyle/>
           <a:p>
             <a:pPr algn="ctr"/>
-          </a:p>
-        </p:txBody>
-      </p:sp>
-      <p:sp>
-        <p:nvSpPr>
-          <p:cNvPr id="14" name="Rectangle 13"/>
+            <a:endParaRPr/>
+          </a:p>
+        </p:txBody>
+      </p:sp>
+      <p:sp>
+        <p:nvSpPr>
+          <p:cNvPr id="20" name="Rectangle 19"/>
           <p:cNvSpPr/>
           <p:nvPr/>
         </p:nvSpPr>
         <p:spPr>
           <a:xfrm>
-            <a:off x="2724912" y="1755648"/>
+            <a:off x="3813048" y="1755648"/>
             <a:ext cx="1956816" cy="2304288"/>
           </a:xfrm>
           <a:prstGeom prst="rect">
@@ -6411,18 +5996,19 @@
           <a:lstStyle/>
           <a:p>
             <a:pPr algn="ctr"/>
-          </a:p>
-        </p:txBody>
-      </p:sp>
-      <p:sp>
-        <p:nvSpPr>
-          <p:cNvPr id="15" name="TextBox 14"/>
+            <a:endParaRPr/>
+          </a:p>
+        </p:txBody>
+      </p:sp>
+      <p:sp>
+        <p:nvSpPr>
+          <p:cNvPr id="21" name="TextBox 20"/>
           <p:cNvSpPr txBox="1"/>
           <p:nvPr/>
         </p:nvSpPr>
         <p:spPr>
           <a:xfrm>
-            <a:off x="2724912" y="2377440"/>
+            <a:off x="3813048" y="2377440"/>
             <a:ext cx="1956816" cy="777240"/>
           </a:xfrm>
           <a:prstGeom prst="rect">
@@ -6450,13 +6036,13 @@
       </p:sp>
       <p:sp>
         <p:nvSpPr>
-          <p:cNvPr id="16" name="TextBox 15"/>
+          <p:cNvPr id="22" name="TextBox 21"/>
           <p:cNvSpPr txBox="1"/>
           <p:nvPr/>
         </p:nvSpPr>
         <p:spPr>
           <a:xfrm>
-            <a:off x="2724912" y="3035808"/>
+            <a:off x="3813048" y="3035808"/>
             <a:ext cx="1956816" cy="365760"/>
           </a:xfrm>
           <a:prstGeom prst="rect">
@@ -6484,13 +6070,13 @@
       </p:sp>
       <p:sp>
         <p:nvSpPr>
-          <p:cNvPr id="17" name="TextBox 16"/>
+          <p:cNvPr id="23" name="TextBox 22"/>
           <p:cNvSpPr txBox="1"/>
           <p:nvPr/>
         </p:nvSpPr>
         <p:spPr>
           <a:xfrm>
-            <a:off x="2706624" y="4142232"/>
+            <a:off x="3794760" y="4142232"/>
             <a:ext cx="1993392" cy="777240"/>
           </a:xfrm>
           <a:prstGeom prst="rect">
@@ -6511,21 +6097,21 @@
                   <a:srgbClr val="B8862A"/>
                 </a:solidFill>
               </a:rPr>
-              <a:t>Dr. Leopoldo
-Zúñiga Silva</a:t>
-            </a:r>
-          </a:p>
-        </p:txBody>
-      </p:sp>
-      <p:sp>
-        <p:nvSpPr>
-          <p:cNvPr id="18" name="TextBox 17"/>
+              <a:t>Principal
+Sec. Técnica 78</a:t>
+            </a:r>
+          </a:p>
+        </p:txBody>
+      </p:sp>
+      <p:sp>
+        <p:nvSpPr>
+          <p:cNvPr id="24" name="TextBox 23"/>
           <p:cNvSpPr txBox="1"/>
           <p:nvPr/>
         </p:nvSpPr>
         <p:spPr>
           <a:xfrm>
-            <a:off x="2706624" y="4919472"/>
+            <a:off x="3794760" y="4919472"/>
             <a:ext cx="1993392" cy="594360"/>
           </a:xfrm>
           <a:prstGeom prst="rect">
@@ -6546,21 +6132,21 @@
                   <a:srgbClr val="8A7D6E"/>
                 </a:solidFill>
               </a:rPr>
-              <a:t>Tec de Monterrey
-Education research</a:t>
-            </a:r>
-          </a:p>
-        </p:txBody>
-      </p:sp>
-      <p:sp>
-        <p:nvSpPr>
-          <p:cNvPr id="19" name="Rectangle 18"/>
+              <a:t>Matehuala, SLP
+Implementation</a:t>
+            </a:r>
+          </a:p>
+        </p:txBody>
+      </p:sp>
+      <p:sp>
+        <p:nvSpPr>
+          <p:cNvPr id="25" name="Rectangle 24"/>
           <p:cNvSpPr/>
           <p:nvPr/>
         </p:nvSpPr>
         <p:spPr>
           <a:xfrm>
-            <a:off x="4956048" y="1627632"/>
+            <a:off x="6044184" y="1627632"/>
             <a:ext cx="2176272" cy="3931920"/>
           </a:xfrm>
           <a:prstGeom prst="rect">
@@ -6592,18 +6178,19 @@
           <a:lstStyle/>
           <a:p>
             <a:pPr algn="ctr"/>
-          </a:p>
-        </p:txBody>
-      </p:sp>
-      <p:sp>
-        <p:nvSpPr>
-          <p:cNvPr id="20" name="Rectangle 19"/>
+            <a:endParaRPr/>
+          </a:p>
+        </p:txBody>
+      </p:sp>
+      <p:sp>
+        <p:nvSpPr>
+          <p:cNvPr id="26" name="Rectangle 25"/>
           <p:cNvSpPr/>
           <p:nvPr/>
         </p:nvSpPr>
         <p:spPr>
           <a:xfrm>
-            <a:off x="5065776" y="1755648"/>
+            <a:off x="6153912" y="1755648"/>
             <a:ext cx="1956816" cy="2304288"/>
           </a:xfrm>
           <a:prstGeom prst="rect">
@@ -6635,18 +6222,19 @@
           <a:lstStyle/>
           <a:p>
             <a:pPr algn="ctr"/>
-          </a:p>
-        </p:txBody>
-      </p:sp>
-      <p:sp>
-        <p:nvSpPr>
-          <p:cNvPr id="21" name="TextBox 20"/>
+            <a:endParaRPr/>
+          </a:p>
+        </p:txBody>
+      </p:sp>
+      <p:sp>
+        <p:nvSpPr>
+          <p:cNvPr id="27" name="TextBox 26"/>
           <p:cNvSpPr txBox="1"/>
           <p:nvPr/>
         </p:nvSpPr>
         <p:spPr>
           <a:xfrm>
-            <a:off x="5065776" y="2377440"/>
+            <a:off x="6153912" y="2377440"/>
             <a:ext cx="1956816" cy="777240"/>
           </a:xfrm>
           <a:prstGeom prst="rect">
@@ -6674,13 +6262,13 @@
       </p:sp>
       <p:sp>
         <p:nvSpPr>
-          <p:cNvPr id="22" name="TextBox 21"/>
+          <p:cNvPr id="28" name="TextBox 27"/>
           <p:cNvSpPr txBox="1"/>
           <p:nvPr/>
         </p:nvSpPr>
         <p:spPr>
           <a:xfrm>
-            <a:off x="5065776" y="3035808"/>
+            <a:off x="6153912" y="3035808"/>
             <a:ext cx="1956816" cy="365760"/>
           </a:xfrm>
           <a:prstGeom prst="rect">
@@ -6708,13 +6296,13 @@
       </p:sp>
       <p:sp>
         <p:nvSpPr>
-          <p:cNvPr id="23" name="TextBox 22"/>
+          <p:cNvPr id="29" name="TextBox 28"/>
           <p:cNvSpPr txBox="1"/>
           <p:nvPr/>
         </p:nvSpPr>
         <p:spPr>
           <a:xfrm>
-            <a:off x="5047488" y="4142232"/>
+            <a:off x="6135624" y="4142232"/>
             <a:ext cx="1993392" cy="777240"/>
           </a:xfrm>
           <a:prstGeom prst="rect">
@@ -6735,21 +6323,21 @@
                   <a:srgbClr val="B8862A"/>
                 </a:solidFill>
               </a:rPr>
-              <a:t>Director
-Sec. Técnica 78</a:t>
-            </a:r>
-          </a:p>
-        </p:txBody>
-      </p:sp>
-      <p:sp>
-        <p:nvSpPr>
-          <p:cNvPr id="24" name="TextBox 23"/>
+              <a:t>PE Teacher
+(fitness practitioner)</a:t>
+            </a:r>
+          </a:p>
+        </p:txBody>
+      </p:sp>
+      <p:sp>
+        <p:nvSpPr>
+          <p:cNvPr id="30" name="TextBox 29"/>
           <p:cNvSpPr txBox="1"/>
           <p:nvPr/>
         </p:nvSpPr>
         <p:spPr>
           <a:xfrm>
-            <a:off x="5047488" y="4919472"/>
+            <a:off x="6135624" y="4919472"/>
             <a:ext cx="1993392" cy="594360"/>
           </a:xfrm>
           <a:prstGeom prst="rect">
@@ -6770,21 +6358,21 @@
                   <a:srgbClr val="8A7D6E"/>
                 </a:solidFill>
               </a:rPr>
-              <a:t>Matehuala, SLP
-Implementation</a:t>
-            </a:r>
-          </a:p>
-        </p:txBody>
-      </p:sp>
-      <p:sp>
-        <p:nvSpPr>
-          <p:cNvPr id="25" name="Rectangle 24"/>
+              <a:t>Secondary school
+Classroom practice</a:t>
+            </a:r>
+          </a:p>
+        </p:txBody>
+      </p:sp>
+      <p:sp>
+        <p:nvSpPr>
+          <p:cNvPr id="31" name="Rectangle 30"/>
           <p:cNvSpPr/>
           <p:nvPr/>
         </p:nvSpPr>
         <p:spPr>
           <a:xfrm>
-            <a:off x="7296912" y="1627632"/>
+            <a:off x="8385048" y="1627632"/>
             <a:ext cx="2176272" cy="3931920"/>
           </a:xfrm>
           <a:prstGeom prst="rect">
@@ -6816,18 +6404,19 @@
           <a:lstStyle/>
           <a:p>
             <a:pPr algn="ctr"/>
-          </a:p>
-        </p:txBody>
-      </p:sp>
-      <p:sp>
-        <p:nvSpPr>
-          <p:cNvPr id="26" name="Rectangle 25"/>
+            <a:endParaRPr/>
+          </a:p>
+        </p:txBody>
+      </p:sp>
+      <p:sp>
+        <p:nvSpPr>
+          <p:cNvPr id="32" name="Rectangle 31"/>
           <p:cNvSpPr/>
           <p:nvPr/>
         </p:nvSpPr>
         <p:spPr>
           <a:xfrm>
-            <a:off x="7406640" y="1755648"/>
+            <a:off x="8494776" y="1755648"/>
             <a:ext cx="1956816" cy="2304288"/>
           </a:xfrm>
           <a:prstGeom prst="rect">
@@ -6859,18 +6448,19 @@
           <a:lstStyle/>
           <a:p>
             <a:pPr algn="ctr"/>
-          </a:p>
-        </p:txBody>
-      </p:sp>
-      <p:sp>
-        <p:nvSpPr>
-          <p:cNvPr id="27" name="TextBox 26"/>
+            <a:endParaRPr/>
+          </a:p>
+        </p:txBody>
+      </p:sp>
+      <p:sp>
+        <p:nvSpPr>
+          <p:cNvPr id="33" name="TextBox 32"/>
           <p:cNvSpPr txBox="1"/>
           <p:nvPr/>
         </p:nvSpPr>
         <p:spPr>
           <a:xfrm>
-            <a:off x="7406640" y="2377440"/>
+            <a:off x="8494776" y="2377440"/>
             <a:ext cx="1956816" cy="777240"/>
           </a:xfrm>
           <a:prstGeom prst="rect">
@@ -6898,13 +6488,13 @@
       </p:sp>
       <p:sp>
         <p:nvSpPr>
-          <p:cNvPr id="28" name="TextBox 27"/>
+          <p:cNvPr id="34" name="TextBox 33"/>
           <p:cNvSpPr txBox="1"/>
           <p:nvPr/>
         </p:nvSpPr>
         <p:spPr>
           <a:xfrm>
-            <a:off x="7406640" y="3035808"/>
+            <a:off x="8494776" y="3035808"/>
             <a:ext cx="1956816" cy="365760"/>
           </a:xfrm>
           <a:prstGeom prst="rect">
@@ -6932,13 +6522,13 @@
       </p:sp>
       <p:sp>
         <p:nvSpPr>
-          <p:cNvPr id="29" name="TextBox 28"/>
+          <p:cNvPr id="35" name="TextBox 34"/>
           <p:cNvSpPr txBox="1"/>
           <p:nvPr/>
         </p:nvSpPr>
         <p:spPr>
           <a:xfrm>
-            <a:off x="7388352" y="4142232"/>
+            <a:off x="8476488" y="4142232"/>
             <a:ext cx="1993392" cy="777240"/>
           </a:xfrm>
           <a:prstGeom prst="rect">
@@ -6959,21 +6549,21 @@
                   <a:srgbClr val="B8862A"/>
                 </a:solidFill>
               </a:rPr>
-              <a:t>Docente EF
-(fitness)</a:t>
-            </a:r>
-          </a:p>
-        </p:txBody>
-      </p:sp>
-      <p:sp>
-        <p:nvSpPr>
-          <p:cNvPr id="30" name="TextBox 29"/>
+              <a:t>Education student
+(fitness practitioner)</a:t>
+            </a:r>
+          </a:p>
+        </p:txBody>
+      </p:sp>
+      <p:sp>
+        <p:nvSpPr>
+          <p:cNvPr id="36" name="TextBox 35"/>
           <p:cNvSpPr txBox="1"/>
           <p:nvPr/>
         </p:nvSpPr>
         <p:spPr>
           <a:xfrm>
-            <a:off x="7388352" y="4919472"/>
+            <a:off x="8476488" y="4919472"/>
             <a:ext cx="1993392" cy="594360"/>
           </a:xfrm>
           <a:prstGeom prst="rect">
@@ -6994,108 +6584,22 @@
                   <a:srgbClr val="8A7D6E"/>
                 </a:solidFill>
               </a:rPr>
-              <a:t>Secondary school
-Classroom practice</a:t>
-            </a:r>
-          </a:p>
-        </p:txBody>
-      </p:sp>
-      <p:sp>
-        <p:nvSpPr>
-          <p:cNvPr id="31" name="Rectangle 30"/>
-          <p:cNvSpPr/>
-          <p:nvPr/>
-        </p:nvSpPr>
-        <p:spPr>
-          <a:xfrm>
-            <a:off x="9637776" y="1627632"/>
-            <a:ext cx="2176272" cy="3931920"/>
-          </a:xfrm>
-          <a:prstGeom prst="rect">
-            <a:avLst/>
-          </a:prstGeom>
-          <a:solidFill>
-            <a:srgbClr val="1A1612"/>
-          </a:solidFill>
-          <a:ln>
-            <a:noFill/>
-          </a:ln>
-        </p:spPr>
-        <p:style>
-          <a:lnRef idx="1">
-            <a:schemeClr val="accent1"/>
-          </a:lnRef>
-          <a:fillRef idx="3">
-            <a:schemeClr val="accent1"/>
-          </a:fillRef>
-          <a:effectRef idx="2">
-            <a:schemeClr val="accent1"/>
-          </a:effectRef>
-          <a:fontRef idx="minor">
-            <a:schemeClr val="lt1"/>
-          </a:fontRef>
-        </p:style>
-        <p:txBody>
-          <a:bodyPr rtlCol="0" anchor="ctr"/>
-          <a:lstStyle/>
-          <a:p>
-            <a:pPr algn="ctr"/>
-          </a:p>
-        </p:txBody>
-      </p:sp>
-      <p:sp>
-        <p:nvSpPr>
-          <p:cNvPr id="32" name="Rectangle 31"/>
-          <p:cNvSpPr/>
-          <p:nvPr/>
-        </p:nvSpPr>
-        <p:spPr>
-          <a:xfrm>
-            <a:off x="9747504" y="1755648"/>
-            <a:ext cx="1956816" cy="2304288"/>
-          </a:xfrm>
-          <a:prstGeom prst="rect">
-            <a:avLst/>
-          </a:prstGeom>
-          <a:solidFill>
-            <a:srgbClr val="2A221A"/>
-          </a:solidFill>
-          <a:ln>
-            <a:noFill/>
-          </a:ln>
-        </p:spPr>
-        <p:style>
-          <a:lnRef idx="1">
-            <a:schemeClr val="accent1"/>
-          </a:lnRef>
-          <a:fillRef idx="3">
-            <a:schemeClr val="accent1"/>
-          </a:fillRef>
-          <a:effectRef idx="2">
-            <a:schemeClr val="accent1"/>
-          </a:effectRef>
-          <a:fontRef idx="minor">
-            <a:schemeClr val="lt1"/>
-          </a:fontRef>
-        </p:style>
-        <p:txBody>
-          <a:bodyPr rtlCol="0" anchor="ctr"/>
-          <a:lstStyle/>
-          <a:p>
-            <a:pPr algn="ctr"/>
-          </a:p>
-        </p:txBody>
-      </p:sp>
-      <p:sp>
-        <p:nvSpPr>
-          <p:cNvPr id="33" name="TextBox 32"/>
+              <a:t>Tec de Monterrey
+Student voice</a:t>
+            </a:r>
+          </a:p>
+        </p:txBody>
+      </p:sp>
+      <p:sp>
+        <p:nvSpPr>
+          <p:cNvPr id="37" name="TextBox 36"/>
           <p:cNvSpPr txBox="1"/>
           <p:nvPr/>
         </p:nvSpPr>
         <p:spPr>
           <a:xfrm>
-            <a:off x="9747504" y="2377440"/>
-            <a:ext cx="1956816" cy="777240"/>
+            <a:off x="457200" y="5779008"/>
+            <a:ext cx="11247120" cy="269304"/>
           </a:xfrm>
           <a:prstGeom prst="rect">
             <a:avLst/>
@@ -7110,150 +6614,148 @@
           <a:p>
             <a:pPr algn="ctr"/>
             <a:r>
-              <a:rPr sz="3000" b="0" i="0">
-                <a:solidFill>
-                  <a:srgbClr val="B8862A"/>
-                </a:solidFill>
-              </a:rPr>
-              <a:t>▶</a:t>
-            </a:r>
-          </a:p>
-        </p:txBody>
-      </p:sp>
-      <p:sp>
-        <p:nvSpPr>
-          <p:cNvPr id="34" name="TextBox 33"/>
-          <p:cNvSpPr txBox="1"/>
-          <p:nvPr/>
-        </p:nvSpPr>
-        <p:spPr>
-          <a:xfrm>
-            <a:off x="9747504" y="3035808"/>
-            <a:ext cx="1956816" cy="365760"/>
-          </a:xfrm>
-          <a:prstGeom prst="rect">
-            <a:avLst/>
-          </a:prstGeom>
-          <a:noFill/>
-        </p:spPr>
-        <p:txBody>
-          <a:bodyPr wrap="square">
-            <a:spAutoFit/>
-          </a:bodyPr>
-          <a:lstStyle/>
-          <a:p>
-            <a:pPr algn="ctr"/>
-            <a:r>
-              <a:rPr sz="900" b="0" i="0">
+              <a:rPr sz="1150" b="0" i="1" dirty="0" err="1">
                 <a:solidFill>
                   <a:srgbClr val="8A7D6E"/>
                 </a:solidFill>
               </a:rPr>
-              <a:t>VIDEO</a:t>
-            </a:r>
-          </a:p>
-        </p:txBody>
-      </p:sp>
-      <p:sp>
-        <p:nvSpPr>
-          <p:cNvPr id="35" name="TextBox 34"/>
-          <p:cNvSpPr txBox="1"/>
-          <p:nvPr/>
-        </p:nvSpPr>
-        <p:spPr>
-          <a:xfrm>
-            <a:off x="9729216" y="4142232"/>
-            <a:ext cx="1993392" cy="777240"/>
-          </a:xfrm>
-          <a:prstGeom prst="rect">
-            <a:avLst/>
-          </a:prstGeom>
-          <a:noFill/>
-        </p:spPr>
-        <p:txBody>
-          <a:bodyPr wrap="square">
-            <a:spAutoFit/>
-          </a:bodyPr>
-          <a:lstStyle/>
-          <a:p>
-            <a:pPr algn="ctr"/>
-            <a:r>
-              <a:rPr sz="1000" b="1" i="0">
-                <a:solidFill>
-                  <a:srgbClr val="B8862A"/>
-                </a:solidFill>
-              </a:rPr>
-              <a:t>Est. Educación
-(fitness)</a:t>
-            </a:r>
-          </a:p>
-        </p:txBody>
-      </p:sp>
-      <p:sp>
-        <p:nvSpPr>
-          <p:cNvPr id="36" name="TextBox 35"/>
-          <p:cNvSpPr txBox="1"/>
-          <p:nvPr/>
-        </p:nvSpPr>
-        <p:spPr>
-          <a:xfrm>
-            <a:off x="9729216" y="4919472"/>
-            <a:ext cx="1993392" cy="594360"/>
-          </a:xfrm>
-          <a:prstGeom prst="rect">
-            <a:avLst/>
-          </a:prstGeom>
-          <a:noFill/>
-        </p:spPr>
-        <p:txBody>
-          <a:bodyPr wrap="square">
-            <a:spAutoFit/>
-          </a:bodyPr>
-          <a:lstStyle/>
-          <a:p>
-            <a:pPr algn="ctr"/>
-            <a:r>
-              <a:rPr sz="900" b="0" i="0">
+              <a:t>Convergence reported when 4 experts independently raise the same theme.</a:t>
+            </a:r>
+            <a:r>
+              <a:rPr sz="1150" b="0" i="1" dirty="0">
                 <a:solidFill>
                   <a:srgbClr val="8A7D6E"/>
                 </a:solidFill>
               </a:rPr>
-              <a:t>Tec de Monterrey
-Student voice</a:t>
-            </a:r>
-          </a:p>
-        </p:txBody>
-      </p:sp>
-      <p:sp>
-        <p:nvSpPr>
-          <p:cNvPr id="37" name="TextBox 36"/>
-          <p:cNvSpPr txBox="1"/>
-          <p:nvPr/>
-        </p:nvSpPr>
-        <p:spPr>
-          <a:xfrm>
-            <a:off x="457200" y="5779008"/>
-            <a:ext cx="11247120" cy="411480"/>
-          </a:xfrm>
-          <a:prstGeom prst="rect">
-            <a:avLst/>
-          </a:prstGeom>
-          <a:noFill/>
-        </p:spPr>
-        <p:txBody>
-          <a:bodyPr wrap="square">
-            <a:spAutoFit/>
-          </a:bodyPr>
-          <a:lstStyle/>
-          <a:p>
-            <a:pPr algn="ctr"/>
-            <a:r>
-              <a:rPr sz="1150" b="0" i="1">
+              <a:t/>
+            </a:r>
+            <a:r>
+              <a:rPr sz="1150" b="0" i="1" dirty="0" err="1">
                 <a:solidFill>
                   <a:srgbClr val="8A7D6E"/>
                 </a:solidFill>
               </a:rPr>
-              <a:t>Convergence reported when 4/5 experts raise the same theme independently.</a:t>
+              <a:t/>
+            </a:r>
+            <a:r>
+              <a:rPr sz="1150" b="0" i="1" dirty="0">
+                <a:solidFill>
+                  <a:srgbClr val="8A7D6E"/>
+                </a:solidFill>
+              </a:rPr>
+              <a:t/>
+            </a:r>
+            <a:r>
+              <a:rPr sz="1150" b="0" i="1" dirty="0" err="1">
+                <a:solidFill>
+                  <a:srgbClr val="8A7D6E"/>
+                </a:solidFill>
+              </a:rPr>
+              <a:t/>
+            </a:r>
+            <a:r>
+              <a:rPr sz="1150" b="0" i="1" dirty="0">
+                <a:solidFill>
+                  <a:srgbClr val="8A7D6E"/>
+                </a:solidFill>
+              </a:rPr>
+              <a:t/>
+            </a:r>
+            <a:r>
+              <a:rPr sz="1150" b="0" i="1" dirty="0" err="1">
+                <a:solidFill>
+                  <a:srgbClr val="8A7D6E"/>
+                </a:solidFill>
+              </a:rPr>
+              <a:t/>
+            </a:r>
+            <a:r>
+              <a:rPr sz="1150" b="0" i="1" dirty="0">
+                <a:solidFill>
+                  <a:srgbClr val="8A7D6E"/>
+                </a:solidFill>
+              </a:rPr>
+              <a:t/>
+            </a:r>
+            <a:r>
+              <a:rPr sz="1150" b="0" i="1" dirty="0" err="1">
+                <a:solidFill>
+                  <a:srgbClr val="8A7D6E"/>
+                </a:solidFill>
+              </a:rPr>
+              <a:t/>
+            </a:r>
+            <a:r>
+              <a:rPr sz="1150" b="0" i="1" dirty="0">
+                <a:solidFill>
+                  <a:srgbClr val="8A7D6E"/>
+                </a:solidFill>
+              </a:rPr>
+              <a:t/>
+            </a:r>
+            <a:r>
+              <a:rPr sz="1150" b="0" i="1" dirty="0" err="1">
+                <a:solidFill>
+                  <a:srgbClr val="8A7D6E"/>
+                </a:solidFill>
+              </a:rPr>
+              <a:t/>
+            </a:r>
+            <a:r>
+              <a:rPr sz="1150" b="0" i="1" dirty="0">
+                <a:solidFill>
+                  <a:srgbClr val="8A7D6E"/>
+                </a:solidFill>
+              </a:rPr>
+              <a:t/>
+            </a:r>
+            <a:r>
+              <a:rPr sz="1150" b="0" i="1" dirty="0" err="1">
+                <a:solidFill>
+                  <a:srgbClr val="8A7D6E"/>
+                </a:solidFill>
+              </a:rPr>
+              <a:t/>
+            </a:r>
+            <a:r>
+              <a:rPr sz="1150" b="0" i="1" dirty="0">
+                <a:solidFill>
+                  <a:srgbClr val="8A7D6E"/>
+                </a:solidFill>
+              </a:rPr>
+              <a:t/>
+            </a:r>
+            <a:r>
+              <a:rPr sz="1150" b="0" i="1" dirty="0" err="1">
+                <a:solidFill>
+                  <a:srgbClr val="8A7D6E"/>
+                </a:solidFill>
+              </a:rPr>
+              <a:t/>
+            </a:r>
+            <a:r>
+              <a:rPr sz="1150" b="0" i="1" dirty="0">
+                <a:solidFill>
+                  <a:srgbClr val="8A7D6E"/>
+                </a:solidFill>
+              </a:rPr>
+              <a:t/>
+            </a:r>
+            <a:r>
+              <a:rPr sz="1150" b="0" i="1" dirty="0" err="1">
+                <a:solidFill>
+                  <a:srgbClr val="8A7D6E"/>
+                </a:solidFill>
+              </a:rPr>
+              <a:t/>
+            </a:r>
+            <a:r>
+              <a:rPr sz="1150" b="0" i="1" dirty="0">
+                <a:solidFill>
+                  <a:srgbClr val="8A7D6E"/>
+                </a:solidFill>
+              </a:rPr>
+              <a:t/>
             </a:r>
           </a:p>
         </p:txBody>
@@ -7267,7 +6769,7 @@
 </file>
 
 <file path=ppt/slides/slide12.xml><?xml version="1.0" encoding="utf-8"?>
-<p:sld xmlns:a="http://schemas.openxmlformats.org/drawingml/2006/main" xmlns:p="http://schemas.openxmlformats.org/presentationml/2006/main" xmlns:r="http://schemas.openxmlformats.org/officeDocument/2006/relationships">
+<p:sld xmlns:a="http://schemas.openxmlformats.org/drawingml/2006/main" xmlns:r="http://schemas.openxmlformats.org/officeDocument/2006/relationships" xmlns:p="http://schemas.openxmlformats.org/presentationml/2006/main">
   <p:cSld>
     <p:bg>
       <p:bgPr>
@@ -7283,7 +6785,14 @@
         <p:cNvGrpSpPr/>
         <p:nvPr/>
       </p:nvGrpSpPr>
-      <p:grpSpPr/>
+      <p:grpSpPr>
+        <a:xfrm>
+          <a:off x="0" y="0"/>
+          <a:ext cx="0" cy="0"/>
+          <a:chOff x="0" y="0"/>
+          <a:chExt cx="0" cy="0"/>
+        </a:xfrm>
+      </p:grpSpPr>
       <p:sp>
         <p:nvSpPr>
           <p:cNvPr id="2" name="Rectangle 1"/>
@@ -7324,6 +6833,7 @@
           <a:lstStyle/>
           <a:p>
             <a:pPr algn="ctr"/>
+            <a:endParaRPr/>
           </a:p>
         </p:txBody>
       </p:sp>
@@ -7367,6 +6877,7 @@
           <a:lstStyle/>
           <a:p>
             <a:pPr algn="ctr"/>
+            <a:endParaRPr/>
           </a:p>
         </p:txBody>
       </p:sp>
@@ -7406,100 +6917,14 @@
       </p:sp>
       <p:sp>
         <p:nvSpPr>
-          <p:cNvPr id="5" name="Rectangle 4"/>
-          <p:cNvSpPr/>
-          <p:nvPr/>
-        </p:nvSpPr>
-        <p:spPr>
-          <a:xfrm>
-            <a:off x="457200" y="1645920"/>
-            <a:ext cx="2560320" cy="1828800"/>
-          </a:xfrm>
-          <a:prstGeom prst="rect">
-            <a:avLst/>
-          </a:prstGeom>
-          <a:solidFill>
-            <a:srgbClr val="28221A"/>
-          </a:solidFill>
-          <a:ln>
-            <a:noFill/>
-          </a:ln>
-        </p:spPr>
-        <p:style>
-          <a:lnRef idx="1">
-            <a:schemeClr val="accent1"/>
-          </a:lnRef>
-          <a:fillRef idx="3">
-            <a:schemeClr val="accent1"/>
-          </a:fillRef>
-          <a:effectRef idx="2">
-            <a:schemeClr val="accent1"/>
-          </a:effectRef>
-          <a:fontRef idx="minor">
-            <a:schemeClr val="lt1"/>
-          </a:fontRef>
-        </p:style>
-        <p:txBody>
-          <a:bodyPr rtlCol="0" anchor="ctr"/>
-          <a:lstStyle/>
-          <a:p>
-            <a:pPr algn="ctr"/>
-          </a:p>
-        </p:txBody>
-      </p:sp>
-      <p:sp>
-        <p:nvSpPr>
-          <p:cNvPr id="6" name="Rectangle 5"/>
-          <p:cNvSpPr/>
-          <p:nvPr/>
-        </p:nvSpPr>
-        <p:spPr>
-          <a:xfrm>
-            <a:off x="457200" y="1645920"/>
-            <a:ext cx="45720" cy="1828800"/>
-          </a:xfrm>
-          <a:prstGeom prst="rect">
-            <a:avLst/>
-          </a:prstGeom>
-          <a:solidFill>
-            <a:srgbClr val="B8332A"/>
-          </a:solidFill>
-          <a:ln>
-            <a:noFill/>
-          </a:ln>
-        </p:spPr>
-        <p:style>
-          <a:lnRef idx="1">
-            <a:schemeClr val="accent1"/>
-          </a:lnRef>
-          <a:fillRef idx="3">
-            <a:schemeClr val="accent1"/>
-          </a:fillRef>
-          <a:effectRef idx="2">
-            <a:schemeClr val="accent1"/>
-          </a:effectRef>
-          <a:fontRef idx="minor">
-            <a:schemeClr val="lt1"/>
-          </a:fontRef>
-        </p:style>
-        <p:txBody>
-          <a:bodyPr rtlCol="0" anchor="ctr"/>
-          <a:lstStyle/>
-          <a:p>
-            <a:pPr algn="ctr"/>
-          </a:p>
-        </p:txBody>
-      </p:sp>
-      <p:sp>
-        <p:nvSpPr>
-          <p:cNvPr id="7" name="TextBox 6"/>
+          <p:cNvPr id="21" name="TextBox 20"/>
           <p:cNvSpPr txBox="1"/>
           <p:nvPr/>
         </p:nvSpPr>
         <p:spPr>
           <a:xfrm>
-            <a:off x="566928" y="1691640"/>
-            <a:ext cx="640080" cy="502920"/>
+            <a:off x="757084" y="1883664"/>
+            <a:ext cx="10360152" cy="548640"/>
           </a:xfrm>
           <a:prstGeom prst="rect">
             <a:avLst/>
@@ -7512,28 +6937,108 @@
           </a:bodyPr>
           <a:lstStyle/>
           <a:p>
-            <a:pPr algn="l"/>
-            <a:r>
-              <a:rPr sz="1200" b="1" i="0">
-                <a:solidFill>
-                  <a:srgbClr val="B8332A"/>
-                </a:solidFill>
-              </a:rPr>
-              <a:t>01</a:t>
-            </a:r>
-          </a:p>
-        </p:txBody>
-      </p:sp>
-      <p:sp>
-        <p:nvSpPr>
-          <p:cNvPr id="8" name="TextBox 7"/>
+            <a:pPr algn="ctr"/>
+            <a:r>
+              <a:rPr sz="1500" b="0" i="1" dirty="0">
+                <a:solidFill>
+                  <a:srgbClr val="F4EFE6"/>
+                </a:solidFill>
+              </a:rPr>
+              <a:t>"The current ecosystem pushes unhealthy consumption.</a:t>
+            </a:r>
+            <a:r>
+              <a:rPr sz="1500" b="0" i="1" dirty="0" err="1">
+                <a:solidFill>
+                  <a:srgbClr val="F4EFE6"/>
+                </a:solidFill>
+              </a:rPr>
+              <a:t/>
+            </a:r>
+            <a:r>
+              <a:rPr sz="1500" b="0" i="1" dirty="0">
+                <a:solidFill>
+                  <a:srgbClr val="F4EFE6"/>
+                </a:solidFill>
+              </a:rPr>
+              <a:t/>
+            </a:r>
+            <a:r>
+              <a:rPr sz="1500" b="0" i="1" dirty="0" err="1">
+                <a:solidFill>
+                  <a:srgbClr val="F4EFE6"/>
+                </a:solidFill>
+              </a:rPr>
+              <a:t/>
+            </a:r>
+            <a:r>
+              <a:rPr sz="1500" b="0" i="1" dirty="0">
+                <a:solidFill>
+                  <a:srgbClr val="F4EFE6"/>
+                </a:solidFill>
+              </a:rPr>
+              <a:t/>
+            </a:r>
+            <a:r>
+              <a:rPr sz="1500" b="0" i="1" dirty="0" err="1">
+                <a:solidFill>
+                  <a:srgbClr val="F4EFE6"/>
+                </a:solidFill>
+              </a:rPr>
+              <a:t/>
+            </a:r>
+            <a:r>
+              <a:rPr sz="1500" b="0" i="1" dirty="0">
+                <a:solidFill>
+                  <a:srgbClr val="F4EFE6"/>
+                </a:solidFill>
+              </a:rPr>
+              <a:t/>
+            </a:r>
+            <a:r>
+              <a:rPr sz="1500" b="0" i="1" dirty="0" err="1">
+                <a:solidFill>
+                  <a:srgbClr val="F4EFE6"/>
+                </a:solidFill>
+              </a:rPr>
+              <a:t/>
+            </a:r>
+            <a:r>
+              <a:rPr sz="1500" b="0" i="1" dirty="0">
+                <a:solidFill>
+                  <a:srgbClr val="F4EFE6"/>
+                </a:solidFill>
+              </a:rPr>
+              <a:t/>
+            </a:r>
+            <a:r>
+              <a:rPr sz="1500" b="0" i="1" dirty="0" err="1">
+                <a:solidFill>
+                  <a:srgbClr val="F4EFE6"/>
+                </a:solidFill>
+              </a:rPr>
+              <a:t/>
+            </a:r>
+            <a:r>
+              <a:rPr sz="1500" b="0" i="1" dirty="0">
+                <a:solidFill>
+                  <a:srgbClr val="F4EFE6"/>
+                </a:solidFill>
+              </a:rPr>
+              <a:t/>
+            </a:r>
+          </a:p>
+        </p:txBody>
+      </p:sp>
+      <p:sp>
+        <p:nvSpPr>
+          <p:cNvPr id="22" name="TextBox 21"/>
           <p:cNvSpPr txBox="1"/>
           <p:nvPr/>
         </p:nvSpPr>
         <p:spPr>
           <a:xfrm>
-            <a:off x="566928" y="2176272"/>
-            <a:ext cx="2331720" cy="1188720"/>
+            <a:off x="914336" y="2721635"/>
+            <a:ext cx="10360152" cy="954107"/>
           </a:xfrm>
           <a:prstGeom prst="rect">
             <a:avLst/>
@@ -7546,116 +7051,156 @@
           </a:bodyPr>
           <a:lstStyle/>
           <a:p>
-            <a:pPr algn="l"/>
-            <a:r>
-              <a:rPr sz="1150" b="0" i="0">
-                <a:solidFill>
-                  <a:srgbClr val="F4EFE6"/>
-                </a:solidFill>
-              </a:rPr>
-              <a:t>R² = 0.032
-The regression
-explains nothing</a:t>
-            </a:r>
-          </a:p>
-        </p:txBody>
-      </p:sp>
-      <p:sp>
-        <p:nvSpPr>
-          <p:cNvPr id="9" name="Rectangle 8"/>
-          <p:cNvSpPr/>
-          <p:nvPr/>
-        </p:nvSpPr>
-        <p:spPr>
-          <a:xfrm>
-            <a:off x="3291840" y="1645920"/>
-            <a:ext cx="2560320" cy="1828800"/>
-          </a:xfrm>
-          <a:prstGeom prst="rect">
-            <a:avLst/>
-          </a:prstGeom>
-          <a:solidFill>
-            <a:srgbClr val="28221A"/>
-          </a:solidFill>
-          <a:ln>
-            <a:noFill/>
-          </a:ln>
-        </p:spPr>
-        <p:style>
-          <a:lnRef idx="1">
-            <a:schemeClr val="accent1"/>
-          </a:lnRef>
-          <a:fillRef idx="3">
-            <a:schemeClr val="accent1"/>
-          </a:fillRef>
-          <a:effectRef idx="2">
-            <a:schemeClr val="accent1"/>
-          </a:effectRef>
-          <a:fontRef idx="minor">
-            <a:schemeClr val="lt1"/>
-          </a:fontRef>
-        </p:style>
-        <p:txBody>
-          <a:bodyPr rtlCol="0" anchor="ctr"/>
-          <a:lstStyle/>
-          <a:p>
             <a:pPr algn="ctr"/>
-          </a:p>
-        </p:txBody>
-      </p:sp>
-      <p:sp>
-        <p:nvSpPr>
-          <p:cNvPr id="10" name="Rectangle 9"/>
-          <p:cNvSpPr/>
-          <p:nvPr/>
-        </p:nvSpPr>
-        <p:spPr>
-          <a:xfrm>
-            <a:off x="3291840" y="1645920"/>
-            <a:ext cx="45720" cy="1828800"/>
-          </a:xfrm>
-          <a:prstGeom prst="rect">
-            <a:avLst/>
-          </a:prstGeom>
-          <a:solidFill>
-            <a:srgbClr val="B8862A"/>
-          </a:solidFill>
-          <a:ln>
-            <a:noFill/>
-          </a:ln>
-        </p:spPr>
-        <p:style>
-          <a:lnRef idx="1">
-            <a:schemeClr val="accent1"/>
-          </a:lnRef>
-          <a:fillRef idx="3">
-            <a:schemeClr val="accent1"/>
-          </a:fillRef>
-          <a:effectRef idx="2">
-            <a:schemeClr val="accent1"/>
-          </a:effectRef>
-          <a:fontRef idx="minor">
-            <a:schemeClr val="lt1"/>
-          </a:fontRef>
-        </p:style>
-        <p:txBody>
-          <a:bodyPr rtlCol="0" anchor="ctr"/>
-          <a:lstStyle/>
-          <a:p>
-            <a:pPr algn="ctr"/>
-          </a:p>
-        </p:txBody>
-      </p:sp>
-      <p:sp>
-        <p:nvSpPr>
-          <p:cNvPr id="11" name="TextBox 10"/>
+            <a:r>
+              <a:rPr sz="2800" b="1" i="1" dirty="0">
+                <a:solidFill>
+                  <a:srgbClr val="B8862A"/>
+                </a:solidFill>
+              </a:rPr>
+              <a:t>The most effective long-term lever is educating the next generation of shoppers."</a:t>
+            </a:r>
+            <a:r>
+              <a:rPr sz="2800" b="1" i="1" dirty="0" err="1">
+                <a:solidFill>
+                  <a:srgbClr val="B8862A"/>
+                </a:solidFill>
+              </a:rPr>
+              <a:t/>
+            </a:r>
+            <a:r>
+              <a:rPr sz="2800" b="1" i="1" dirty="0">
+                <a:solidFill>
+                  <a:srgbClr val="B8862A"/>
+                </a:solidFill>
+              </a:rPr>
+              <a:t/>
+            </a:r>
+            <a:r>
+              <a:rPr sz="2800" b="1" i="1" dirty="0" err="1">
+                <a:solidFill>
+                  <a:srgbClr val="B8862A"/>
+                </a:solidFill>
+              </a:rPr>
+              <a:t/>
+            </a:r>
+            <a:r>
+              <a:rPr sz="2800" b="1" i="1" dirty="0">
+                <a:solidFill>
+                  <a:srgbClr val="B8862A"/>
+                </a:solidFill>
+              </a:rPr>
+              <a:t/>
+            </a:r>
+            <a:r>
+              <a:rPr sz="2800" b="1" i="1" dirty="0" err="1">
+                <a:solidFill>
+                  <a:srgbClr val="B8862A"/>
+                </a:solidFill>
+              </a:rPr>
+              <a:t/>
+            </a:r>
+            <a:r>
+              <a:rPr sz="2800" b="1" i="1" dirty="0">
+                <a:solidFill>
+                  <a:srgbClr val="B8862A"/>
+                </a:solidFill>
+              </a:rPr>
+              <a:t/>
+            </a:r>
+            <a:r>
+              <a:rPr sz="2800" b="1" i="1" dirty="0" err="1">
+                <a:solidFill>
+                  <a:srgbClr val="B8862A"/>
+                </a:solidFill>
+              </a:rPr>
+              <a:t/>
+            </a:r>
+            <a:r>
+              <a:rPr sz="2800" b="1" i="1" dirty="0">
+                <a:solidFill>
+                  <a:srgbClr val="B8862A"/>
+                </a:solidFill>
+              </a:rPr>
+              <a:t/>
+            </a:r>
+            <a:r>
+              <a:rPr sz="2800" b="1" i="1" dirty="0" err="1">
+                <a:solidFill>
+                  <a:srgbClr val="B8862A"/>
+                </a:solidFill>
+              </a:rPr>
+              <a:t/>
+            </a:r>
+            <a:r>
+              <a:rPr sz="2800" b="1" i="1" dirty="0">
+                <a:solidFill>
+                  <a:srgbClr val="B8862A"/>
+                </a:solidFill>
+              </a:rPr>
+              <a:t/>
+            </a:r>
+            <a:r>
+              <a:rPr sz="2800" b="1" i="1" dirty="0" err="1">
+                <a:solidFill>
+                  <a:srgbClr val="B8862A"/>
+                </a:solidFill>
+              </a:rPr>
+              <a:t/>
+            </a:r>
+            <a:r>
+              <a:rPr sz="2800" b="1" i="1" dirty="0">
+                <a:solidFill>
+                  <a:srgbClr val="B8862A"/>
+                </a:solidFill>
+              </a:rPr>
+              <a:t/>
+            </a:r>
+            <a:r>
+              <a:rPr sz="2800" b="1" i="1" dirty="0" err="1">
+                <a:solidFill>
+                  <a:srgbClr val="B8862A"/>
+                </a:solidFill>
+              </a:rPr>
+              <a:t/>
+            </a:r>
+            <a:r>
+              <a:rPr sz="2800" b="1" i="1" dirty="0">
+                <a:solidFill>
+                  <a:srgbClr val="B8862A"/>
+                </a:solidFill>
+              </a:rPr>
+              <a:t/>
+            </a:r>
+            <a:r>
+              <a:rPr sz="2800" b="1" i="1" dirty="0" err="1">
+                <a:solidFill>
+                  <a:srgbClr val="B8862A"/>
+                </a:solidFill>
+              </a:rPr>
+              <a:t/>
+            </a:r>
+            <a:r>
+              <a:rPr sz="2800" b="1" i="1" dirty="0">
+                <a:solidFill>
+                  <a:srgbClr val="B8862A"/>
+                </a:solidFill>
+              </a:rPr>
+              <a:t/>
+            </a:r>
+          </a:p>
+        </p:txBody>
+      </p:sp>
+      <p:sp>
+        <p:nvSpPr>
+          <p:cNvPr id="23" name="TextBox 22"/>
           <p:cNvSpPr txBox="1"/>
           <p:nvPr/>
         </p:nvSpPr>
         <p:spPr>
           <a:xfrm>
-            <a:off x="3401568" y="1691640"/>
-            <a:ext cx="640080" cy="502920"/>
+            <a:off x="1371536" y="5988360"/>
+            <a:ext cx="9445752" cy="292388"/>
           </a:xfrm>
           <a:prstGeom prst="rect">
             <a:avLst/>
@@ -7668,28 +7213,28 @@
           </a:bodyPr>
           <a:lstStyle/>
           <a:p>
-            <a:pPr algn="l"/>
-            <a:r>
-              <a:rPr sz="1200" b="1" i="0">
+            <a:pPr algn="ctr"/>
+            <a:r>
+              <a:rPr lang="pt-BR" sz="1300" b="1" dirty="0">
                 <a:solidFill>
                   <a:srgbClr val="B8862A"/>
                 </a:solidFill>
               </a:rPr>
-              <a:t>02</a:t>
-            </a:r>
-          </a:p>
-        </p:txBody>
-      </p:sp>
-      <p:sp>
-        <p:nvSpPr>
-          <p:cNvPr id="12" name="TextBox 11"/>
+              <a:t>Carlos Torres  · Fernanda Ita  ·  Alexis Marcos</a:t>
+            </a:r>
+          </a:p>
+        </p:txBody>
+      </p:sp>
+      <p:sp>
+        <p:nvSpPr>
+          <p:cNvPr id="24" name="TextBox 23"/>
           <p:cNvSpPr txBox="1"/>
           <p:nvPr/>
         </p:nvSpPr>
         <p:spPr>
           <a:xfrm>
-            <a:off x="3401568" y="2176272"/>
-            <a:ext cx="2331720" cy="1188720"/>
+            <a:off x="1371536" y="6386494"/>
+            <a:ext cx="9445752" cy="365760"/>
           </a:xfrm>
           <a:prstGeom prst="rect">
             <a:avLst/>
@@ -7702,457 +7247,7 @@
           </a:bodyPr>
           <a:lstStyle/>
           <a:p>
-            <a:pPr algn="l"/>
-            <a:r>
-              <a:rPr sz="1150" b="0" i="0">
-                <a:solidFill>
-                  <a:srgbClr val="F4EFE6"/>
-                </a:solidFill>
-              </a:rPr>
-              <a:t>Structural barrier
-intention-action
-gap of 39.1 pp</a:t>
-            </a:r>
-          </a:p>
-        </p:txBody>
-      </p:sp>
-      <p:sp>
-        <p:nvSpPr>
-          <p:cNvPr id="13" name="Rectangle 12"/>
-          <p:cNvSpPr/>
-          <p:nvPr/>
-        </p:nvSpPr>
-        <p:spPr>
-          <a:xfrm>
-            <a:off x="6126480" y="1645920"/>
-            <a:ext cx="2560320" cy="1828800"/>
-          </a:xfrm>
-          <a:prstGeom prst="rect">
-            <a:avLst/>
-          </a:prstGeom>
-          <a:solidFill>
-            <a:srgbClr val="28221A"/>
-          </a:solidFill>
-          <a:ln>
-            <a:noFill/>
-          </a:ln>
-        </p:spPr>
-        <p:style>
-          <a:lnRef idx="1">
-            <a:schemeClr val="accent1"/>
-          </a:lnRef>
-          <a:fillRef idx="3">
-            <a:schemeClr val="accent1"/>
-          </a:fillRef>
-          <a:effectRef idx="2">
-            <a:schemeClr val="accent1"/>
-          </a:effectRef>
-          <a:fontRef idx="minor">
-            <a:schemeClr val="lt1"/>
-          </a:fontRef>
-        </p:style>
-        <p:txBody>
-          <a:bodyPr rtlCol="0" anchor="ctr"/>
-          <a:lstStyle/>
-          <a:p>
             <a:pPr algn="ctr"/>
-          </a:p>
-        </p:txBody>
-      </p:sp>
-      <p:sp>
-        <p:nvSpPr>
-          <p:cNvPr id="14" name="Rectangle 13"/>
-          <p:cNvSpPr/>
-          <p:nvPr/>
-        </p:nvSpPr>
-        <p:spPr>
-          <a:xfrm>
-            <a:off x="6126480" y="1645920"/>
-            <a:ext cx="45720" cy="1828800"/>
-          </a:xfrm>
-          <a:prstGeom prst="rect">
-            <a:avLst/>
-          </a:prstGeom>
-          <a:solidFill>
-            <a:srgbClr val="1D4E89"/>
-          </a:solidFill>
-          <a:ln>
-            <a:noFill/>
-          </a:ln>
-        </p:spPr>
-        <p:style>
-          <a:lnRef idx="1">
-            <a:schemeClr val="accent1"/>
-          </a:lnRef>
-          <a:fillRef idx="3">
-            <a:schemeClr val="accent1"/>
-          </a:fillRef>
-          <a:effectRef idx="2">
-            <a:schemeClr val="accent1"/>
-          </a:effectRef>
-          <a:fontRef idx="minor">
-            <a:schemeClr val="lt1"/>
-          </a:fontRef>
-        </p:style>
-        <p:txBody>
-          <a:bodyPr rtlCol="0" anchor="ctr"/>
-          <a:lstStyle/>
-          <a:p>
-            <a:pPr algn="ctr"/>
-          </a:p>
-        </p:txBody>
-      </p:sp>
-      <p:sp>
-        <p:nvSpPr>
-          <p:cNvPr id="15" name="TextBox 14"/>
-          <p:cNvSpPr txBox="1"/>
-          <p:nvPr/>
-        </p:nvSpPr>
-        <p:spPr>
-          <a:xfrm>
-            <a:off x="6236208" y="1691640"/>
-            <a:ext cx="640080" cy="502920"/>
-          </a:xfrm>
-          <a:prstGeom prst="rect">
-            <a:avLst/>
-          </a:prstGeom>
-          <a:noFill/>
-        </p:spPr>
-        <p:txBody>
-          <a:bodyPr wrap="square">
-            <a:spAutoFit/>
-          </a:bodyPr>
-          <a:lstStyle/>
-          <a:p>
-            <a:pPr algn="l"/>
-            <a:r>
-              <a:rPr sz="1200" b="1" i="0">
-                <a:solidFill>
-                  <a:srgbClr val="1D4E89"/>
-                </a:solidFill>
-              </a:rPr>
-              <a:t>03</a:t>
-            </a:r>
-          </a:p>
-        </p:txBody>
-      </p:sp>
-      <p:sp>
-        <p:nvSpPr>
-          <p:cNvPr id="16" name="TextBox 15"/>
-          <p:cNvSpPr txBox="1"/>
-          <p:nvPr/>
-        </p:nvSpPr>
-        <p:spPr>
-          <a:xfrm>
-            <a:off x="6236208" y="2176272"/>
-            <a:ext cx="2331720" cy="1188720"/>
-          </a:xfrm>
-          <a:prstGeom prst="rect">
-            <a:avLst/>
-          </a:prstGeom>
-          <a:noFill/>
-        </p:spPr>
-        <p:txBody>
-          <a:bodyPr wrap="square">
-            <a:spAutoFit/>
-          </a:bodyPr>
-          <a:lstStyle/>
-          <a:p>
-            <a:pPr algn="l"/>
-            <a:r>
-              <a:rPr sz="1150" b="0" i="0">
-                <a:solidFill>
-                  <a:srgbClr val="F4EFE6"/>
-                </a:solidFill>
-              </a:rPr>
-              <a:t>Survey confirms:
-people ask for
-nutrition education</a:t>
-            </a:r>
-          </a:p>
-        </p:txBody>
-      </p:sp>
-      <p:sp>
-        <p:nvSpPr>
-          <p:cNvPr id="17" name="Rectangle 16"/>
-          <p:cNvSpPr/>
-          <p:nvPr/>
-        </p:nvSpPr>
-        <p:spPr>
-          <a:xfrm>
-            <a:off x="8961120" y="1645920"/>
-            <a:ext cx="2560320" cy="1828800"/>
-          </a:xfrm>
-          <a:prstGeom prst="rect">
-            <a:avLst/>
-          </a:prstGeom>
-          <a:solidFill>
-            <a:srgbClr val="28221A"/>
-          </a:solidFill>
-          <a:ln>
-            <a:noFill/>
-          </a:ln>
-        </p:spPr>
-        <p:style>
-          <a:lnRef idx="1">
-            <a:schemeClr val="accent1"/>
-          </a:lnRef>
-          <a:fillRef idx="3">
-            <a:schemeClr val="accent1"/>
-          </a:fillRef>
-          <a:effectRef idx="2">
-            <a:schemeClr val="accent1"/>
-          </a:effectRef>
-          <a:fontRef idx="minor">
-            <a:schemeClr val="lt1"/>
-          </a:fontRef>
-        </p:style>
-        <p:txBody>
-          <a:bodyPr rtlCol="0" anchor="ctr"/>
-          <a:lstStyle/>
-          <a:p>
-            <a:pPr algn="ctr"/>
-          </a:p>
-        </p:txBody>
-      </p:sp>
-      <p:sp>
-        <p:nvSpPr>
-          <p:cNvPr id="18" name="Rectangle 17"/>
-          <p:cNvSpPr/>
-          <p:nvPr/>
-        </p:nvSpPr>
-        <p:spPr>
-          <a:xfrm>
-            <a:off x="8961120" y="1645920"/>
-            <a:ext cx="45720" cy="1828800"/>
-          </a:xfrm>
-          <a:prstGeom prst="rect">
-            <a:avLst/>
-          </a:prstGeom>
-          <a:solidFill>
-            <a:srgbClr val="2D5E3E"/>
-          </a:solidFill>
-          <a:ln>
-            <a:noFill/>
-          </a:ln>
-        </p:spPr>
-        <p:style>
-          <a:lnRef idx="1">
-            <a:schemeClr val="accent1"/>
-          </a:lnRef>
-          <a:fillRef idx="3">
-            <a:schemeClr val="accent1"/>
-          </a:fillRef>
-          <a:effectRef idx="2">
-            <a:schemeClr val="accent1"/>
-          </a:effectRef>
-          <a:fontRef idx="minor">
-            <a:schemeClr val="lt1"/>
-          </a:fontRef>
-        </p:style>
-        <p:txBody>
-          <a:bodyPr rtlCol="0" anchor="ctr"/>
-          <a:lstStyle/>
-          <a:p>
-            <a:pPr algn="ctr"/>
-          </a:p>
-        </p:txBody>
-      </p:sp>
-      <p:sp>
-        <p:nvSpPr>
-          <p:cNvPr id="19" name="TextBox 18"/>
-          <p:cNvSpPr txBox="1"/>
-          <p:nvPr/>
-        </p:nvSpPr>
-        <p:spPr>
-          <a:xfrm>
-            <a:off x="9070848" y="1691640"/>
-            <a:ext cx="640080" cy="502920"/>
-          </a:xfrm>
-          <a:prstGeom prst="rect">
-            <a:avLst/>
-          </a:prstGeom>
-          <a:noFill/>
-        </p:spPr>
-        <p:txBody>
-          <a:bodyPr wrap="square">
-            <a:spAutoFit/>
-          </a:bodyPr>
-          <a:lstStyle/>
-          <a:p>
-            <a:pPr algn="l"/>
-            <a:r>
-              <a:rPr sz="1200" b="1" i="0">
-                <a:solidFill>
-                  <a:srgbClr val="2D5E3E"/>
-                </a:solidFill>
-              </a:rPr>
-              <a:t>04</a:t>
-            </a:r>
-          </a:p>
-        </p:txBody>
-      </p:sp>
-      <p:sp>
-        <p:nvSpPr>
-          <p:cNvPr id="20" name="TextBox 19"/>
-          <p:cNvSpPr txBox="1"/>
-          <p:nvPr/>
-        </p:nvSpPr>
-        <p:spPr>
-          <a:xfrm>
-            <a:off x="9070848" y="2176272"/>
-            <a:ext cx="2331720" cy="1188720"/>
-          </a:xfrm>
-          <a:prstGeom prst="rect">
-            <a:avLst/>
-          </a:prstGeom>
-          <a:noFill/>
-        </p:spPr>
-        <p:txBody>
-          <a:bodyPr wrap="square">
-            <a:spAutoFit/>
-          </a:bodyPr>
-          <a:lstStyle/>
-          <a:p>
-            <a:pPr algn="l"/>
-            <a:r>
-              <a:rPr sz="1150" b="0" i="0">
-                <a:solidFill>
-                  <a:srgbClr val="F4EFE6"/>
-                </a:solidFill>
-              </a:rPr>
-              <a:t>Central: 31.9% →
-26.2% at 5 years
-(−5.7 pp)</a:t>
-            </a:r>
-          </a:p>
-        </p:txBody>
-      </p:sp>
-      <p:sp>
-        <p:nvSpPr>
-          <p:cNvPr id="21" name="TextBox 20"/>
-          <p:cNvSpPr txBox="1"/>
-          <p:nvPr/>
-        </p:nvSpPr>
-        <p:spPr>
-          <a:xfrm>
-            <a:off x="914400" y="3749039"/>
-            <a:ext cx="10360152" cy="548640"/>
-          </a:xfrm>
-          <a:prstGeom prst="rect">
-            <a:avLst/>
-          </a:prstGeom>
-          <a:noFill/>
-        </p:spPr>
-        <p:txBody>
-          <a:bodyPr wrap="square">
-            <a:spAutoFit/>
-          </a:bodyPr>
-          <a:lstStyle/>
-          <a:p>
-            <a:pPr algn="ctr"/>
-            <a:r>
-              <a:rPr sz="1500" b="0" i="1">
-                <a:solidFill>
-                  <a:srgbClr val="F4EFE6"/>
-                </a:solidFill>
-              </a:rPr>
-              <a:t>"The current ecosystem pushes unhealthy consumption.</a:t>
-            </a:r>
-          </a:p>
-        </p:txBody>
-      </p:sp>
-      <p:sp>
-        <p:nvSpPr>
-          <p:cNvPr id="22" name="TextBox 21"/>
-          <p:cNvSpPr txBox="1"/>
-          <p:nvPr/>
-        </p:nvSpPr>
-        <p:spPr>
-          <a:xfrm>
-            <a:off x="914400" y="4251960"/>
-            <a:ext cx="10360152" cy="548640"/>
-          </a:xfrm>
-          <a:prstGeom prst="rect">
-            <a:avLst/>
-          </a:prstGeom>
-          <a:noFill/>
-        </p:spPr>
-        <p:txBody>
-          <a:bodyPr wrap="square">
-            <a:spAutoFit/>
-          </a:bodyPr>
-          <a:lstStyle/>
-          <a:p>
-            <a:pPr algn="ctr"/>
-            <a:r>
-              <a:rPr sz="1500" b="1" i="1">
-                <a:solidFill>
-                  <a:srgbClr val="B8862A"/>
-                </a:solidFill>
-              </a:rPr>
-              <a:t>The most effective long-term lever is educating the next generation of shoppers."</a:t>
-            </a:r>
-          </a:p>
-        </p:txBody>
-      </p:sp>
-      <p:sp>
-        <p:nvSpPr>
-          <p:cNvPr id="23" name="TextBox 22"/>
-          <p:cNvSpPr txBox="1"/>
-          <p:nvPr/>
-        </p:nvSpPr>
-        <p:spPr>
-          <a:xfrm>
-            <a:off x="1371600" y="5074920"/>
-            <a:ext cx="9445752" cy="457200"/>
-          </a:xfrm>
-          <a:prstGeom prst="rect">
-            <a:avLst/>
-          </a:prstGeom>
-          <a:noFill/>
-        </p:spPr>
-        <p:txBody>
-          <a:bodyPr wrap="square">
-            <a:spAutoFit/>
-          </a:bodyPr>
-          <a:lstStyle/>
-          <a:p>
-            <a:pPr algn="ctr"/>
-            <a:r>
-              <a:rPr sz="1300" b="1" i="0">
-                <a:solidFill>
-                  <a:srgbClr val="B8862A"/>
-                </a:solidFill>
-              </a:rPr>
-              <a:t>Fernanda Ita  ·  Alexis Marcos  ·  Carlos Torres</a:t>
-            </a:r>
-          </a:p>
-        </p:txBody>
-      </p:sp>
-      <p:sp>
-        <p:nvSpPr>
-          <p:cNvPr id="24" name="TextBox 23"/>
-          <p:cNvSpPr txBox="1"/>
-          <p:nvPr/>
-        </p:nvSpPr>
-        <p:spPr>
-          <a:xfrm>
-            <a:off x="1371600" y="5577840"/>
-            <a:ext cx="9445752" cy="365760"/>
-          </a:xfrm>
-          <a:prstGeom prst="rect">
-            <a:avLst/>
-          </a:prstGeom>
-          <a:noFill/>
-        </p:spPr>
-        <p:txBody>
-          <a:bodyPr wrap="square">
-            <a:spAutoFit/>
-          </a:bodyPr>
-          <a:lstStyle/>
-          <a:p>
-            <a:pPr algn="ctr"/>
             <a:r>
               <a:rPr sz="1100" b="0" i="0">
                 <a:solidFill>
@@ -8160,40 +7255,6 @@
                 </a:solidFill>
               </a:rPr>
               <a:t>Tecnológico de Monterrey · Campus San Luis Potosí · MIT LiftLab 2026</a:t>
-            </a:r>
-          </a:p>
-        </p:txBody>
-      </p:sp>
-      <p:sp>
-        <p:nvSpPr>
-          <p:cNvPr id="25" name="TextBox 24"/>
-          <p:cNvSpPr txBox="1"/>
-          <p:nvPr/>
-        </p:nvSpPr>
-        <p:spPr>
-          <a:xfrm>
-            <a:off x="1371600" y="6053328"/>
-            <a:ext cx="9445752" cy="365760"/>
-          </a:xfrm>
-          <a:prstGeom prst="rect">
-            <a:avLst/>
-          </a:prstGeom>
-          <a:noFill/>
-        </p:spPr>
-        <p:txBody>
-          <a:bodyPr wrap="square">
-            <a:spAutoFit/>
-          </a:bodyPr>
-          <a:lstStyle/>
-          <a:p>
-            <a:pPr algn="ctr"/>
-            <a:r>
-              <a:rPr sz="1000" b="0" i="0">
-                <a:solidFill>
-                  <a:srgbClr val="8A7D6E"/>
-                </a:solidFill>
-              </a:rPr>
-              <a:t>Open source · Reproducible data · Fixed seed=42</a:t>
             </a:r>
           </a:p>
         </p:txBody>
@@ -8207,7 +7268,7 @@
 </file>
 
 <file path=ppt/slides/slide2.xml><?xml version="1.0" encoding="utf-8"?>
-<p:sld xmlns:a="http://schemas.openxmlformats.org/drawingml/2006/main" xmlns:p="http://schemas.openxmlformats.org/presentationml/2006/main" xmlns:r="http://schemas.openxmlformats.org/officeDocument/2006/relationships">
+<p:sld xmlns:a="http://schemas.openxmlformats.org/drawingml/2006/main" xmlns:r="http://schemas.openxmlformats.org/officeDocument/2006/relationships" xmlns:p="http://schemas.openxmlformats.org/presentationml/2006/main">
   <p:cSld>
     <p:bg>
       <p:bgPr>
@@ -8223,7 +7284,14 @@
         <p:cNvGrpSpPr/>
         <p:nvPr/>
       </p:nvGrpSpPr>
-      <p:grpSpPr/>
+      <p:grpSpPr>
+        <a:xfrm>
+          <a:off x="0" y="0"/>
+          <a:ext cx="0" cy="0"/>
+          <a:chOff x="0" y="0"/>
+          <a:chExt cx="0" cy="0"/>
+        </a:xfrm>
+      </p:grpSpPr>
       <p:sp>
         <p:nvSpPr>
           <p:cNvPr id="2" name="Rectangle 1"/>
@@ -8264,6 +7332,7 @@
           <a:lstStyle/>
           <a:p>
             <a:pPr algn="ctr"/>
+            <a:endParaRPr/>
           </a:p>
         </p:txBody>
       </p:sp>
@@ -8341,6 +7410,7 @@
           <a:lstStyle/>
           <a:p>
             <a:pPr algn="ctr"/>
+            <a:endParaRPr/>
           </a:p>
         </p:txBody>
       </p:sp>
@@ -8485,6 +7555,7 @@
           <a:lstStyle/>
           <a:p>
             <a:pPr algn="ctr"/>
+            <a:endParaRPr/>
           </a:p>
         </p:txBody>
       </p:sp>
@@ -8596,6 +7667,7 @@
           <a:lstStyle/>
           <a:p>
             <a:pPr algn="ctr"/>
+            <a:endParaRPr/>
           </a:p>
         </p:txBody>
       </p:sp>
@@ -8707,6 +7779,7 @@
           <a:lstStyle/>
           <a:p>
             <a:pPr algn="ctr"/>
+            <a:endParaRPr/>
           </a:p>
         </p:txBody>
       </p:sp>
@@ -8818,6 +7891,7 @@
           <a:lstStyle/>
           <a:p>
             <a:pPr algn="ctr"/>
+            <a:endParaRPr/>
           </a:p>
         </p:txBody>
       </p:sp>
@@ -8964,6 +8038,7 @@
           <a:lstStyle/>
           <a:p>
             <a:pPr algn="ctr"/>
+            <a:endParaRPr/>
           </a:p>
         </p:txBody>
       </p:sp>
@@ -9010,7 +8085,7 @@
 </file>
 
 <file path=ppt/slides/slide3.xml><?xml version="1.0" encoding="utf-8"?>
-<p:sld xmlns:a="http://schemas.openxmlformats.org/drawingml/2006/main" xmlns:p="http://schemas.openxmlformats.org/presentationml/2006/main" xmlns:r="http://schemas.openxmlformats.org/officeDocument/2006/relationships">
+<p:sld xmlns:a="http://schemas.openxmlformats.org/drawingml/2006/main" xmlns:r="http://schemas.openxmlformats.org/officeDocument/2006/relationships" xmlns:p="http://schemas.openxmlformats.org/presentationml/2006/main">
   <p:cSld>
     <p:bg>
       <p:bgPr>
@@ -9026,7 +8101,14 @@
         <p:cNvGrpSpPr/>
         <p:nvPr/>
       </p:nvGrpSpPr>
-      <p:grpSpPr/>
+      <p:grpSpPr>
+        <a:xfrm>
+          <a:off x="0" y="0"/>
+          <a:ext cx="0" cy="0"/>
+          <a:chOff x="0" y="0"/>
+          <a:chExt cx="0" cy="0"/>
+        </a:xfrm>
+      </p:grpSpPr>
       <p:sp>
         <p:nvSpPr>
           <p:cNvPr id="2" name="Rectangle 1"/>
@@ -9067,6 +8149,7 @@
           <a:lstStyle/>
           <a:p>
             <a:pPr algn="ctr"/>
+            <a:endParaRPr/>
           </a:p>
         </p:txBody>
       </p:sp>
@@ -9144,6 +8227,7 @@
           <a:lstStyle/>
           <a:p>
             <a:pPr algn="ctr"/>
+            <a:endParaRPr/>
           </a:p>
         </p:txBody>
       </p:sp>
@@ -9257,7 +8341,7 @@
           <p:nvPr/>
         </p:nvPicPr>
         <p:blipFill>
-          <a:blip r:embed="rId2"/>
+          <a:blip r:embed="rId3"/>
           <a:stretch>
             <a:fillRect/>
           </a:stretch>
@@ -9312,6 +8396,7 @@
           <a:lstStyle/>
           <a:p>
             <a:pPr algn="ctr"/>
+            <a:endParaRPr/>
           </a:p>
         </p:txBody>
       </p:sp>
@@ -9423,6 +8508,7 @@
           <a:lstStyle/>
           <a:p>
             <a:pPr algn="ctr"/>
+            <a:endParaRPr/>
           </a:p>
         </p:txBody>
       </p:sp>
@@ -9506,7 +8592,7 @@
         <p:spPr>
           <a:xfrm>
             <a:off x="457200" y="5760720"/>
-            <a:ext cx="11247120" cy="457200"/>
+            <a:ext cx="11247120" cy="292388"/>
           </a:xfrm>
           <a:prstGeom prst="rect">
             <a:avLst/>
@@ -9521,12 +8607,76 @@
           <a:p>
             <a:pPr algn="l"/>
             <a:r>
-              <a:rPr sz="1300" b="1" i="0">
+              <a:rPr sz="1300" b="1" i="0" dirty="0">
                 <a:solidFill>
                   <a:srgbClr val="B8332A"/>
                 </a:solidFill>
               </a:rPr>
-              <a:t>→ Something more structural is going on. That pushed us to Act 2.</a:t>
+              <a:t>→ Something more structural is going on.</a:t>
+            </a:r>
+            <a:r>
+              <a:rPr sz="1300" b="1" i="0" dirty="0" err="1">
+                <a:solidFill>
+                  <a:srgbClr val="B8332A"/>
+                </a:solidFill>
+              </a:rPr>
+              <a:t/>
+            </a:r>
+            <a:r>
+              <a:rPr sz="1300" b="1" i="0" dirty="0">
+                <a:solidFill>
+                  <a:srgbClr val="B8332A"/>
+                </a:solidFill>
+              </a:rPr>
+              <a:t/>
+            </a:r>
+            <a:r>
+              <a:rPr sz="1300" b="1" i="0" dirty="0" err="1">
+                <a:solidFill>
+                  <a:srgbClr val="B8332A"/>
+                </a:solidFill>
+              </a:rPr>
+              <a:t/>
+            </a:r>
+            <a:r>
+              <a:rPr sz="1300" b="1" i="0" dirty="0">
+                <a:solidFill>
+                  <a:srgbClr val="B8332A"/>
+                </a:solidFill>
+              </a:rPr>
+              <a:t/>
+            </a:r>
+            <a:r>
+              <a:rPr sz="1300" b="1" i="0" dirty="0" err="1">
+                <a:solidFill>
+                  <a:srgbClr val="B8332A"/>
+                </a:solidFill>
+              </a:rPr>
+              <a:t/>
+            </a:r>
+            <a:r>
+              <a:rPr sz="1300" b="1" i="0" dirty="0">
+                <a:solidFill>
+                  <a:srgbClr val="B8332A"/>
+                </a:solidFill>
+              </a:rPr>
+              <a:t/>
+            </a:r>
+            <a:r>
+              <a:rPr sz="1300" b="1" i="0" dirty="0" err="1">
+                <a:solidFill>
+                  <a:srgbClr val="B8332A"/>
+                </a:solidFill>
+              </a:rPr>
+              <a:t/>
+            </a:r>
+            <a:r>
+              <a:rPr sz="1300" b="1" i="0" dirty="0">
+                <a:solidFill>
+                  <a:srgbClr val="B8332A"/>
+                </a:solidFill>
+              </a:rPr>
+              <a:t/>
             </a:r>
           </a:p>
         </p:txBody>
@@ -9540,7 +8690,7 @@
 </file>
 
 <file path=ppt/slides/slide4.xml><?xml version="1.0" encoding="utf-8"?>
-<p:sld xmlns:a="http://schemas.openxmlformats.org/drawingml/2006/main" xmlns:p="http://schemas.openxmlformats.org/presentationml/2006/main" xmlns:r="http://schemas.openxmlformats.org/officeDocument/2006/relationships">
+<p:sld xmlns:a="http://schemas.openxmlformats.org/drawingml/2006/main" xmlns:r="http://schemas.openxmlformats.org/officeDocument/2006/relationships" xmlns:p="http://schemas.openxmlformats.org/presentationml/2006/main">
   <p:cSld>
     <p:bg>
       <p:bgPr>
@@ -9556,7 +8706,14 @@
         <p:cNvGrpSpPr/>
         <p:nvPr/>
       </p:nvGrpSpPr>
-      <p:grpSpPr/>
+      <p:grpSpPr>
+        <a:xfrm>
+          <a:off x="0" y="0"/>
+          <a:ext cx="0" cy="0"/>
+          <a:chOff x="0" y="0"/>
+          <a:chExt cx="0" cy="0"/>
+        </a:xfrm>
+      </p:grpSpPr>
       <p:sp>
         <p:nvSpPr>
           <p:cNvPr id="2" name="Rectangle 1"/>
@@ -9597,6 +8754,7 @@
           <a:lstStyle/>
           <a:p>
             <a:pPr algn="ctr"/>
+            <a:endParaRPr/>
           </a:p>
         </p:txBody>
       </p:sp>
@@ -9674,6 +8832,7 @@
           <a:lstStyle/>
           <a:p>
             <a:pPr algn="ctr"/>
+            <a:endParaRPr/>
           </a:p>
         </p:txBody>
       </p:sp>
@@ -9818,6 +8977,7 @@
           <a:lstStyle/>
           <a:p>
             <a:pPr algn="ctr"/>
+            <a:endParaRPr/>
           </a:p>
         </p:txBody>
       </p:sp>
@@ -9861,6 +9021,7 @@
           <a:lstStyle/>
           <a:p>
             <a:pPr algn="ctr"/>
+            <a:endParaRPr/>
           </a:p>
         </p:txBody>
       </p:sp>
@@ -9927,7 +9088,7 @@
                   <a:srgbClr val="8A7D6E"/>
                 </a:solidFill>
               </a:rPr>
-              <a:t>buys ≥1 unhealthy</a:t>
+              <a:t>buys ≥1 unhealthy item</a:t>
             </a:r>
           </a:p>
         </p:txBody>
@@ -9972,6 +9133,7 @@
           <a:lstStyle/>
           <a:p>
             <a:pPr algn="ctr"/>
+            <a:endParaRPr/>
           </a:p>
         </p:txBody>
       </p:sp>
@@ -10083,6 +9245,7 @@
           <a:lstStyle/>
           <a:p>
             <a:pPr algn="ctr"/>
+            <a:endParaRPr/>
           </a:p>
         </p:txBody>
       </p:sp>
@@ -10194,6 +9357,7 @@
           <a:lstStyle/>
           <a:p>
             <a:pPr algn="ctr"/>
+            <a:endParaRPr/>
           </a:p>
         </p:txBody>
       </p:sp>
@@ -10260,7 +9424,7 @@
                   <a:srgbClr val="8A7D6E"/>
                 </a:solidFill>
               </a:rPr>
-              <a:t>deliveries w/o healthy</a:t>
+              <a:t>deliveries w/o healthy offer</a:t>
             </a:r>
           </a:p>
         </p:txBody>
@@ -10305,36 +9469,13 @@
           <a:lstStyle/>
           <a:p>
             <a:pPr algn="ctr"/>
+            <a:endParaRPr/>
           </a:p>
         </p:txBody>
       </p:sp>
       <p:pic>
         <p:nvPicPr>
-          <p:cNvPr id="22" name="Picture 21" descr="v2_act2_basket_en.png"/>
-          <p:cNvPicPr>
-            <a:picLocks noChangeAspect="1"/>
-          </p:cNvPicPr>
-          <p:nvPr/>
-        </p:nvPicPr>
-        <p:blipFill>
-          <a:blip r:embed="rId2"/>
-          <a:stretch>
-            <a:fillRect/>
-          </a:stretch>
-        </p:blipFill>
-        <p:spPr>
-          <a:xfrm>
-            <a:off x="274320" y="3520440"/>
-            <a:ext cx="5760720" cy="3063240"/>
-          </a:xfrm>
-          <a:prstGeom prst="rect">
-            <a:avLst/>
-          </a:prstGeom>
-        </p:spPr>
-      </p:pic>
-      <p:pic>
-        <p:nvPicPr>
-          <p:cNvPr id="23" name="Picture 22" descr="v2_act2_intention_en.png"/>
+          <p:cNvPr id="22" name="Picture 21" descr="v2_act2_basket.png"/>
           <p:cNvPicPr>
             <a:picLocks noChangeAspect="1"/>
           </p:cNvPicPr>
@@ -10348,7 +9489,31 @@
         </p:blipFill>
         <p:spPr>
           <a:xfrm>
-            <a:off x="6172200" y="3520440"/>
+            <a:off x="274320" y="3520440"/>
+            <a:ext cx="5760720" cy="3063240"/>
+          </a:xfrm>
+          <a:prstGeom prst="rect">
+            <a:avLst/>
+          </a:prstGeom>
+        </p:spPr>
+      </p:pic>
+      <p:pic>
+        <p:nvPicPr>
+          <p:cNvPr id="23" name="Picture 22" descr="v2_act2_intention_es.png"/>
+          <p:cNvPicPr>
+            <a:picLocks noChangeAspect="1"/>
+          </p:cNvPicPr>
+          <p:nvPr/>
+        </p:nvPicPr>
+        <p:blipFill>
+          <a:blip r:embed="rId4"/>
+          <a:stretch>
+            <a:fillRect/>
+          </a:stretch>
+        </p:blipFill>
+        <p:spPr>
+          <a:xfrm>
+            <a:off x="6172200" y="3483865"/>
             <a:ext cx="5760720" cy="3063240"/>
           </a:xfrm>
           <a:prstGeom prst="rect">
@@ -10365,7 +9530,7 @@
 </file>
 
 <file path=ppt/slides/slide5.xml><?xml version="1.0" encoding="utf-8"?>
-<p:sld xmlns:a="http://schemas.openxmlformats.org/drawingml/2006/main" xmlns:p="http://schemas.openxmlformats.org/presentationml/2006/main" xmlns:r="http://schemas.openxmlformats.org/officeDocument/2006/relationships">
+<p:sld xmlns:a="http://schemas.openxmlformats.org/drawingml/2006/main" xmlns:r="http://schemas.openxmlformats.org/officeDocument/2006/relationships" xmlns:p="http://schemas.openxmlformats.org/presentationml/2006/main">
   <p:cSld>
     <p:bg>
       <p:bgPr>
@@ -10381,7 +9546,14 @@
         <p:cNvGrpSpPr/>
         <p:nvPr/>
       </p:nvGrpSpPr>
-      <p:grpSpPr/>
+      <p:grpSpPr>
+        <a:xfrm>
+          <a:off x="0" y="0"/>
+          <a:ext cx="0" cy="0"/>
+          <a:chOff x="0" y="0"/>
+          <a:chExt cx="0" cy="0"/>
+        </a:xfrm>
+      </p:grpSpPr>
       <p:sp>
         <p:nvSpPr>
           <p:cNvPr id="2" name="Rectangle 1"/>
@@ -10422,6 +9594,7 @@
           <a:lstStyle/>
           <a:p>
             <a:pPr algn="ctr"/>
+            <a:endParaRPr/>
           </a:p>
         </p:txBody>
       </p:sp>
@@ -10499,6 +9672,7 @@
           <a:lstStyle/>
           <a:p>
             <a:pPr algn="ctr"/>
+            <a:endParaRPr/>
           </a:p>
         </p:txBody>
       </p:sp>
@@ -10545,7 +9719,7 @@
         <p:spPr>
           <a:xfrm>
             <a:off x="274320" y="1508760"/>
-            <a:ext cx="11640312" cy="3108960"/>
+            <a:ext cx="11640312" cy="2099253"/>
           </a:xfrm>
           <a:prstGeom prst="rect">
             <a:avLst/>
@@ -10576,6 +9750,7 @@
           <a:lstStyle/>
           <a:p>
             <a:pPr algn="ctr"/>
+            <a:endParaRPr/>
           </a:p>
         </p:txBody>
       </p:sp>
@@ -10603,7 +9778,7 @@
           <a:p>
             <a:pPr algn="l"/>
             <a:r>
-              <a:rPr sz="1000" b="1" i="0">
+              <a:rPr sz="1000" b="1" i="0" dirty="0">
                 <a:solidFill>
                   <a:srgbClr val="B8862A"/>
                 </a:solidFill>
@@ -10642,8 +9817,8 @@
                   <a:srgbClr val="F4EFE6"/>
                 </a:solidFill>
               </a:rPr>
-              <a:t>85% knows · 63% would buy healthier · 65% wants more options.
-But only 24% actually buys something healthy.</a:t>
+              <a:t>85% know · 63% would buy healthier · 65% want more options.
+But only 24% actually buy anything healthy.</a:t>
             </a:r>
           </a:p>
         </p:txBody>
@@ -10672,12 +9847,348 @@
           <a:p>
             <a:pPr algn="l"/>
             <a:r>
-              <a:rPr sz="1200" b="0" i="0">
+              <a:rPr sz="1200" b="0" i="0" dirty="0">
                 <a:solidFill>
                   <a:srgbClr val="D6CCB9"/>
                 </a:solidFill>
               </a:rPr>
               <a:t>The dominant declared barrier is price perception. Neither the regression (R²=0.032) nor a Random Forest (AUC≈0.55) predicts healthy purchasing from individual traits. The problem is not the people — it's the conditions around them.</a:t>
+            </a:r>
+            <a:r>
+              <a:rPr sz="1200" b="0" i="0" dirty="0" err="1">
+                <a:solidFill>
+                  <a:srgbClr val="D6CCB9"/>
+                </a:solidFill>
+              </a:rPr>
+              <a:t/>
+            </a:r>
+            <a:r>
+              <a:rPr sz="1200" b="0" i="0" dirty="0">
+                <a:solidFill>
+                  <a:srgbClr val="D6CCB9"/>
+                </a:solidFill>
+              </a:rPr>
+              <a:t/>
+            </a:r>
+            <a:r>
+              <a:rPr sz="1200" b="0" i="0" dirty="0" err="1">
+                <a:solidFill>
+                  <a:srgbClr val="D6CCB9"/>
+                </a:solidFill>
+              </a:rPr>
+              <a:t/>
+            </a:r>
+            <a:r>
+              <a:rPr sz="1200" b="0" i="0" dirty="0">
+                <a:solidFill>
+                  <a:srgbClr val="D6CCB9"/>
+                </a:solidFill>
+              </a:rPr>
+              <a:t/>
+            </a:r>
+            <a:r>
+              <a:rPr sz="1200" b="0" i="0" dirty="0" err="1">
+                <a:solidFill>
+                  <a:srgbClr val="D6CCB9"/>
+                </a:solidFill>
+              </a:rPr>
+              <a:t/>
+            </a:r>
+            <a:r>
+              <a:rPr sz="1200" b="0" i="0" dirty="0">
+                <a:solidFill>
+                  <a:srgbClr val="D6CCB9"/>
+                </a:solidFill>
+              </a:rPr>
+              <a:t/>
+            </a:r>
+            <a:r>
+              <a:rPr sz="1200" b="0" i="0" dirty="0" err="1">
+                <a:solidFill>
+                  <a:srgbClr val="D6CCB9"/>
+                </a:solidFill>
+              </a:rPr>
+              <a:t/>
+            </a:r>
+            <a:r>
+              <a:rPr sz="1200" b="0" i="0" dirty="0">
+                <a:solidFill>
+                  <a:srgbClr val="D6CCB9"/>
+                </a:solidFill>
+              </a:rPr>
+              <a:t/>
+            </a:r>
+            <a:r>
+              <a:rPr sz="1200" b="0" i="0" dirty="0" err="1">
+                <a:solidFill>
+                  <a:srgbClr val="D6CCB9"/>
+                </a:solidFill>
+              </a:rPr>
+              <a:t/>
+            </a:r>
+            <a:r>
+              <a:rPr sz="1200" b="0" i="0" dirty="0">
+                <a:solidFill>
+                  <a:srgbClr val="D6CCB9"/>
+                </a:solidFill>
+              </a:rPr>
+              <a:t/>
+            </a:r>
+            <a:r>
+              <a:rPr sz="1200" b="0" i="0" dirty="0" err="1">
+                <a:solidFill>
+                  <a:srgbClr val="D6CCB9"/>
+                </a:solidFill>
+              </a:rPr>
+              <a:t/>
+            </a:r>
+            <a:r>
+              <a:rPr sz="1200" b="0" i="0" dirty="0">
+                <a:solidFill>
+                  <a:srgbClr val="D6CCB9"/>
+                </a:solidFill>
+              </a:rPr>
+              <a:t/>
+            </a:r>
+            <a:r>
+              <a:rPr sz="1200" b="0" i="0" dirty="0" err="1">
+                <a:solidFill>
+                  <a:srgbClr val="D6CCB9"/>
+                </a:solidFill>
+              </a:rPr>
+              <a:t/>
+            </a:r>
+            <a:r>
+              <a:rPr sz="1200" b="0" i="0" dirty="0">
+                <a:solidFill>
+                  <a:srgbClr val="D6CCB9"/>
+                </a:solidFill>
+              </a:rPr>
+              <a:t/>
+            </a:r>
+            <a:r>
+              <a:rPr sz="1200" b="0" i="0" dirty="0" err="1">
+                <a:solidFill>
+                  <a:srgbClr val="D6CCB9"/>
+                </a:solidFill>
+              </a:rPr>
+              <a:t/>
+            </a:r>
+            <a:r>
+              <a:rPr sz="1200" b="0" i="0" dirty="0">
+                <a:solidFill>
+                  <a:srgbClr val="D6CCB9"/>
+                </a:solidFill>
+              </a:rPr>
+              <a:t/>
+            </a:r>
+            <a:r>
+              <a:rPr sz="1200" b="0" i="0" dirty="0" err="1">
+                <a:solidFill>
+                  <a:srgbClr val="D6CCB9"/>
+                </a:solidFill>
+              </a:rPr>
+              <a:t/>
+            </a:r>
+            <a:r>
+              <a:rPr sz="1200" b="0" i="0" dirty="0">
+                <a:solidFill>
+                  <a:srgbClr val="D6CCB9"/>
+                </a:solidFill>
+              </a:rPr>
+              <a:t/>
+            </a:r>
+            <a:r>
+              <a:rPr sz="1200" b="0" i="0" dirty="0" err="1">
+                <a:solidFill>
+                  <a:srgbClr val="D6CCB9"/>
+                </a:solidFill>
+              </a:rPr>
+              <a:t/>
+            </a:r>
+            <a:r>
+              <a:rPr sz="1200" b="0" i="0" dirty="0">
+                <a:solidFill>
+                  <a:srgbClr val="D6CCB9"/>
+                </a:solidFill>
+              </a:rPr>
+              <a:t/>
+            </a:r>
+            <a:r>
+              <a:rPr sz="1200" b="0" i="0" dirty="0" err="1">
+                <a:solidFill>
+                  <a:srgbClr val="D6CCB9"/>
+                </a:solidFill>
+              </a:rPr>
+              <a:t/>
+            </a:r>
+            <a:r>
+              <a:rPr sz="1200" b="0" i="0" dirty="0">
+                <a:solidFill>
+                  <a:srgbClr val="D6CCB9"/>
+                </a:solidFill>
+              </a:rPr>
+              <a:t/>
+            </a:r>
+            <a:r>
+              <a:rPr sz="1200" b="0" i="0" dirty="0" err="1">
+                <a:solidFill>
+                  <a:srgbClr val="D6CCB9"/>
+                </a:solidFill>
+              </a:rPr>
+              <a:t/>
+            </a:r>
+            <a:r>
+              <a:rPr sz="1200" b="0" i="0" dirty="0">
+                <a:solidFill>
+                  <a:srgbClr val="D6CCB9"/>
+                </a:solidFill>
+              </a:rPr>
+              <a:t/>
+            </a:r>
+            <a:r>
+              <a:rPr sz="1200" b="0" i="0" dirty="0" err="1">
+                <a:solidFill>
+                  <a:srgbClr val="D6CCB9"/>
+                </a:solidFill>
+              </a:rPr>
+              <a:t/>
+            </a:r>
+            <a:r>
+              <a:rPr sz="1200" b="0" i="0" dirty="0">
+                <a:solidFill>
+                  <a:srgbClr val="D6CCB9"/>
+                </a:solidFill>
+              </a:rPr>
+              <a:t/>
+            </a:r>
+            <a:r>
+              <a:rPr sz="1200" b="0" i="0" dirty="0" err="1">
+                <a:solidFill>
+                  <a:srgbClr val="D6CCB9"/>
+                </a:solidFill>
+              </a:rPr>
+              <a:t/>
+            </a:r>
+            <a:r>
+              <a:rPr sz="1200" b="0" i="0" dirty="0">
+                <a:solidFill>
+                  <a:srgbClr val="D6CCB9"/>
+                </a:solidFill>
+              </a:rPr>
+              <a:t/>
+            </a:r>
+            <a:r>
+              <a:rPr sz="1200" b="0" i="0" dirty="0" err="1">
+                <a:solidFill>
+                  <a:srgbClr val="D6CCB9"/>
+                </a:solidFill>
+              </a:rPr>
+              <a:t/>
+            </a:r>
+            <a:r>
+              <a:rPr sz="1200" b="0" i="0" dirty="0">
+                <a:solidFill>
+                  <a:srgbClr val="D6CCB9"/>
+                </a:solidFill>
+              </a:rPr>
+              <a:t/>
+            </a:r>
+            <a:r>
+              <a:rPr sz="1200" b="0" i="0" dirty="0" err="1">
+                <a:solidFill>
+                  <a:srgbClr val="D6CCB9"/>
+                </a:solidFill>
+              </a:rPr>
+              <a:t/>
+            </a:r>
+            <a:r>
+              <a:rPr sz="1200" b="0" i="0" dirty="0">
+                <a:solidFill>
+                  <a:srgbClr val="D6CCB9"/>
+                </a:solidFill>
+              </a:rPr>
+              <a:t/>
+            </a:r>
+            <a:r>
+              <a:rPr sz="1200" b="0" i="0" dirty="0" err="1">
+                <a:solidFill>
+                  <a:srgbClr val="D6CCB9"/>
+                </a:solidFill>
+              </a:rPr>
+              <a:t/>
+            </a:r>
+            <a:r>
+              <a:rPr sz="1200" b="0" i="0" dirty="0">
+                <a:solidFill>
+                  <a:srgbClr val="D6CCB9"/>
+                </a:solidFill>
+              </a:rPr>
+              <a:t/>
+            </a:r>
+            <a:r>
+              <a:rPr sz="1200" b="0" i="0" dirty="0" err="1">
+                <a:solidFill>
+                  <a:srgbClr val="D6CCB9"/>
+                </a:solidFill>
+              </a:rPr>
+              <a:t/>
+            </a:r>
+            <a:r>
+              <a:rPr sz="1200" b="0" i="0" dirty="0">
+                <a:solidFill>
+                  <a:srgbClr val="D6CCB9"/>
+                </a:solidFill>
+              </a:rPr>
+              <a:t/>
+            </a:r>
+            <a:r>
+              <a:rPr sz="1200" b="0" i="0" dirty="0" err="1">
+                <a:solidFill>
+                  <a:srgbClr val="D6CCB9"/>
+                </a:solidFill>
+              </a:rPr>
+              <a:t/>
+            </a:r>
+            <a:r>
+              <a:rPr sz="1200" b="0" i="0" dirty="0">
+                <a:solidFill>
+                  <a:srgbClr val="D6CCB9"/>
+                </a:solidFill>
+              </a:rPr>
+              <a:t/>
+            </a:r>
+            <a:r>
+              <a:rPr sz="1200" b="0" i="0" dirty="0" err="1">
+                <a:solidFill>
+                  <a:srgbClr val="D6CCB9"/>
+                </a:solidFill>
+              </a:rPr>
+              <a:t/>
+            </a:r>
+            <a:r>
+              <a:rPr sz="1200" b="0" i="0" dirty="0">
+                <a:solidFill>
+                  <a:srgbClr val="D6CCB9"/>
+                </a:solidFill>
+              </a:rPr>
+              <a:t/>
+            </a:r>
+            <a:r>
+              <a:rPr sz="1200" b="0" i="0" dirty="0" err="1">
+                <a:solidFill>
+                  <a:srgbClr val="D6CCB9"/>
+                </a:solidFill>
+              </a:rPr>
+              <a:t/>
+            </a:r>
+            <a:r>
+              <a:rPr sz="1200" b="0" i="0" dirty="0">
+                <a:solidFill>
+                  <a:srgbClr val="D6CCB9"/>
+                </a:solidFill>
+              </a:rPr>
+              <a:t/>
             </a:r>
           </a:p>
         </p:txBody>
@@ -10690,8 +10201,8 @@
         </p:nvSpPr>
         <p:spPr>
           <a:xfrm>
-            <a:off x="274320" y="4773168"/>
-            <a:ext cx="5577840" cy="1783080"/>
+            <a:off x="274320" y="4021394"/>
+            <a:ext cx="5577840" cy="2534854"/>
           </a:xfrm>
           <a:prstGeom prst="rect">
             <a:avLst/>
@@ -10722,6 +10233,7 @@
           <a:lstStyle/>
           <a:p>
             <a:pPr algn="ctr"/>
+            <a:endParaRPr/>
           </a:p>
         </p:txBody>
       </p:sp>
@@ -10733,8 +10245,8 @@
         </p:nvSpPr>
         <p:spPr>
           <a:xfrm>
-            <a:off x="274320" y="4773168"/>
-            <a:ext cx="54864" cy="1783080"/>
+            <a:off x="283464" y="4021394"/>
+            <a:ext cx="45719" cy="2534854"/>
           </a:xfrm>
           <a:prstGeom prst="rect">
             <a:avLst/>
@@ -10765,6 +10277,7 @@
           <a:lstStyle/>
           <a:p>
             <a:pPr algn="ctr"/>
+            <a:endParaRPr/>
           </a:p>
         </p:txBody>
       </p:sp>
@@ -10776,7 +10289,7 @@
         </p:nvSpPr>
         <p:spPr>
           <a:xfrm>
-            <a:off x="502920" y="4864608"/>
+            <a:off x="457200" y="4153276"/>
             <a:ext cx="5212080" cy="384048"/>
           </a:xfrm>
           <a:prstGeom prst="rect">
@@ -10792,7 +10305,7 @@
           <a:p>
             <a:pPr algn="l"/>
             <a:r>
-              <a:rPr sz="1300" b="1" i="0">
+              <a:rPr sz="1300" b="1" i="0" dirty="0">
                 <a:solidFill>
                   <a:srgbClr val="1A1612"/>
                 </a:solidFill>
@@ -10810,8 +10323,8 @@
         </p:nvSpPr>
         <p:spPr>
           <a:xfrm>
-            <a:off x="502920" y="5285232"/>
-            <a:ext cx="5212080" cy="1097280"/>
+            <a:off x="484632" y="4507991"/>
+            <a:ext cx="5070594" cy="584775"/>
           </a:xfrm>
           <a:prstGeom prst="rect">
             <a:avLst/>
@@ -10826,12 +10339,196 @@
           <a:p>
             <a:pPr algn="l"/>
             <a:r>
-              <a:rPr sz="1150" b="0" i="0">
+              <a:rPr sz="1600" b="0" i="0" dirty="0" err="1">
                 <a:solidFill>
                   <a:srgbClr val="4A4138"/>
                 </a:solidFill>
               </a:rPr>
               <a:t>Barely better than a coin flip. Healthy purchasing is not explained by who you are.</a:t>
+            </a:r>
+            <a:r>
+              <a:rPr sz="1600" b="0" i="0" dirty="0">
+                <a:solidFill>
+                  <a:srgbClr val="4A4138"/>
+                </a:solidFill>
+              </a:rPr>
+              <a:t/>
+            </a:r>
+            <a:r>
+              <a:rPr sz="1600" b="0" i="0" dirty="0" err="1">
+                <a:solidFill>
+                  <a:srgbClr val="4A4138"/>
+                </a:solidFill>
+              </a:rPr>
+              <a:t/>
+            </a:r>
+            <a:r>
+              <a:rPr sz="1600" b="0" i="0" dirty="0">
+                <a:solidFill>
+                  <a:srgbClr val="4A4138"/>
+                </a:solidFill>
+              </a:rPr>
+              <a:t/>
+            </a:r>
+            <a:r>
+              <a:rPr sz="1600" b="0" i="0" dirty="0" err="1">
+                <a:solidFill>
+                  <a:srgbClr val="4A4138"/>
+                </a:solidFill>
+              </a:rPr>
+              <a:t/>
+            </a:r>
+            <a:r>
+              <a:rPr sz="1600" b="0" i="0" dirty="0">
+                <a:solidFill>
+                  <a:srgbClr val="4A4138"/>
+                </a:solidFill>
+              </a:rPr>
+              <a:t/>
+            </a:r>
+            <a:r>
+              <a:rPr sz="1600" b="0" i="0" dirty="0" err="1">
+                <a:solidFill>
+                  <a:srgbClr val="4A4138"/>
+                </a:solidFill>
+              </a:rPr>
+              <a:t/>
+            </a:r>
+            <a:r>
+              <a:rPr sz="1600" b="0" i="0" dirty="0">
+                <a:solidFill>
+                  <a:srgbClr val="4A4138"/>
+                </a:solidFill>
+              </a:rPr>
+              <a:t/>
+            </a:r>
+            <a:r>
+              <a:rPr sz="1600" b="0" i="0" dirty="0" err="1">
+                <a:solidFill>
+                  <a:srgbClr val="4A4138"/>
+                </a:solidFill>
+              </a:rPr>
+              <a:t/>
+            </a:r>
+            <a:r>
+              <a:rPr sz="1600" b="0" i="0" dirty="0">
+                <a:solidFill>
+                  <a:srgbClr val="4A4138"/>
+                </a:solidFill>
+              </a:rPr>
+              <a:t/>
+            </a:r>
+            <a:r>
+              <a:rPr sz="1600" b="0" i="0" dirty="0" err="1">
+                <a:solidFill>
+                  <a:srgbClr val="4A4138"/>
+                </a:solidFill>
+              </a:rPr>
+              <a:t/>
+            </a:r>
+            <a:r>
+              <a:rPr sz="1600" b="0" i="0" dirty="0">
+                <a:solidFill>
+                  <a:srgbClr val="4A4138"/>
+                </a:solidFill>
+              </a:rPr>
+              <a:t/>
+            </a:r>
+            <a:r>
+              <a:rPr sz="1600" b="0" i="0" dirty="0" err="1">
+                <a:solidFill>
+                  <a:srgbClr val="4A4138"/>
+                </a:solidFill>
+              </a:rPr>
+              <a:t/>
+            </a:r>
+            <a:r>
+              <a:rPr sz="1600" b="0" i="0" dirty="0">
+                <a:solidFill>
+                  <a:srgbClr val="4A4138"/>
+                </a:solidFill>
+              </a:rPr>
+              <a:t/>
+            </a:r>
+            <a:r>
+              <a:rPr sz="1600" b="0" i="0" dirty="0" err="1">
+                <a:solidFill>
+                  <a:srgbClr val="4A4138"/>
+                </a:solidFill>
+              </a:rPr>
+              <a:t/>
+            </a:r>
+            <a:r>
+              <a:rPr sz="1600" b="0" i="0" dirty="0">
+                <a:solidFill>
+                  <a:srgbClr val="4A4138"/>
+                </a:solidFill>
+              </a:rPr>
+              <a:t/>
+            </a:r>
+            <a:r>
+              <a:rPr sz="1600" b="0" i="0" dirty="0" err="1">
+                <a:solidFill>
+                  <a:srgbClr val="4A4138"/>
+                </a:solidFill>
+              </a:rPr>
+              <a:t/>
+            </a:r>
+            <a:r>
+              <a:rPr sz="1600" b="0" i="0" dirty="0">
+                <a:solidFill>
+                  <a:srgbClr val="4A4138"/>
+                </a:solidFill>
+              </a:rPr>
+              <a:t/>
+            </a:r>
+            <a:r>
+              <a:rPr sz="1600" b="0" i="0" dirty="0" err="1">
+                <a:solidFill>
+                  <a:srgbClr val="4A4138"/>
+                </a:solidFill>
+              </a:rPr>
+              <a:t/>
+            </a:r>
+            <a:r>
+              <a:rPr sz="1600" b="0" i="0" dirty="0">
+                <a:solidFill>
+                  <a:srgbClr val="4A4138"/>
+                </a:solidFill>
+              </a:rPr>
+              <a:t/>
+            </a:r>
+            <a:r>
+              <a:rPr sz="1600" b="0" i="0" dirty="0" err="1">
+                <a:solidFill>
+                  <a:srgbClr val="4A4138"/>
+                </a:solidFill>
+              </a:rPr>
+              <a:t/>
+            </a:r>
+            <a:r>
+              <a:rPr sz="1600" b="0" i="0" dirty="0">
+                <a:solidFill>
+                  <a:srgbClr val="4A4138"/>
+                </a:solidFill>
+              </a:rPr>
+              <a:t/>
+            </a:r>
+            <a:r>
+              <a:rPr sz="1600" b="0" i="0" dirty="0" err="1">
+                <a:solidFill>
+                  <a:srgbClr val="4A4138"/>
+                </a:solidFill>
+              </a:rPr>
+              <a:t/>
+            </a:r>
+            <a:r>
+              <a:rPr sz="1600" b="0" i="0" dirty="0">
+                <a:solidFill>
+                  <a:srgbClr val="4A4138"/>
+                </a:solidFill>
+              </a:rPr>
+              <a:t/>
             </a:r>
           </a:p>
         </p:txBody>
@@ -10844,8 +10541,8 @@
         </p:nvSpPr>
         <p:spPr>
           <a:xfrm>
-            <a:off x="6108192" y="4773168"/>
-            <a:ext cx="5806440" cy="1783080"/>
+            <a:off x="6108192" y="4021394"/>
+            <a:ext cx="5797169" cy="2534854"/>
           </a:xfrm>
           <a:prstGeom prst="rect">
             <a:avLst/>
@@ -10876,6 +10573,7 @@
           <a:lstStyle/>
           <a:p>
             <a:pPr algn="ctr"/>
+            <a:endParaRPr/>
           </a:p>
         </p:txBody>
       </p:sp>
@@ -10887,8 +10585,8 @@
         </p:nvSpPr>
         <p:spPr>
           <a:xfrm>
-            <a:off x="6108192" y="4773168"/>
-            <a:ext cx="54864" cy="1783080"/>
+            <a:off x="6108192" y="4021394"/>
+            <a:ext cx="54864" cy="2534854"/>
           </a:xfrm>
           <a:prstGeom prst="rect">
             <a:avLst/>
@@ -10919,6 +10617,7 @@
           <a:lstStyle/>
           <a:p>
             <a:pPr algn="ctr"/>
+            <a:endParaRPr/>
           </a:p>
         </p:txBody>
       </p:sp>
@@ -10930,7 +10629,7 @@
         </p:nvSpPr>
         <p:spPr>
           <a:xfrm>
-            <a:off x="6336792" y="4864608"/>
+            <a:off x="6309233" y="4141838"/>
             <a:ext cx="5394960" cy="384048"/>
           </a:xfrm>
           <a:prstGeom prst="rect">
@@ -10946,12 +10645,52 @@
           <a:p>
             <a:pPr algn="l"/>
             <a:r>
-              <a:rPr sz="1300" b="1" i="0">
+              <a:rPr sz="1300" b="1" i="0" dirty="0" err="1">
                 <a:solidFill>
                   <a:srgbClr val="1A1612"/>
                 </a:solidFill>
               </a:rPr>
               <a:t>Last mile · 66% with no healthy offer</a:t>
+            </a:r>
+            <a:r>
+              <a:rPr sz="1300" b="1" i="0" dirty="0">
+                <a:solidFill>
+                  <a:srgbClr val="1A1612"/>
+                </a:solidFill>
+              </a:rPr>
+              <a:t/>
+            </a:r>
+            <a:r>
+              <a:rPr sz="1300" b="1" i="0" dirty="0" err="1">
+                <a:solidFill>
+                  <a:srgbClr val="1A1612"/>
+                </a:solidFill>
+              </a:rPr>
+              <a:t/>
+            </a:r>
+            <a:r>
+              <a:rPr sz="1300" b="1" i="0" dirty="0">
+                <a:solidFill>
+                  <a:srgbClr val="1A1612"/>
+                </a:solidFill>
+              </a:rPr>
+              <a:t/>
+            </a:r>
+            <a:r>
+              <a:rPr sz="1300" b="1" i="0" dirty="0" err="1">
+                <a:solidFill>
+                  <a:srgbClr val="1A1612"/>
+                </a:solidFill>
+              </a:rPr>
+              <a:t/>
+            </a:r>
+            <a:r>
+              <a:rPr sz="1300" b="1" i="0" dirty="0">
+                <a:solidFill>
+                  <a:srgbClr val="1A1612"/>
+                </a:solidFill>
+              </a:rPr>
+              <a:t/>
             </a:r>
           </a:p>
         </p:txBody>
@@ -10964,8 +10703,8 @@
         </p:nvSpPr>
         <p:spPr>
           <a:xfrm>
-            <a:off x="6336792" y="5285232"/>
-            <a:ext cx="5394960" cy="1097280"/>
+            <a:off x="6309233" y="4458583"/>
+            <a:ext cx="4429531" cy="830997"/>
           </a:xfrm>
           <a:prstGeom prst="rect">
             <a:avLst/>
@@ -10980,12 +10719,140 @@
           <a:p>
             <a:pPr algn="l"/>
             <a:r>
-              <a:rPr sz="1150" b="0" i="0">
+              <a:rPr sz="1600" dirty="0">
                 <a:solidFill>
                   <a:srgbClr val="4A4138"/>
                 </a:solidFill>
               </a:rPr>
               <a:t>2 out of 3 deliveries offered no healthy products to the store. The problem starts before the counter.</a:t>
+            </a:r>
+            <a:r>
+              <a:rPr sz="1600" dirty="0" err="1">
+                <a:solidFill>
+                  <a:srgbClr val="4A4138"/>
+                </a:solidFill>
+              </a:rPr>
+              <a:t/>
+            </a:r>
+            <a:r>
+              <a:rPr sz="1600" dirty="0">
+                <a:solidFill>
+                  <a:srgbClr val="4A4138"/>
+                </a:solidFill>
+              </a:rPr>
+              <a:t/>
+            </a:r>
+            <a:r>
+              <a:rPr sz="1600" dirty="0" err="1">
+                <a:solidFill>
+                  <a:srgbClr val="4A4138"/>
+                </a:solidFill>
+              </a:rPr>
+              <a:t/>
+            </a:r>
+            <a:r>
+              <a:rPr sz="1600" dirty="0">
+                <a:solidFill>
+                  <a:srgbClr val="4A4138"/>
+                </a:solidFill>
+              </a:rPr>
+              <a:t/>
+            </a:r>
+            <a:r>
+              <a:rPr sz="1600" dirty="0" err="1">
+                <a:solidFill>
+                  <a:srgbClr val="4A4138"/>
+                </a:solidFill>
+              </a:rPr>
+              <a:t/>
+            </a:r>
+            <a:r>
+              <a:rPr sz="1600" dirty="0">
+                <a:solidFill>
+                  <a:srgbClr val="4A4138"/>
+                </a:solidFill>
+              </a:rPr>
+              <a:t/>
+            </a:r>
+            <a:r>
+              <a:rPr sz="1600" dirty="0" err="1">
+                <a:solidFill>
+                  <a:srgbClr val="4A4138"/>
+                </a:solidFill>
+              </a:rPr>
+              <a:t/>
+            </a:r>
+            <a:r>
+              <a:rPr sz="1600" dirty="0">
+                <a:solidFill>
+                  <a:srgbClr val="4A4138"/>
+                </a:solidFill>
+              </a:rPr>
+              <a:t/>
+            </a:r>
+            <a:r>
+              <a:rPr sz="1600" dirty="0" err="1">
+                <a:solidFill>
+                  <a:srgbClr val="4A4138"/>
+                </a:solidFill>
+              </a:rPr>
+              <a:t/>
+            </a:r>
+            <a:r>
+              <a:rPr sz="1600" dirty="0">
+                <a:solidFill>
+                  <a:srgbClr val="4A4138"/>
+                </a:solidFill>
+              </a:rPr>
+              <a:t/>
+            </a:r>
+            <a:r>
+              <a:rPr sz="1600" dirty="0" err="1">
+                <a:solidFill>
+                  <a:srgbClr val="4A4138"/>
+                </a:solidFill>
+              </a:rPr>
+              <a:t/>
+            </a:r>
+            <a:r>
+              <a:rPr sz="1600" dirty="0">
+                <a:solidFill>
+                  <a:srgbClr val="4A4138"/>
+                </a:solidFill>
+              </a:rPr>
+              <a:t/>
+            </a:r>
+            <a:r>
+              <a:rPr sz="1600" dirty="0" err="1">
+                <a:solidFill>
+                  <a:srgbClr val="4A4138"/>
+                </a:solidFill>
+              </a:rPr>
+              <a:t/>
+            </a:r>
+            <a:r>
+              <a:rPr sz="1600" dirty="0">
+                <a:solidFill>
+                  <a:srgbClr val="4A4138"/>
+                </a:solidFill>
+              </a:rPr>
+              <a:t/>
+            </a:r>
+            <a:r>
+              <a:rPr sz="1600" dirty="0" err="1">
+                <a:solidFill>
+                  <a:srgbClr val="4A4138"/>
+                </a:solidFill>
+              </a:rPr>
+              <a:t/>
+            </a:r>
+            <a:r>
+              <a:rPr sz="1600" dirty="0">
+                <a:solidFill>
+                  <a:srgbClr val="4A4138"/>
+                </a:solidFill>
+              </a:rPr>
+              <a:t/>
             </a:r>
           </a:p>
         </p:txBody>
@@ -10999,7 +10866,7 @@
 </file>
 
 <file path=ppt/slides/slide6.xml><?xml version="1.0" encoding="utf-8"?>
-<p:sld xmlns:a="http://schemas.openxmlformats.org/drawingml/2006/main" xmlns:p="http://schemas.openxmlformats.org/presentationml/2006/main" xmlns:r="http://schemas.openxmlformats.org/officeDocument/2006/relationships">
+<p:sld xmlns:a="http://schemas.openxmlformats.org/drawingml/2006/main" xmlns:r="http://schemas.openxmlformats.org/officeDocument/2006/relationships" xmlns:p="http://schemas.openxmlformats.org/presentationml/2006/main">
   <p:cSld>
     <p:bg>
       <p:bgPr>
@@ -11015,7 +10882,14 @@
         <p:cNvGrpSpPr/>
         <p:nvPr/>
       </p:nvGrpSpPr>
-      <p:grpSpPr/>
+      <p:grpSpPr>
+        <a:xfrm>
+          <a:off x="0" y="0"/>
+          <a:ext cx="0" cy="0"/>
+          <a:chOff x="0" y="0"/>
+          <a:chExt cx="0" cy="0"/>
+        </a:xfrm>
+      </p:grpSpPr>
       <p:sp>
         <p:nvSpPr>
           <p:cNvPr id="2" name="Rectangle 1"/>
@@ -11056,6 +10930,7 @@
           <a:lstStyle/>
           <a:p>
             <a:pPr algn="ctr"/>
+            <a:endParaRPr/>
           </a:p>
         </p:txBody>
       </p:sp>
@@ -11133,6 +11008,7 @@
           <a:lstStyle/>
           <a:p>
             <a:pPr algn="ctr"/>
+            <a:endParaRPr/>
           </a:p>
         </p:txBody>
       </p:sp>
@@ -11277,6 +11153,7 @@
           <a:lstStyle/>
           <a:p>
             <a:pPr algn="ctr"/>
+            <a:endParaRPr/>
           </a:p>
         </p:txBody>
       </p:sp>
@@ -11343,7 +11220,7 @@
                   <a:srgbClr val="4A4138"/>
                 </a:solidFill>
               </a:rPr>
-              <a:t>·  Root cause: time scarcity</a:t>
+              <a:t>·  Root cause: lack of time</a:t>
             </a:r>
           </a:p>
         </p:txBody>
@@ -11377,7 +11254,7 @@
                   <a:srgbClr val="4A4138"/>
                 </a:solidFill>
               </a:rPr>
-              <a:t>·  Heavy nanostore use: soda &amp; snacks</a:t>
+              <a:t>·  Heavy nanostore use: soda and snacks</a:t>
             </a:r>
           </a:p>
         </p:txBody>
@@ -11411,7 +11288,7 @@
                   <a:srgbClr val="4A4138"/>
                 </a:solidFill>
               </a:rPr>
-              <a:t>·  Parents: very worried about kids' diet</a:t>
+              <a:t>·  Parents: very worried about their children's diet</a:t>
             </a:r>
           </a:p>
         </p:txBody>
@@ -11452,14 +11329,14 @@
       </p:sp>
       <p:pic>
         <p:nvPicPr>
-          <p:cNvPr id="14" name="Picture 13" descr="v2_act3_solutions_en.png"/>
+          <p:cNvPr id="14" name="Picture 13" descr="v2_act3_solutions_es.png"/>
           <p:cNvPicPr>
             <a:picLocks noChangeAspect="1"/>
           </p:cNvPicPr>
           <p:nvPr/>
         </p:nvPicPr>
         <p:blipFill>
-          <a:blip r:embed="rId2"/>
+          <a:blip r:embed="rId3"/>
           <a:stretch>
             <a:fillRect/>
           </a:stretch>
@@ -11514,6 +11391,7 @@
           <a:lstStyle/>
           <a:p>
             <a:pPr algn="ctr"/>
+            <a:endParaRPr/>
           </a:p>
         </p:txBody>
       </p:sp>
@@ -11541,12 +11419,244 @@
           <a:p>
             <a:pPr algn="l"/>
             <a:r>
-              <a:rPr sz="1200" b="1" i="0">
+              <a:rPr sz="1200" b="1" i="0" dirty="0" err="1">
                 <a:solidFill>
                   <a:srgbClr val="1A1612"/>
                 </a:solidFill>
               </a:rPr>
               <a:t>Convergence: same root cause from an independent sample. Respondents themselves name nutrition education as a solution.</a:t>
+            </a:r>
+            <a:r>
+              <a:rPr sz="1200" b="1" i="0" dirty="0">
+                <a:solidFill>
+                  <a:srgbClr val="1A1612"/>
+                </a:solidFill>
+              </a:rPr>
+              <a:t/>
+            </a:r>
+            <a:r>
+              <a:rPr sz="1200" b="1" i="0" dirty="0" err="1">
+                <a:solidFill>
+                  <a:srgbClr val="1A1612"/>
+                </a:solidFill>
+              </a:rPr>
+              <a:t/>
+            </a:r>
+            <a:r>
+              <a:rPr sz="1200" b="1" i="0" dirty="0">
+                <a:solidFill>
+                  <a:srgbClr val="1A1612"/>
+                </a:solidFill>
+              </a:rPr>
+              <a:t/>
+            </a:r>
+            <a:r>
+              <a:rPr sz="1200" b="1" i="0" dirty="0" err="1">
+                <a:solidFill>
+                  <a:srgbClr val="1A1612"/>
+                </a:solidFill>
+              </a:rPr>
+              <a:t/>
+            </a:r>
+            <a:r>
+              <a:rPr sz="1200" b="1" i="0" dirty="0">
+                <a:solidFill>
+                  <a:srgbClr val="1A1612"/>
+                </a:solidFill>
+              </a:rPr>
+              <a:t/>
+            </a:r>
+            <a:r>
+              <a:rPr sz="1200" b="1" i="0" dirty="0" err="1">
+                <a:solidFill>
+                  <a:srgbClr val="1A1612"/>
+                </a:solidFill>
+              </a:rPr>
+              <a:t/>
+            </a:r>
+            <a:r>
+              <a:rPr sz="1200" b="1" i="0" dirty="0">
+                <a:solidFill>
+                  <a:srgbClr val="1A1612"/>
+                </a:solidFill>
+              </a:rPr>
+              <a:t/>
+            </a:r>
+            <a:r>
+              <a:rPr sz="1200" b="1" i="0" dirty="0" err="1">
+                <a:solidFill>
+                  <a:srgbClr val="1A1612"/>
+                </a:solidFill>
+              </a:rPr>
+              <a:t/>
+            </a:r>
+            <a:r>
+              <a:rPr sz="1200" b="1" i="0" dirty="0">
+                <a:solidFill>
+                  <a:srgbClr val="1A1612"/>
+                </a:solidFill>
+              </a:rPr>
+              <a:t/>
+            </a:r>
+            <a:r>
+              <a:rPr sz="1200" b="1" i="0" dirty="0" err="1">
+                <a:solidFill>
+                  <a:srgbClr val="1A1612"/>
+                </a:solidFill>
+              </a:rPr>
+              <a:t/>
+            </a:r>
+            <a:r>
+              <a:rPr sz="1200" b="1" i="0" dirty="0">
+                <a:solidFill>
+                  <a:srgbClr val="1A1612"/>
+                </a:solidFill>
+              </a:rPr>
+              <a:t/>
+            </a:r>
+            <a:r>
+              <a:rPr sz="1200" b="1" i="0" dirty="0" err="1">
+                <a:solidFill>
+                  <a:srgbClr val="1A1612"/>
+                </a:solidFill>
+              </a:rPr>
+              <a:t/>
+            </a:r>
+            <a:r>
+              <a:rPr sz="1200" b="1" i="0" dirty="0">
+                <a:solidFill>
+                  <a:srgbClr val="1A1612"/>
+                </a:solidFill>
+              </a:rPr>
+              <a:t/>
+            </a:r>
+            <a:r>
+              <a:rPr sz="1200" b="1" i="0" dirty="0" err="1">
+                <a:solidFill>
+                  <a:srgbClr val="1A1612"/>
+                </a:solidFill>
+              </a:rPr>
+              <a:t/>
+            </a:r>
+            <a:r>
+              <a:rPr sz="1200" b="1" i="0" dirty="0">
+                <a:solidFill>
+                  <a:srgbClr val="1A1612"/>
+                </a:solidFill>
+              </a:rPr>
+              <a:t/>
+            </a:r>
+            <a:r>
+              <a:rPr sz="1200" b="1" i="0" dirty="0" err="1">
+                <a:solidFill>
+                  <a:srgbClr val="1A1612"/>
+                </a:solidFill>
+              </a:rPr>
+              <a:t/>
+            </a:r>
+            <a:r>
+              <a:rPr sz="1200" b="1" i="0" dirty="0">
+                <a:solidFill>
+                  <a:srgbClr val="1A1612"/>
+                </a:solidFill>
+              </a:rPr>
+              <a:t/>
+            </a:r>
+            <a:r>
+              <a:rPr sz="1200" b="1" i="0" dirty="0" err="1">
+                <a:solidFill>
+                  <a:srgbClr val="1A1612"/>
+                </a:solidFill>
+              </a:rPr>
+              <a:t/>
+            </a:r>
+            <a:r>
+              <a:rPr sz="1200" b="1" i="0" dirty="0">
+                <a:solidFill>
+                  <a:srgbClr val="1A1612"/>
+                </a:solidFill>
+              </a:rPr>
+              <a:t/>
+            </a:r>
+            <a:r>
+              <a:rPr sz="1200" b="1" i="0" dirty="0" err="1">
+                <a:solidFill>
+                  <a:srgbClr val="1A1612"/>
+                </a:solidFill>
+              </a:rPr>
+              <a:t/>
+            </a:r>
+            <a:r>
+              <a:rPr sz="1200" b="1" i="0" dirty="0">
+                <a:solidFill>
+                  <a:srgbClr val="1A1612"/>
+                </a:solidFill>
+              </a:rPr>
+              <a:t/>
+            </a:r>
+            <a:r>
+              <a:rPr sz="1200" b="1" i="0" dirty="0" err="1">
+                <a:solidFill>
+                  <a:srgbClr val="1A1612"/>
+                </a:solidFill>
+              </a:rPr>
+              <a:t/>
+            </a:r>
+            <a:r>
+              <a:rPr sz="1200" b="1" i="0" dirty="0">
+                <a:solidFill>
+                  <a:srgbClr val="1A1612"/>
+                </a:solidFill>
+              </a:rPr>
+              <a:t/>
+            </a:r>
+            <a:r>
+              <a:rPr sz="1200" b="1" i="0" dirty="0" err="1">
+                <a:solidFill>
+                  <a:srgbClr val="1A1612"/>
+                </a:solidFill>
+              </a:rPr>
+              <a:t/>
+            </a:r>
+            <a:r>
+              <a:rPr sz="1200" b="1" i="0" dirty="0">
+                <a:solidFill>
+                  <a:srgbClr val="1A1612"/>
+                </a:solidFill>
+              </a:rPr>
+              <a:t/>
+            </a:r>
+            <a:r>
+              <a:rPr sz="1200" b="1" i="0" dirty="0" err="1">
+                <a:solidFill>
+                  <a:srgbClr val="1A1612"/>
+                </a:solidFill>
+              </a:rPr>
+              <a:t/>
+            </a:r>
+            <a:r>
+              <a:rPr sz="1200" b="1" i="0" dirty="0">
+                <a:solidFill>
+                  <a:srgbClr val="1A1612"/>
+                </a:solidFill>
+              </a:rPr>
+              <a:t/>
+            </a:r>
+            <a:r>
+              <a:rPr sz="1200" b="1" i="0" dirty="0" err="1">
+                <a:solidFill>
+                  <a:srgbClr val="1A1612"/>
+                </a:solidFill>
+              </a:rPr>
+              <a:t/>
+            </a:r>
+            <a:r>
+              <a:rPr sz="1200" b="1" i="0" dirty="0">
+                <a:solidFill>
+                  <a:srgbClr val="1A1612"/>
+                </a:solidFill>
+              </a:rPr>
+              <a:t/>
             </a:r>
           </a:p>
         </p:txBody>
@@ -11560,7 +11670,7 @@
 </file>
 
 <file path=ppt/slides/slide7.xml><?xml version="1.0" encoding="utf-8"?>
-<p:sld xmlns:a="http://schemas.openxmlformats.org/drawingml/2006/main" xmlns:p="http://schemas.openxmlformats.org/presentationml/2006/main" xmlns:r="http://schemas.openxmlformats.org/officeDocument/2006/relationships">
+<p:sld xmlns:a="http://schemas.openxmlformats.org/drawingml/2006/main" xmlns:r="http://schemas.openxmlformats.org/officeDocument/2006/relationships" xmlns:p="http://schemas.openxmlformats.org/presentationml/2006/main">
   <p:cSld>
     <p:bg>
       <p:bgPr>
@@ -11576,7 +11686,14 @@
         <p:cNvGrpSpPr/>
         <p:nvPr/>
       </p:nvGrpSpPr>
-      <p:grpSpPr/>
+      <p:grpSpPr>
+        <a:xfrm>
+          <a:off x="0" y="0"/>
+          <a:ext cx="0" cy="0"/>
+          <a:chOff x="0" y="0"/>
+          <a:chExt cx="0" cy="0"/>
+        </a:xfrm>
+      </p:grpSpPr>
       <p:sp>
         <p:nvSpPr>
           <p:cNvPr id="2" name="Rectangle 1"/>
@@ -11617,6 +11734,7 @@
           <a:lstStyle/>
           <a:p>
             <a:pPr algn="ctr"/>
+            <a:endParaRPr/>
           </a:p>
         </p:txBody>
       </p:sp>
@@ -11694,6 +11812,7 @@
           <a:lstStyle/>
           <a:p>
             <a:pPr algn="ctr"/>
+            <a:endParaRPr/>
           </a:p>
         </p:txBody>
       </p:sp>
@@ -11805,6 +11924,7 @@
           <a:lstStyle/>
           <a:p>
             <a:pPr algn="ctr"/>
+            <a:endParaRPr/>
           </a:p>
         </p:txBody>
       </p:sp>
@@ -11816,8 +11936,8 @@
         </p:nvSpPr>
         <p:spPr>
           <a:xfrm>
-            <a:off x="502920" y="1783080"/>
-            <a:ext cx="3200400" cy="1554480"/>
+            <a:off x="585216" y="2167128"/>
+            <a:ext cx="2948203" cy="707886"/>
           </a:xfrm>
           <a:prstGeom prst="rect">
             <a:avLst/>
@@ -11832,7 +11952,7 @@
           <a:p>
             <a:pPr algn="ctr"/>
             <a:r>
-              <a:rPr sz="1300" b="1" i="0">
+              <a:rPr sz="2000" b="1" i="0" dirty="0" err="1">
                 <a:solidFill>
                   <a:srgbClr val="F4EFE6"/>
                 </a:solidFill>
@@ -11840,6 +11960,43 @@
               <a:t>Current ecosystem
 pushes unhealthy choices</a:t>
             </a:r>
+            <a:r>
+              <a:rPr sz="2000" b="1" i="0" dirty="0">
+                <a:solidFill>
+                  <a:srgbClr val="F4EFE6"/>
+                </a:solidFill>
+              </a:rPr>
+              <a:t/>
+            </a:r>
+            <a:r>
+              <a:rPr sz="2000" b="1" i="0" dirty="0" err="1">
+                <a:solidFill>
+                  <a:srgbClr val="F4EFE6"/>
+                </a:solidFill>
+              </a:rPr>
+              <a:t/>
+            </a:r>
+            <a:r>
+              <a:rPr sz="2000" b="1" i="0" dirty="0">
+                <a:solidFill>
+                  <a:srgbClr val="F4EFE6"/>
+                </a:solidFill>
+              </a:rPr>
+              <a:t/>
+            </a:r>
+            <a:r>
+              <a:rPr sz="2000" b="1" i="0" dirty="0" err="1">
+                <a:solidFill>
+                  <a:srgbClr val="F4EFE6"/>
+                </a:solidFill>
+              </a:rPr>
+              <a:t/>
+            </a:r>
+            <a:endParaRPr sz="2000" b="1" i="0" dirty="0">
+              <a:solidFill>
+                <a:srgbClr val="F4EFE6"/>
+              </a:solidFill>
+            </a:endParaRPr>
           </a:p>
         </p:txBody>
       </p:sp>
@@ -11917,6 +12074,7 @@
           <a:lstStyle/>
           <a:p>
             <a:pPr algn="ctr"/>
+            <a:endParaRPr/>
           </a:p>
         </p:txBody>
       </p:sp>
@@ -11928,8 +12086,8 @@
         </p:nvSpPr>
         <p:spPr>
           <a:xfrm>
-            <a:off x="4389120" y="1783080"/>
-            <a:ext cx="3200400" cy="1554480"/>
+            <a:off x="4471416" y="2055684"/>
+            <a:ext cx="2965409" cy="1015663"/>
           </a:xfrm>
           <a:prstGeom prst="rect">
             <a:avLst/>
@@ -11944,7 +12102,7 @@
           <a:p>
             <a:pPr algn="ctr"/>
             <a:r>
-              <a:rPr sz="1300" b="1" i="0">
+              <a:rPr sz="2000" b="1" i="0" dirty="0">
                 <a:solidFill>
                   <a:srgbClr val="B8862A"/>
                 </a:solidFill>
@@ -11952,6 +12110,99 @@
               <a:t>People know and want —
 but can't close the gap</a:t>
             </a:r>
+            <a:r>
+              <a:rPr sz="2000" b="1" i="0" dirty="0" err="1">
+                <a:solidFill>
+                  <a:srgbClr val="B8862A"/>
+                </a:solidFill>
+              </a:rPr>
+              <a:t/>
+            </a:r>
+            <a:r>
+              <a:rPr sz="2000" b="1" i="0" dirty="0">
+                <a:solidFill>
+                  <a:srgbClr val="B8862A"/>
+                </a:solidFill>
+              </a:rPr>
+              <a:t/>
+            </a:r>
+            <a:r>
+              <a:rPr sz="2000" b="1" i="0" dirty="0" err="1">
+                <a:solidFill>
+                  <a:srgbClr val="B8862A"/>
+                </a:solidFill>
+              </a:rPr>
+              <a:t/>
+            </a:r>
+            <a:r>
+              <a:rPr sz="2000" b="1" i="0" dirty="0">
+                <a:solidFill>
+                  <a:srgbClr val="B8862A"/>
+                </a:solidFill>
+              </a:rPr>
+              <a:t/>
+            </a:r>
+            <a:r>
+              <a:rPr sz="2000" b="1" i="0" dirty="0" err="1">
+                <a:solidFill>
+                  <a:srgbClr val="B8862A"/>
+                </a:solidFill>
+              </a:rPr>
+              <a:t/>
+            </a:r>
+            <a:r>
+              <a:rPr sz="2000" b="1" i="0" dirty="0">
+                <a:solidFill>
+                  <a:srgbClr val="B8862A"/>
+                </a:solidFill>
+              </a:rPr>
+              <a:t/>
+            </a:r>
+            <a:r>
+              <a:rPr sz="2000" b="1" i="0" dirty="0" err="1">
+                <a:solidFill>
+                  <a:srgbClr val="B8862A"/>
+                </a:solidFill>
+              </a:rPr>
+              <a:t/>
+            </a:r>
+            <a:r>
+              <a:rPr sz="2000" b="1" i="0" dirty="0">
+                <a:solidFill>
+                  <a:srgbClr val="B8862A"/>
+                </a:solidFill>
+              </a:rPr>
+              <a:t/>
+            </a:r>
+            <a:r>
+              <a:rPr sz="2000" b="1" i="0" dirty="0" err="1">
+                <a:solidFill>
+                  <a:srgbClr val="B8862A"/>
+                </a:solidFill>
+              </a:rPr>
+              <a:t/>
+            </a:r>
+            <a:r>
+              <a:rPr sz="2000" b="1" i="0" dirty="0">
+                <a:solidFill>
+                  <a:srgbClr val="B8862A"/>
+                </a:solidFill>
+              </a:rPr>
+              <a:t/>
+            </a:r>
+            <a:r>
+              <a:rPr sz="2000" b="1" i="0" dirty="0" err="1">
+                <a:solidFill>
+                  <a:srgbClr val="B8862A"/>
+                </a:solidFill>
+              </a:rPr>
+              <a:t/>
+            </a:r>
+            <a:endParaRPr sz="2000" b="1" i="0" dirty="0">
+              <a:solidFill>
+                <a:srgbClr val="B8862A"/>
+              </a:solidFill>
+            </a:endParaRPr>
           </a:p>
         </p:txBody>
       </p:sp>
@@ -12029,6 +12280,7 @@
           <a:lstStyle/>
           <a:p>
             <a:pPr algn="ctr"/>
+            <a:endParaRPr/>
           </a:p>
         </p:txBody>
       </p:sp>
@@ -12040,8 +12292,8 @@
         </p:nvSpPr>
         <p:spPr>
           <a:xfrm>
-            <a:off x="8275320" y="1783080"/>
-            <a:ext cx="3200400" cy="1554480"/>
+            <a:off x="8275320" y="2126754"/>
+            <a:ext cx="3200400" cy="707886"/>
           </a:xfrm>
           <a:prstGeom prst="rect">
             <a:avLst/>
@@ -12052,18 +12304,53 @@
           <a:bodyPr wrap="square">
             <a:spAutoFit/>
           </a:bodyPr>
-          <a:lstStyle/>
-          <a:p>
-            <a:pPr algn="ctr"/>
-            <a:r>
-              <a:rPr sz="1300" b="1" i="0">
+          <a:lstStyle>
+            <a:defPPr>
+              <a:defRPr lang="en-US"/>
+            </a:defPPr>
+            <a:lvl1pPr algn="ctr">
+              <a:defRPr sz="2000" b="1" i="0">
                 <a:solidFill>
                   <a:srgbClr val="F4EFE6"/>
                 </a:solidFill>
-              </a:rPr>
-              <a:t>Lever: educate the
-next generation of shoppers</a:t>
-            </a:r>
+              </a:defRPr>
+            </a:lvl1pPr>
+          </a:lstStyle>
+          <a:p>
+            <a:r>
+              <a:rPr dirty="0"/>
+              <a:t>Lever: educate
+the next generation of shoppers</a:t>
+            </a:r>
+            <a:r>
+              <a:rPr dirty="0" err="1"/>
+              <a:t/>
+            </a:r>
+            <a:r>
+              <a:rPr dirty="0"/>
+              <a:t/>
+            </a:r>
+            <a:r>
+              <a:rPr dirty="0" err="1"/>
+              <a:t/>
+            </a:r>
+            <a:r>
+              <a:rPr dirty="0"/>
+              <a:t/>
+            </a:r>
+            <a:r>
+              <a:rPr dirty="0" err="1"/>
+              <a:t/>
+            </a:r>
+            <a:r>
+              <a:rPr dirty="0"/>
+              <a:t/>
+            </a:r>
+            <a:r>
+              <a:rPr dirty="0" err="1"/>
+              <a:t/>
+            </a:r>
+            <a:endParaRPr dirty="0"/>
           </a:p>
         </p:txBody>
       </p:sp>
@@ -12107,6 +12394,7 @@
           <a:lstStyle/>
           <a:p>
             <a:pPr algn="ctr"/>
+            <a:endParaRPr/>
           </a:p>
         </p:txBody>
       </p:sp>
@@ -12173,7 +12461,7 @@
                   <a:srgbClr val="4A4138"/>
                 </a:solidFill>
               </a:rPr>
-              <a:t>·  Higher obesity prevalence in adolescents (40.1%) than in children (36.6%) — ENSANUT 2020–2024</a:t>
+              <a:t>·  Higher obesity in adolescents (40.1%) than in children (36.6%) — ENSANUT 2020–2024</a:t>
             </a:r>
           </a:p>
         </p:txBody>
@@ -12207,7 +12495,7 @@
                   <a:srgbClr val="4A4138"/>
                 </a:solidFill>
               </a:rPr>
-              <a:t>·  They handle their own money and visit nanostores independently: they are tomorrow's shoppers</a:t>
+              <a:t>·  They handle their own money and visit nanostores independently: tomorrow's shoppers</a:t>
             </a:r>
           </a:p>
         </p:txBody>
@@ -12275,7 +12563,7 @@
                   <a:srgbClr val="B8332A"/>
                 </a:solidFill>
               </a:rPr>
-              <a:t>We don't regulate nanostores. We educate those who will visit them for life.</a:t>
+              <a:t>We don't regulate the nanostores. We educate those who will visit them for life.</a:t>
             </a:r>
           </a:p>
         </p:txBody>
@@ -12289,7 +12577,7 @@
 </file>
 
 <file path=ppt/slides/slide8.xml><?xml version="1.0" encoding="utf-8"?>
-<p:sld xmlns:a="http://schemas.openxmlformats.org/drawingml/2006/main" xmlns:p="http://schemas.openxmlformats.org/presentationml/2006/main" xmlns:r="http://schemas.openxmlformats.org/officeDocument/2006/relationships">
+<p:sld xmlns:a="http://schemas.openxmlformats.org/drawingml/2006/main" xmlns:r="http://schemas.openxmlformats.org/officeDocument/2006/relationships" xmlns:p="http://schemas.openxmlformats.org/presentationml/2006/main">
   <p:cSld>
     <p:bg>
       <p:bgPr>
@@ -12305,7 +12593,14 @@
         <p:cNvGrpSpPr/>
         <p:nvPr/>
       </p:nvGrpSpPr>
-      <p:grpSpPr/>
+      <p:grpSpPr>
+        <a:xfrm>
+          <a:off x="0" y="0"/>
+          <a:ext cx="0" cy="0"/>
+          <a:chOff x="0" y="0"/>
+          <a:chExt cx="0" cy="0"/>
+        </a:xfrm>
+      </p:grpSpPr>
       <p:sp>
         <p:nvSpPr>
           <p:cNvPr id="2" name="Rectangle 1"/>
@@ -12346,6 +12641,7 @@
           <a:lstStyle/>
           <a:p>
             <a:pPr algn="ctr"/>
+            <a:endParaRPr/>
           </a:p>
         </p:txBody>
       </p:sp>
@@ -12423,6 +12719,7 @@
           <a:lstStyle/>
           <a:p>
             <a:pPr algn="ctr"/>
+            <a:endParaRPr/>
           </a:p>
         </p:txBody>
       </p:sp>
@@ -12567,6 +12864,7 @@
           <a:lstStyle/>
           <a:p>
             <a:pPr algn="ctr"/>
+            <a:endParaRPr/>
           </a:p>
         </p:txBody>
       </p:sp>
@@ -12668,7 +12966,7 @@
                   <a:srgbClr val="8A7D6E"/>
                 </a:solidFill>
               </a:rPr>
-              <a:t>Active lifestyle literacy: reading labels, planning a healthy snack with a real budget</a:t>
+              <a:t>Active lifestyle literacy: reading labels, planning a healthy snack on a real budget</a:t>
             </a:r>
           </a:p>
         </p:txBody>
@@ -12713,6 +13011,7 @@
           <a:lstStyle/>
           <a:p>
             <a:pPr algn="ctr"/>
+            <a:endParaRPr/>
           </a:p>
         </p:txBody>
       </p:sp>
@@ -12814,7 +13113,7 @@
                   <a:srgbClr val="8A7D6E"/>
                 </a:solidFill>
               </a:rPr>
-              <a:t>Audit of nanostores around the school · Bi-weekly · Connects learning to real environment</a:t>
+              <a:t>Audit of nanostores around the school · Every two weeks · Connects learning to real environment</a:t>
             </a:r>
           </a:p>
         </p:txBody>
@@ -12859,6 +13158,7 @@
           <a:lstStyle/>
           <a:p>
             <a:pPr algn="ctr"/>
+            <a:endParaRPr/>
           </a:p>
         </p:txBody>
       </p:sp>
@@ -13005,6 +13305,7 @@
           <a:lstStyle/>
           <a:p>
             <a:pPr algn="ctr"/>
+            <a:endParaRPr/>
           </a:p>
         </p:txBody>
       </p:sp>
@@ -13151,6 +13452,7 @@
           <a:lstStyle/>
           <a:p>
             <a:pPr algn="ctr"/>
+            <a:endParaRPr/>
           </a:p>
         </p:txBody>
       </p:sp>
@@ -13183,7 +13485,7 @@
                   <a:srgbClr val="1A1612"/>
                 </a:solidFill>
               </a:rPr>
-              <a:t>Estimated cost: ~MXN 9,500 / school / year   ·   ~35,000 secondary schools → ≈ MXN 330M/year   ·   &lt; 0.05% of federal education budget</a:t>
+              <a:t>Est. cost: ~MXN 9,500 / school / year   ·   ~35,000 schools → ≈ MXN 330M/year   ·   &lt; 0.05% of the federal education budget</a:t>
             </a:r>
           </a:p>
         </p:txBody>
@@ -13197,7 +13499,7 @@
 </file>
 
 <file path=ppt/slides/slide9.xml><?xml version="1.0" encoding="utf-8"?>
-<p:sld xmlns:a="http://schemas.openxmlformats.org/drawingml/2006/main" xmlns:p="http://schemas.openxmlformats.org/presentationml/2006/main" xmlns:r="http://schemas.openxmlformats.org/officeDocument/2006/relationships">
+<p:sld xmlns:a="http://schemas.openxmlformats.org/drawingml/2006/main" xmlns:r="http://schemas.openxmlformats.org/officeDocument/2006/relationships" xmlns:p="http://schemas.openxmlformats.org/presentationml/2006/main">
   <p:cSld>
     <p:bg>
       <p:bgPr>
@@ -13213,7 +13515,14 @@
         <p:cNvGrpSpPr/>
         <p:nvPr/>
       </p:nvGrpSpPr>
-      <p:grpSpPr/>
+      <p:grpSpPr>
+        <a:xfrm>
+          <a:off x="0" y="0"/>
+          <a:ext cx="0" cy="0"/>
+          <a:chOff x="0" y="0"/>
+          <a:chExt cx="0" cy="0"/>
+        </a:xfrm>
+      </p:grpSpPr>
       <p:sp>
         <p:nvSpPr>
           <p:cNvPr id="2" name="Rectangle 1"/>
@@ -13254,6 +13563,7 @@
           <a:lstStyle/>
           <a:p>
             <a:pPr algn="ctr"/>
+            <a:endParaRPr/>
           </a:p>
         </p:txBody>
       </p:sp>
@@ -13331,6 +13641,7 @@
           <a:lstStyle/>
           <a:p>
             <a:pPr algn="ctr"/>
+            <a:endParaRPr/>
           </a:p>
         </p:txBody>
       </p:sp>
@@ -13370,14 +13681,14 @@
       </p:sp>
       <p:pic>
         <p:nvPicPr>
-          <p:cNvPr id="6" name="Picture 5" descr="v2_act4_montecarlo_en.png"/>
+          <p:cNvPr id="6" name="Picture 5" descr="v2_act4_montecarlo_es.png"/>
           <p:cNvPicPr>
             <a:picLocks noChangeAspect="1"/>
           </p:cNvPicPr>
           <p:nvPr/>
         </p:nvPicPr>
         <p:blipFill>
-          <a:blip r:embed="rId2"/>
+          <a:blip r:embed="rId3"/>
           <a:stretch>
             <a:fillRect/>
           </a:stretch>
@@ -13432,6 +13743,7 @@
           <a:lstStyle/>
           <a:p>
             <a:pPr algn="ctr"/>
+            <a:endParaRPr/>
           </a:p>
         </p:txBody>
       </p:sp>
@@ -13509,6 +13821,7 @@
           <a:lstStyle/>
           <a:p>
             <a:pPr algn="ctr"/>
+            <a:endParaRPr/>
           </a:p>
         </p:txBody>
       </p:sp>
@@ -13541,7 +13854,7 @@
                   <a:srgbClr val="8A7D6E"/>
                 </a:solidFill>
               </a:rPr>
-              <a:t>Baseline</a:t>
+              <a:t>No intervention</a:t>
             </a:r>
           </a:p>
         </p:txBody>
@@ -13620,6 +13933,7 @@
           <a:lstStyle/>
           <a:p>
             <a:pPr algn="ctr"/>
+            <a:endParaRPr/>
           </a:p>
         </p:txBody>
       </p:sp>
@@ -13731,6 +14045,7 @@
           <a:lstStyle/>
           <a:p>
             <a:pPr algn="ctr"/>
+            <a:endParaRPr/>
           </a:p>
         </p:txBody>
       </p:sp>
@@ -13842,6 +14157,7 @@
           <a:lstStyle/>
           <a:p>
             <a:pPr algn="ctr"/>
+            <a:endParaRPr/>
           </a:p>
         </p:txBody>
       </p:sp>
@@ -13953,6 +14269,7 @@
           <a:lstStyle/>
           <a:p>
             <a:pPr algn="ctr"/>
+            <a:endParaRPr/>
           </a:p>
         </p:txBody>
       </p:sp>
@@ -14098,6 +14415,7 @@
           <a:lstStyle/>
           <a:p>
             <a:pPr algn="ctr"/>
+            <a:endParaRPr/>
           </a:p>
         </p:txBody>
       </p:sp>
@@ -14464,7 +14782,7 @@
 </file>
 
 <file path=ppt/theme/theme2.xml><?xml version="1.0" encoding="utf-8"?>
-<a:theme xmlns:a="http://schemas.openxmlformats.org/drawingml/2006/main" name="Office Theme">
+<a:theme xmlns:a="http://schemas.openxmlformats.org/drawingml/2006/main" name="Tema de Office">
   <a:themeElements>
     <a:clrScheme name="Office">
       <a:dk1>
@@ -14474,44 +14792,44 @@
         <a:sysClr val="window" lastClr="FFFFFF"/>
       </a:lt1>
       <a:dk2>
-        <a:srgbClr val="1F497D"/>
+        <a:srgbClr val="0E2841"/>
       </a:dk2>
       <a:lt2>
-        <a:srgbClr val="EEECE1"/>
+        <a:srgbClr val="E8E8E8"/>
       </a:lt2>
       <a:accent1>
-        <a:srgbClr val="4F81BD"/>
+        <a:srgbClr val="156082"/>
       </a:accent1>
       <a:accent2>
-        <a:srgbClr val="C0504D"/>
+        <a:srgbClr val="E97132"/>
       </a:accent2>
       <a:accent3>
-        <a:srgbClr val="9BBB59"/>
+        <a:srgbClr val="196B24"/>
       </a:accent3>
       <a:accent4>
-        <a:srgbClr val="8064A2"/>
+        <a:srgbClr val="0F9ED5"/>
       </a:accent4>
       <a:accent5>
-        <a:srgbClr val="4BACC6"/>
+        <a:srgbClr val="A02B93"/>
       </a:accent5>
       <a:accent6>
-        <a:srgbClr val="F79646"/>
+        <a:srgbClr val="4EA72E"/>
       </a:accent6>
       <a:hlink>
-        <a:srgbClr val="0000FF"/>
+        <a:srgbClr val="467886"/>
       </a:hlink>
       <a:folHlink>
-        <a:srgbClr val="800080"/>
+        <a:srgbClr val="96607D"/>
       </a:folHlink>
     </a:clrScheme>
     <a:fontScheme name="Office">
       <a:majorFont>
-        <a:latin typeface="Calibri"/>
+        <a:latin typeface="Aptos Display" panose="02110004020202020204"/>
         <a:ea typeface=""/>
         <a:cs typeface=""/>
-        <a:font script="Jpan" typeface="ＭＳ Ｐゴシック"/>
+        <a:font script="Jpan" typeface="游ゴシック Light"/>
         <a:font script="Hang" typeface="맑은 고딕"/>
-        <a:font script="Hans" typeface="宋体"/>
+        <a:font script="Hans" typeface="等线 Light"/>
         <a:font script="Hant" typeface="新細明體"/>
         <a:font script="Arab" typeface="Times New Roman"/>
         <a:font script="Hebr" typeface="Times New Roman"/>
@@ -14539,14 +14857,31 @@
         <a:font script="Viet" typeface="Times New Roman"/>
         <a:font script="Uigh" typeface="Microsoft Uighur"/>
         <a:font script="Geor" typeface="Sylfaen"/>
+        <a:font script="Armn" typeface="Arial"/>
+        <a:font script="Bugi" typeface="Leelawadee UI"/>
+        <a:font script="Bopo" typeface="Microsoft JhengHei"/>
+        <a:font script="Java" typeface="Javanese Text"/>
+        <a:font script="Lisu" typeface="Segoe UI"/>
+        <a:font script="Mymr" typeface="Myanmar Text"/>
+        <a:font script="Nkoo" typeface="Ebrima"/>
+        <a:font script="Olck" typeface="Nirmala UI"/>
+        <a:font script="Osma" typeface="Ebrima"/>
+        <a:font script="Phag" typeface="Phagspa"/>
+        <a:font script="Syrn" typeface="Estrangelo Edessa"/>
+        <a:font script="Syrj" typeface="Estrangelo Edessa"/>
+        <a:font script="Syre" typeface="Estrangelo Edessa"/>
+        <a:font script="Sora" typeface="Nirmala UI"/>
+        <a:font script="Tale" typeface="Microsoft Tai Le"/>
+        <a:font script="Talu" typeface="Microsoft New Tai Lue"/>
+        <a:font script="Tfng" typeface="Ebrima"/>
       </a:majorFont>
       <a:minorFont>
-        <a:latin typeface="Calibri"/>
+        <a:latin typeface="Aptos" panose="02110004020202020204"/>
         <a:ea typeface=""/>
         <a:cs typeface=""/>
-        <a:font script="Jpan" typeface="ＭＳ Ｐゴシック"/>
+        <a:font script="Jpan" typeface="游ゴシック"/>
         <a:font script="Hang" typeface="맑은 고딕"/>
-        <a:font script="Hans" typeface="宋体"/>
+        <a:font script="Hans" typeface="等线"/>
         <a:font script="Hant" typeface="新細明體"/>
         <a:font script="Arab" typeface="Arial"/>
         <a:font script="Hebr" typeface="Arial"/>
@@ -14574,6 +14909,23 @@
         <a:font script="Viet" typeface="Arial"/>
         <a:font script="Uigh" typeface="Microsoft Uighur"/>
         <a:font script="Geor" typeface="Sylfaen"/>
+        <a:font script="Armn" typeface="Arial"/>
+        <a:font script="Bugi" typeface="Leelawadee UI"/>
+        <a:font script="Bopo" typeface="Microsoft JhengHei"/>
+        <a:font script="Java" typeface="Javanese Text"/>
+        <a:font script="Lisu" typeface="Segoe UI"/>
+        <a:font script="Mymr" typeface="Myanmar Text"/>
+        <a:font script="Nkoo" typeface="Ebrima"/>
+        <a:font script="Olck" typeface="Nirmala UI"/>
+        <a:font script="Osma" typeface="Ebrima"/>
+        <a:font script="Phag" typeface="Phagspa"/>
+        <a:font script="Syrn" typeface="Estrangelo Edessa"/>
+        <a:font script="Syrj" typeface="Estrangelo Edessa"/>
+        <a:font script="Syre" typeface="Estrangelo Edessa"/>
+        <a:font script="Sora" typeface="Nirmala UI"/>
+        <a:font script="Tale" typeface="Microsoft Tai Le"/>
+        <a:font script="Talu" typeface="Microsoft New Tai Lue"/>
+        <a:font script="Tfng" typeface="Ebrima"/>
       </a:minorFont>
     </a:fontScheme>
     <a:fmtScheme name="Office">
@@ -14585,180 +14937,136 @@
           <a:gsLst>
             <a:gs pos="0">
               <a:schemeClr val="phClr">
-                <a:tint val="50000"/>
-                <a:satMod val="300000"/>
+                <a:lumMod val="110000"/>
+                <a:satMod val="105000"/>
+                <a:tint val="67000"/>
               </a:schemeClr>
             </a:gs>
-            <a:gs pos="35000">
+            <a:gs pos="50000">
               <a:schemeClr val="phClr">
-                <a:tint val="37000"/>
-                <a:satMod val="300000"/>
+                <a:lumMod val="105000"/>
+                <a:satMod val="103000"/>
+                <a:tint val="73000"/>
               </a:schemeClr>
             </a:gs>
             <a:gs pos="100000">
               <a:schemeClr val="phClr">
-                <a:tint val="15000"/>
-                <a:satMod val="350000"/>
+                <a:lumMod val="105000"/>
+                <a:satMod val="109000"/>
+                <a:tint val="81000"/>
               </a:schemeClr>
             </a:gs>
           </a:gsLst>
-          <a:lin ang="16200000" scaled="1"/>
+          <a:lin ang="5400000" scaled="0"/>
         </a:gradFill>
         <a:gradFill rotWithShape="1">
           <a:gsLst>
             <a:gs pos="0">
               <a:schemeClr val="phClr">
-                <a:tint val="100000"/>
+                <a:satMod val="103000"/>
+                <a:lumMod val="102000"/>
+                <a:tint val="94000"/>
+              </a:schemeClr>
+            </a:gs>
+            <a:gs pos="50000">
+              <a:schemeClr val="phClr">
+                <a:satMod val="110000"/>
+                <a:lumMod val="100000"/>
                 <a:shade val="100000"/>
-                <a:satMod val="130000"/>
               </a:schemeClr>
             </a:gs>
             <a:gs pos="100000">
               <a:schemeClr val="phClr">
-                <a:tint val="50000"/>
-                <a:shade val="100000"/>
-                <a:satMod val="350000"/>
+                <a:lumMod val="99000"/>
+                <a:satMod val="120000"/>
+                <a:shade val="78000"/>
               </a:schemeClr>
             </a:gs>
           </a:gsLst>
-          <a:lin ang="16200000" scaled="0"/>
+          <a:lin ang="5400000" scaled="0"/>
         </a:gradFill>
       </a:fillStyleLst>
       <a:lnStyleLst>
-        <a:ln w="9525" cap="flat" cmpd="sng" algn="ctr">
+        <a:ln w="12700" cap="flat" cmpd="sng" algn="ctr">
           <a:solidFill>
-            <a:schemeClr val="phClr">
-              <a:shade val="95000"/>
-              <a:satMod val="105000"/>
-            </a:schemeClr>
+            <a:schemeClr val="phClr"/>
           </a:solidFill>
           <a:prstDash val="solid"/>
+          <a:miter lim="800000"/>
+        </a:ln>
+        <a:ln w="19050" cap="flat" cmpd="sng" algn="ctr">
+          <a:solidFill>
+            <a:schemeClr val="phClr"/>
+          </a:solidFill>
+          <a:prstDash val="solid"/>
+          <a:miter lim="800000"/>
         </a:ln>
         <a:ln w="25400" cap="flat" cmpd="sng" algn="ctr">
           <a:solidFill>
             <a:schemeClr val="phClr"/>
           </a:solidFill>
           <a:prstDash val="solid"/>
-        </a:ln>
-        <a:ln w="38100" cap="flat" cmpd="sng" algn="ctr">
-          <a:solidFill>
-            <a:schemeClr val="phClr"/>
-          </a:solidFill>
-          <a:prstDash val="solid"/>
+          <a:miter lim="800000"/>
         </a:ln>
       </a:lnStyleLst>
       <a:effectStyleLst>
         <a:effectStyle>
+          <a:effectLst/>
+        </a:effectStyle>
+        <a:effectStyle>
+          <a:effectLst/>
+        </a:effectStyle>
+        <a:effectStyle>
           <a:effectLst>
-            <a:outerShdw blurRad="40000" dist="20000" dir="5400000" rotWithShape="0">
+            <a:outerShdw blurRad="57150" dist="19050" dir="5400000" algn="ctr" rotWithShape="0">
               <a:srgbClr val="000000">
-                <a:alpha val="38000"/>
+                <a:alpha val="63000"/>
               </a:srgbClr>
             </a:outerShdw>
           </a:effectLst>
-        </a:effectStyle>
-        <a:effectStyle>
-          <a:effectLst>
-            <a:outerShdw blurRad="40000" dist="23000" dir="5400000" rotWithShape="0">
-              <a:srgbClr val="000000">
-                <a:alpha val="35000"/>
-              </a:srgbClr>
-            </a:outerShdw>
-          </a:effectLst>
-        </a:effectStyle>
-        <a:effectStyle>
-          <a:effectLst>
-            <a:outerShdw blurRad="40000" dist="23000" dir="5400000" rotWithShape="0">
-              <a:srgbClr val="000000">
-                <a:alpha val="35000"/>
-              </a:srgbClr>
-            </a:outerShdw>
-          </a:effectLst>
-          <a:scene3d>
-            <a:camera prst="orthographicFront">
-              <a:rot lat="0" lon="0" rev="0"/>
-            </a:camera>
-            <a:lightRig rig="threePt" dir="t">
-              <a:rot lat="0" lon="0" rev="1200000"/>
-            </a:lightRig>
-          </a:scene3d>
-          <a:sp3d>
-            <a:bevelT w="63500" h="25400"/>
-          </a:sp3d>
         </a:effectStyle>
       </a:effectStyleLst>
       <a:bgFillStyleLst>
         <a:solidFill>
           <a:schemeClr val="phClr"/>
         </a:solidFill>
+        <a:solidFill>
+          <a:schemeClr val="phClr">
+            <a:tint val="95000"/>
+            <a:satMod val="170000"/>
+          </a:schemeClr>
+        </a:solidFill>
         <a:gradFill rotWithShape="1">
           <a:gsLst>
             <a:gs pos="0">
               <a:schemeClr val="phClr">
-                <a:tint val="40000"/>
-                <a:satMod val="350000"/>
+                <a:tint val="93000"/>
+                <a:satMod val="150000"/>
+                <a:shade val="98000"/>
+                <a:lumMod val="102000"/>
               </a:schemeClr>
             </a:gs>
-            <a:gs pos="40000">
+            <a:gs pos="50000">
               <a:schemeClr val="phClr">
-                <a:tint val="45000"/>
-                <a:shade val="99000"/>
-                <a:satMod val="350000"/>
+                <a:tint val="98000"/>
+                <a:satMod val="130000"/>
+                <a:shade val="90000"/>
+                <a:lumMod val="103000"/>
               </a:schemeClr>
             </a:gs>
             <a:gs pos="100000">
               <a:schemeClr val="phClr">
-                <a:shade val="20000"/>
-                <a:satMod val="255000"/>
+                <a:shade val="63000"/>
+                <a:satMod val="120000"/>
               </a:schemeClr>
             </a:gs>
           </a:gsLst>
-          <a:path path="circle">
-            <a:fillToRect l="50000" t="-80000" r="50000" b="180000"/>
-          </a:path>
-        </a:gradFill>
-        <a:gradFill rotWithShape="1">
-          <a:gsLst>
-            <a:gs pos="0">
-              <a:schemeClr val="phClr">
-                <a:tint val="80000"/>
-                <a:satMod val="300000"/>
-              </a:schemeClr>
-            </a:gs>
-            <a:gs pos="100000">
-              <a:schemeClr val="phClr">
-                <a:shade val="30000"/>
-                <a:satMod val="200000"/>
-              </a:schemeClr>
-            </a:gs>
-          </a:gsLst>
-          <a:path path="circle">
-            <a:fillToRect l="50000" t="50000" r="50000" b="50000"/>
-          </a:path>
+          <a:lin ang="5400000" scaled="0"/>
         </a:gradFill>
       </a:bgFillStyleLst>
     </a:fmtScheme>
   </a:themeElements>
   <a:objectDefaults>
-    <a:spDef>
-      <a:spPr/>
-      <a:bodyPr/>
-      <a:lstStyle/>
-      <a:style>
-        <a:lnRef idx="1">
-          <a:schemeClr val="accent1"/>
-        </a:lnRef>
-        <a:fillRef idx="3">
-          <a:schemeClr val="accent1"/>
-        </a:fillRef>
-        <a:effectRef idx="2">
-          <a:schemeClr val="accent1"/>
-        </a:effectRef>
-        <a:fontRef idx="minor">
-          <a:schemeClr val="lt1"/>
-        </a:fontRef>
-      </a:style>
-    </a:spDef>
     <a:lnDef>
       <a:spPr/>
       <a:bodyPr/>
@@ -14780,5 +15088,10 @@
     </a:lnDef>
   </a:objectDefaults>
   <a:extraClrSchemeLst/>
+  <a:extLst>
+    <a:ext uri="{05A4C25C-085E-4340-85A3-A5531E510DB2}">
+      <thm15:themeFamily xmlns:thm15="http://schemas.microsoft.com/office/thememl/2012/main" name="Office Theme" id="{2E142A2C-CD16-42D6-873A-C26D2A0506FA}" vid="{1BDDFF52-6CD6-40A5-AB3C-68EB2F1E4D0A}"/>
+    </a:ext>
+  </a:extLst>
 </a:theme>
 </file>